--- a/data-eng/decks/w6d3s2.pptx
+++ b/data-eng/decks/w6d3s2.pptx
@@ -3100,7 +3100,7 @@
       <p:grpSpPr/>
       <p:sp>
         <p:nvSpPr>
-          <p:cNvPr id="2" name="Oval 1"/>
+          <p:cNvPr id="2" name="deckgen:decor"/>
           <p:cNvSpPr/>
           <p:nvPr/>
         </p:nvSpPr>
@@ -3130,7 +3130,7 @@
       </p:sp>
       <p:sp>
         <p:nvSpPr>
-          <p:cNvPr id="3" name="Oval 2"/>
+          <p:cNvPr id="3" name="deckgen:decor"/>
           <p:cNvSpPr/>
           <p:nvPr/>
         </p:nvSpPr>
@@ -3160,7 +3160,7 @@
       </p:sp>
       <p:sp>
         <p:nvSpPr>
-          <p:cNvPr id="4" name="Oval 3"/>
+          <p:cNvPr id="4" name="deckgen:decor"/>
           <p:cNvSpPr/>
           <p:nvPr/>
         </p:nvSpPr>
@@ -3190,7 +3190,7 @@
       </p:sp>
       <p:sp>
         <p:nvSpPr>
-          <p:cNvPr id="5" name="Rectangle 4"/>
+          <p:cNvPr id="5" name="deckgen:decor"/>
           <p:cNvSpPr/>
           <p:nvPr/>
         </p:nvSpPr>
@@ -3220,7 +3220,7 @@
       </p:sp>
       <p:sp>
         <p:nvSpPr>
-          <p:cNvPr id="6" name="Oval 5"/>
+          <p:cNvPr id="6" name="deckgen:decor"/>
           <p:cNvSpPr/>
           <p:nvPr/>
         </p:nvSpPr>
@@ -3250,7 +3250,7 @@
       </p:sp>
       <p:sp>
         <p:nvSpPr>
-          <p:cNvPr id="7" name="Oval 6"/>
+          <p:cNvPr id="7" name="deckgen:decor"/>
           <p:cNvSpPr/>
           <p:nvPr/>
         </p:nvSpPr>
@@ -3280,7 +3280,7 @@
       </p:sp>
       <p:sp>
         <p:nvSpPr>
-          <p:cNvPr id="8" name="Oval 7"/>
+          <p:cNvPr id="8" name="deckgen:decor"/>
           <p:cNvSpPr/>
           <p:nvPr/>
         </p:nvSpPr>
@@ -3310,7 +3310,7 @@
       </p:sp>
       <p:sp>
         <p:nvSpPr>
-          <p:cNvPr id="9" name="Oval 8"/>
+          <p:cNvPr id="9" name="deckgen:decor"/>
           <p:cNvSpPr/>
           <p:nvPr/>
         </p:nvSpPr>
@@ -3340,7 +3340,7 @@
       </p:sp>
       <p:sp>
         <p:nvSpPr>
-          <p:cNvPr id="10" name="Rectangle 9"/>
+          <p:cNvPr id="10" name="deckgen:decor"/>
           <p:cNvSpPr/>
           <p:nvPr/>
         </p:nvSpPr>
@@ -3618,7 +3618,7 @@
       <p:grpSpPr/>
       <p:sp>
         <p:nvSpPr>
-          <p:cNvPr id="2" name="Oval 1"/>
+          <p:cNvPr id="2" name="deckgen:decor"/>
           <p:cNvSpPr/>
           <p:nvPr/>
         </p:nvSpPr>
@@ -3648,7 +3648,7 @@
       </p:sp>
       <p:sp>
         <p:nvSpPr>
-          <p:cNvPr id="3" name="Oval 2"/>
+          <p:cNvPr id="3" name="deckgen:decor"/>
           <p:cNvSpPr/>
           <p:nvPr/>
         </p:nvSpPr>
@@ -3678,7 +3678,7 @@
       </p:sp>
       <p:sp>
         <p:nvSpPr>
-          <p:cNvPr id="4" name="Oval 3"/>
+          <p:cNvPr id="4" name="deckgen:decor"/>
           <p:cNvSpPr/>
           <p:nvPr/>
         </p:nvSpPr>
@@ -4901,7 +4901,7 @@
       <p:grpSpPr/>
       <p:sp>
         <p:nvSpPr>
-          <p:cNvPr id="2" name="Oval 1"/>
+          <p:cNvPr id="2" name="deckgen:decor"/>
           <p:cNvSpPr/>
           <p:nvPr/>
         </p:nvSpPr>
@@ -4931,7 +4931,7 @@
       </p:sp>
       <p:sp>
         <p:nvSpPr>
-          <p:cNvPr id="3" name="Oval 2"/>
+          <p:cNvPr id="3" name="deckgen:decor"/>
           <p:cNvSpPr/>
           <p:nvPr/>
         </p:nvSpPr>
@@ -5708,7 +5708,7 @@
       <p:grpSpPr/>
       <p:sp>
         <p:nvSpPr>
-          <p:cNvPr id="2" name="Oval 1"/>
+          <p:cNvPr id="2" name="deckgen:decor"/>
           <p:cNvSpPr/>
           <p:nvPr/>
         </p:nvSpPr>
@@ -5738,7 +5738,7 @@
       </p:sp>
       <p:sp>
         <p:nvSpPr>
-          <p:cNvPr id="3" name="Oval 2"/>
+          <p:cNvPr id="3" name="deckgen:decor"/>
           <p:cNvSpPr/>
           <p:nvPr/>
         </p:nvSpPr>
@@ -5768,7 +5768,7 @@
       </p:sp>
       <p:sp>
         <p:nvSpPr>
-          <p:cNvPr id="4" name="Oval 3"/>
+          <p:cNvPr id="4" name="deckgen:decor"/>
           <p:cNvSpPr/>
           <p:nvPr/>
         </p:nvSpPr>
@@ -6699,7 +6699,7 @@
       <p:grpSpPr/>
       <p:sp>
         <p:nvSpPr>
-          <p:cNvPr id="2" name="Oval 1"/>
+          <p:cNvPr id="2" name="deckgen:decor"/>
           <p:cNvSpPr/>
           <p:nvPr/>
         </p:nvSpPr>
@@ -6729,7 +6729,7 @@
       </p:sp>
       <p:sp>
         <p:nvSpPr>
-          <p:cNvPr id="3" name="Oval 2"/>
+          <p:cNvPr id="3" name="deckgen:decor"/>
           <p:cNvSpPr/>
           <p:nvPr/>
         </p:nvSpPr>
@@ -6759,7 +6759,7 @@
       </p:sp>
       <p:sp>
         <p:nvSpPr>
-          <p:cNvPr id="4" name="Oval 3"/>
+          <p:cNvPr id="4" name="deckgen:decor"/>
           <p:cNvSpPr/>
           <p:nvPr/>
         </p:nvSpPr>
@@ -7892,7 +7892,7 @@
       <p:grpSpPr/>
       <p:sp>
         <p:nvSpPr>
-          <p:cNvPr id="2" name="Oval 1"/>
+          <p:cNvPr id="2" name="deckgen:decor"/>
           <p:cNvSpPr/>
           <p:nvPr/>
         </p:nvSpPr>
@@ -7922,7 +7922,7 @@
       </p:sp>
       <p:sp>
         <p:nvSpPr>
-          <p:cNvPr id="3" name="Oval 2"/>
+          <p:cNvPr id="3" name="deckgen:decor"/>
           <p:cNvSpPr/>
           <p:nvPr/>
         </p:nvSpPr>
@@ -7952,7 +7952,7 @@
       </p:sp>
       <p:sp>
         <p:nvSpPr>
-          <p:cNvPr id="4" name="Oval 3"/>
+          <p:cNvPr id="4" name="deckgen:decor"/>
           <p:cNvSpPr/>
           <p:nvPr/>
         </p:nvSpPr>
@@ -8985,7 +8985,7 @@
       <p:grpSpPr/>
       <p:sp>
         <p:nvSpPr>
-          <p:cNvPr id="2" name="Oval 1"/>
+          <p:cNvPr id="2" name="deckgen:decor"/>
           <p:cNvSpPr/>
           <p:nvPr/>
         </p:nvSpPr>
@@ -9015,7 +9015,7 @@
       </p:sp>
       <p:sp>
         <p:nvSpPr>
-          <p:cNvPr id="3" name="Oval 2"/>
+          <p:cNvPr id="3" name="deckgen:decor"/>
           <p:cNvSpPr/>
           <p:nvPr/>
         </p:nvSpPr>
@@ -9045,7 +9045,7 @@
       </p:sp>
       <p:sp>
         <p:nvSpPr>
-          <p:cNvPr id="4" name="Oval 3"/>
+          <p:cNvPr id="4" name="deckgen:decor"/>
           <p:cNvSpPr/>
           <p:nvPr/>
         </p:nvSpPr>
@@ -10441,7 +10441,7 @@
       <p:grpSpPr/>
       <p:sp>
         <p:nvSpPr>
-          <p:cNvPr id="2" name="Oval 1"/>
+          <p:cNvPr id="2" name="deckgen:decor"/>
           <p:cNvSpPr/>
           <p:nvPr/>
         </p:nvSpPr>
@@ -10471,7 +10471,7 @@
       </p:sp>
       <p:sp>
         <p:nvSpPr>
-          <p:cNvPr id="3" name="Oval 2"/>
+          <p:cNvPr id="3" name="deckgen:decor"/>
           <p:cNvSpPr/>
           <p:nvPr/>
         </p:nvSpPr>
@@ -10501,7 +10501,7 @@
       </p:sp>
       <p:sp>
         <p:nvSpPr>
-          <p:cNvPr id="4" name="Oval 3"/>
+          <p:cNvPr id="4" name="deckgen:decor"/>
           <p:cNvSpPr/>
           <p:nvPr/>
         </p:nvSpPr>
@@ -11256,7 +11256,7 @@
                 <a:ea typeface="Pretendard"/>
                 <a:cs typeface="Pretendard"/>
               </a:rPr>
-              <a:t>GetOffsetShell</a:t>
+              <a:t>오프셋 조회</a:t>
             </a:r>
           </a:p>
         </p:txBody>
@@ -11297,7 +11297,7 @@
                 <a:ea typeface="Pretendard"/>
                 <a:cs typeface="Pretendard"/>
               </a:rPr>
-              <a:t>실제 쌓인</a:t>
+              <a:t>get-offsets 로</a:t>
             </a:r>
           </a:p>
           <a:p>
@@ -11315,7 +11315,7 @@
                 <a:ea typeface="Pretendard"/>
                 <a:cs typeface="Pretendard"/>
               </a:rPr>
-              <a:t>개수 확인</a:t>
+              <a:t>쌓인 개수 확인</a:t>
             </a:r>
           </a:p>
         </p:txBody>
@@ -11616,7 +11616,7 @@
       <p:grpSpPr/>
       <p:sp>
         <p:nvSpPr>
-          <p:cNvPr id="2" name="Oval 1"/>
+          <p:cNvPr id="2" name="deckgen:decor"/>
           <p:cNvSpPr/>
           <p:nvPr/>
         </p:nvSpPr>
@@ -11646,7 +11646,7 @@
       </p:sp>
       <p:sp>
         <p:nvSpPr>
-          <p:cNvPr id="3" name="Oval 2"/>
+          <p:cNvPr id="3" name="deckgen:decor"/>
           <p:cNvSpPr/>
           <p:nvPr/>
         </p:nvSpPr>
@@ -11676,7 +11676,7 @@
       </p:sp>
       <p:sp>
         <p:nvSpPr>
-          <p:cNvPr id="4" name="Oval 3"/>
+          <p:cNvPr id="4" name="deckgen:decor"/>
           <p:cNvSpPr/>
           <p:nvPr/>
         </p:nvSpPr>
@@ -12069,7 +12069,7 @@
                 <a:ea typeface="Pretendard"/>
                 <a:cs typeface="Pretendard"/>
               </a:rPr>
-              <a:t>GetOffsetShell 이 준 수가 더 적으면 유실 재현</a:t>
+              <a:t>kafka-get-offsets.sh 가 준 수가 더 적으면 유실 재현</a:t>
             </a:r>
           </a:p>
         </p:txBody>
@@ -12677,7 +12677,7 @@
       <p:grpSpPr/>
       <p:sp>
         <p:nvSpPr>
-          <p:cNvPr id="2" name="Oval 1"/>
+          <p:cNvPr id="2" name="deckgen:decor"/>
           <p:cNvSpPr/>
           <p:nvPr/>
         </p:nvSpPr>
@@ -12707,7 +12707,7 @@
       </p:sp>
       <p:sp>
         <p:nvSpPr>
-          <p:cNvPr id="3" name="Oval 2"/>
+          <p:cNvPr id="3" name="deckgen:decor"/>
           <p:cNvSpPr/>
           <p:nvPr/>
         </p:nvSpPr>
@@ -12737,7 +12737,7 @@
       </p:sp>
       <p:sp>
         <p:nvSpPr>
-          <p:cNvPr id="4" name="Oval 3"/>
+          <p:cNvPr id="4" name="deckgen:decor"/>
           <p:cNvSpPr/>
           <p:nvPr/>
         </p:nvSpPr>
@@ -14242,7 +14242,7 @@
       <p:grpSpPr/>
       <p:sp>
         <p:nvSpPr>
-          <p:cNvPr id="2" name="Oval 1"/>
+          <p:cNvPr id="2" name="deckgen:decor"/>
           <p:cNvSpPr/>
           <p:nvPr/>
         </p:nvSpPr>
@@ -14272,7 +14272,7 @@
       </p:sp>
       <p:sp>
         <p:nvSpPr>
-          <p:cNvPr id="3" name="Oval 2"/>
+          <p:cNvPr id="3" name="deckgen:decor"/>
           <p:cNvSpPr/>
           <p:nvPr/>
         </p:nvSpPr>
@@ -14302,7 +14302,7 @@
       </p:sp>
       <p:sp>
         <p:nvSpPr>
-          <p:cNvPr id="4" name="Oval 3"/>
+          <p:cNvPr id="4" name="deckgen:decor"/>
           <p:cNvSpPr/>
           <p:nvPr/>
         </p:nvSpPr>

--- a/data-eng/decks/w6d3s2.pptx
+++ b/data-eng/decks/w6d3s2.pptx
@@ -16,6 +16,8 @@
     <p:sldId id="264" r:id="rId15"/>
     <p:sldId id="265" r:id="rId16"/>
     <p:sldId id="266" r:id="rId17"/>
+    <p:sldId id="267" r:id="rId18"/>
+    <p:sldId id="268" r:id="rId19"/>
   </p:sldIdLst>
   <p:sldSz cx="18288000" cy="10287000" type="screen4x3"/>
   <p:notesSz cx="6858000" cy="9144000"/>
@@ -3742,7 +3744,7 @@
                 <a:ea typeface="Pretendard"/>
                 <a:cs typeface="Pretendard"/>
               </a:rPr>
-              <a:t>확인 포인트</a:t>
+              <a:t>5·6·7단계</a:t>
             </a:r>
           </a:p>
         </p:txBody>
@@ -3783,7 +3785,7 @@
                 <a:ea typeface="Pretendard"/>
                 <a:cs typeface="Pretendard"/>
               </a:rPr>
-              <a:t>이 2.5시간이 끝날 때 확인할 것</a:t>
+              <a:t>이어읽기 · 처음부터 · 수동 커밋 · LAG</a:t>
             </a:r>
           </a:p>
         </p:txBody>
@@ -3826,12 +3828,12 @@
         </p:nvSpPr>
         <p:spPr>
           <a:xfrm>
-            <a:off x="1143000" y="2876550"/>
-            <a:ext cx="16002000" cy="542925"/>
+            <a:off x="1143000" y="2933700"/>
+            <a:ext cx="11430000" cy="1095375"/>
           </a:xfrm>
           <a:prstGeom prst="roundRect">
             <a:avLst>
-              <a:gd name="adj" fmla="val 8771"/>
+              <a:gd name="adj" fmla="val 4347"/>
             </a:avLst>
           </a:prstGeom>
           <a:solidFill>
@@ -3860,8 +3862,8 @@
         </p:nvSpPr>
         <p:spPr>
           <a:xfrm>
-            <a:off x="1390650" y="2881312"/>
-            <a:ext cx="533400" cy="533400"/>
+            <a:off x="1447800" y="3181350"/>
+            <a:ext cx="590550" cy="590550"/>
           </a:xfrm>
           <a:prstGeom prst="ellipse">
             <a:avLst/>
@@ -3890,8 +3892,8 @@
         </p:nvSpPr>
         <p:spPr>
           <a:xfrm>
-            <a:off x="1390650" y="3005138"/>
-            <a:ext cx="533400" cy="323850"/>
+            <a:off x="1447800" y="3333750"/>
+            <a:ext cx="590550" cy="323850"/>
           </a:xfrm>
           <a:prstGeom prst="rect">
             <a:avLst/>
@@ -3910,7 +3912,7 @@
               </a:lnSpc>
             </a:pPr>
             <a:r>
-              <a:rPr sz="2100" b="1">
+              <a:rPr sz="2250" b="1">
                 <a:solidFill>
                   <a:srgbClr val="FFFFFF"/>
                 </a:solidFill>
@@ -3931,27 +3933,27 @@
         </p:nvSpPr>
         <p:spPr>
           <a:xfrm>
-            <a:off x="2190750" y="2876550"/>
-            <a:ext cx="14573250" cy="542925"/>
-          </a:xfrm>
-          <a:prstGeom prst="rect">
-            <a:avLst/>
-          </a:prstGeom>
-          <a:noFill/>
-        </p:spPr>
-        <p:txBody>
-          <a:bodyPr wrap="square" lIns="0" rIns="0" tIns="0" bIns="0" anchor="ctr">
+            <a:off x="2324100" y="3143250"/>
+            <a:ext cx="9906000" cy="400050"/>
+          </a:xfrm>
+          <a:prstGeom prst="rect">
+            <a:avLst/>
+          </a:prstGeom>
+          <a:noFill/>
+        </p:spPr>
+        <p:txBody>
+          <a:bodyPr wrap="square" lIns="0" rIns="0" tIns="0" bIns="0" anchor="t">
             <a:spAutoFit/>
           </a:bodyPr>
           <a:lstStyle/>
           <a:p>
             <a:pPr algn="l">
               <a:lnSpc>
-                <a:spcPct val="100000"/>
-              </a:lnSpc>
-            </a:pPr>
-            <a:r>
-              <a:rPr sz="2100" b="1">
+                <a:spcPct val="110000"/>
+              </a:lnSpc>
+            </a:pPr>
+            <a:r>
+              <a:rPr sz="2475" b="1">
                 <a:solidFill>
                   <a:srgbClr val="0D2B5E"/>
                 </a:solidFill>
@@ -3959,25 +3961,66 @@
                 <a:ea typeface="Pretendard"/>
                 <a:cs typeface="Pretendard"/>
               </a:rPr>
-              <a:t>「전송 완료 … partition=N offset=M」 30줄, 같은 키는 같은 partition</a:t>
-            </a:r>
-          </a:p>
-        </p:txBody>
-      </p:sp>
-      <p:sp>
-        <p:nvSpPr>
-          <p:cNvPr id="12" name="Rounded Rectangle 11"/>
-          <p:cNvSpPr/>
-          <p:nvPr/>
-        </p:nvSpPr>
-        <p:spPr>
-          <a:xfrm>
-            <a:off x="1143000" y="3533775"/>
-            <a:ext cx="16002000" cy="542925"/>
+              <a:t>같은 그룹으로 다시 켜면 — 이어읽기</a:t>
+            </a:r>
+          </a:p>
+        </p:txBody>
+      </p:sp>
+      <p:sp>
+        <p:nvSpPr>
+          <p:cNvPr id="12" name="TextBox 11"/>
+          <p:cNvSpPr txBox="1"/>
+          <p:nvPr/>
+        </p:nvSpPr>
+        <p:spPr>
+          <a:xfrm>
+            <a:off x="2324100" y="3543300"/>
+            <a:ext cx="9906000" cy="361950"/>
+          </a:xfrm>
+          <a:prstGeom prst="rect">
+            <a:avLst/>
+          </a:prstGeom>
+          <a:noFill/>
+        </p:spPr>
+        <p:txBody>
+          <a:bodyPr wrap="square" lIns="0" rIns="0" tIns="0" bIns="0" anchor="t">
+            <a:spAutoFit/>
+          </a:bodyPr>
+          <a:lstStyle/>
+          <a:p>
+            <a:pPr algn="l">
+              <a:lnSpc>
+                <a:spcPct val="120000"/>
+              </a:lnSpc>
+            </a:pPr>
+            <a:r>
+              <a:rPr sz="2025" b="0">
+                <a:solidFill>
+                  <a:srgbClr val="3D3D3D"/>
+                </a:solidFill>
+                <a:latin typeface="Pretendard"/>
+                <a:ea typeface="Pretendard"/>
+                <a:cs typeface="Pretendard"/>
+              </a:rPr>
+              <a:t>오프셋이 커밋되어 있어 이미 집계한 메시지를 다시 읽지 않는다</a:t>
+            </a:r>
+          </a:p>
+        </p:txBody>
+      </p:sp>
+      <p:sp>
+        <p:nvSpPr>
+          <p:cNvPr id="13" name="Rounded Rectangle 12"/>
+          <p:cNvSpPr/>
+          <p:nvPr/>
+        </p:nvSpPr>
+        <p:spPr>
+          <a:xfrm>
+            <a:off x="1143000" y="4200525"/>
+            <a:ext cx="11430000" cy="1095375"/>
           </a:xfrm>
           <a:prstGeom prst="roundRect">
             <a:avLst>
-              <a:gd name="adj" fmla="val 8771"/>
+              <a:gd name="adj" fmla="val 4347"/>
             </a:avLst>
           </a:prstGeom>
           <a:solidFill>
@@ -4000,14 +4043,14 @@
       </p:sp>
       <p:sp>
         <p:nvSpPr>
-          <p:cNvPr id="13" name="Oval 12"/>
-          <p:cNvSpPr/>
-          <p:nvPr/>
-        </p:nvSpPr>
-        <p:spPr>
-          <a:xfrm>
-            <a:off x="1390650" y="3538538"/>
-            <a:ext cx="533400" cy="533400"/>
+          <p:cNvPr id="14" name="Oval 13"/>
+          <p:cNvSpPr/>
+          <p:nvPr/>
+        </p:nvSpPr>
+        <p:spPr>
+          <a:xfrm>
+            <a:off x="1447800" y="4448175"/>
+            <a:ext cx="590550" cy="590550"/>
           </a:xfrm>
           <a:prstGeom prst="ellipse">
             <a:avLst/>
@@ -4030,14 +4073,14 @@
       </p:sp>
       <p:sp>
         <p:nvSpPr>
-          <p:cNvPr id="14" name="TextBox 13"/>
-          <p:cNvSpPr txBox="1"/>
-          <p:nvPr/>
-        </p:nvSpPr>
-        <p:spPr>
-          <a:xfrm>
-            <a:off x="1390650" y="3662362"/>
-            <a:ext cx="533400" cy="323850"/>
+          <p:cNvPr id="15" name="TextBox 14"/>
+          <p:cNvSpPr txBox="1"/>
+          <p:nvPr/>
+        </p:nvSpPr>
+        <p:spPr>
+          <a:xfrm>
+            <a:off x="1447800" y="4600575"/>
+            <a:ext cx="590550" cy="323850"/>
           </a:xfrm>
           <a:prstGeom prst="rect">
             <a:avLst/>
@@ -4056,7 +4099,7 @@
               </a:lnSpc>
             </a:pPr>
             <a:r>
-              <a:rPr sz="2100" b="1">
+              <a:rPr sz="2250" b="1">
                 <a:solidFill>
                   <a:srgbClr val="FFFFFF"/>
                 </a:solidFill>
@@ -4071,33 +4114,33 @@
       </p:sp>
       <p:sp>
         <p:nvSpPr>
-          <p:cNvPr id="15" name="TextBox 14"/>
-          <p:cNvSpPr txBox="1"/>
-          <p:nvPr/>
-        </p:nvSpPr>
-        <p:spPr>
-          <a:xfrm>
-            <a:off x="2190750" y="3533775"/>
-            <a:ext cx="14573250" cy="542925"/>
-          </a:xfrm>
-          <a:prstGeom prst="rect">
-            <a:avLst/>
-          </a:prstGeom>
-          <a:noFill/>
-        </p:spPr>
-        <p:txBody>
-          <a:bodyPr wrap="square" lIns="0" rIns="0" tIns="0" bIns="0" anchor="ctr">
+          <p:cNvPr id="16" name="TextBox 15"/>
+          <p:cNvSpPr txBox="1"/>
+          <p:nvPr/>
+        </p:nvSpPr>
+        <p:spPr>
+          <a:xfrm>
+            <a:off x="2324100" y="4410075"/>
+            <a:ext cx="9906000" cy="400050"/>
+          </a:xfrm>
+          <a:prstGeom prst="rect">
+            <a:avLst/>
+          </a:prstGeom>
+          <a:noFill/>
+        </p:spPr>
+        <p:txBody>
+          <a:bodyPr wrap="square" lIns="0" rIns="0" tIns="0" bIns="0" anchor="t">
             <a:spAutoFit/>
           </a:bodyPr>
           <a:lstStyle/>
           <a:p>
             <a:pPr algn="l">
               <a:lnSpc>
-                <a:spcPct val="100000"/>
-              </a:lnSpc>
-            </a:pPr>
-            <a:r>
-              <a:rPr sz="2100" b="1">
+                <a:spcPct val="110000"/>
+              </a:lnSpc>
+            </a:pPr>
+            <a:r>
+              <a:rPr sz="2475" b="1">
                 <a:solidFill>
                   <a:srgbClr val="0D2B5E"/>
                 </a:solidFill>
@@ -4105,25 +4148,66 @@
                 <a:ea typeface="Pretendard"/>
                 <a:cs typeface="Pretendard"/>
               </a:rPr>
-              <a:t>flush 없이 보낸 orders-test 는 1000 보다 적을 수 있다</a:t>
-            </a:r>
-          </a:p>
-        </p:txBody>
-      </p:sp>
-      <p:sp>
-        <p:nvSpPr>
-          <p:cNvPr id="16" name="Rounded Rectangle 15"/>
-          <p:cNvSpPr/>
-          <p:nvPr/>
-        </p:nvSpPr>
-        <p:spPr>
-          <a:xfrm>
-            <a:off x="1143000" y="4191000"/>
-            <a:ext cx="16002000" cy="542925"/>
+              <a:t>group.id 를 order-agg-2 로 — 처음부터</a:t>
+            </a:r>
+          </a:p>
+        </p:txBody>
+      </p:sp>
+      <p:sp>
+        <p:nvSpPr>
+          <p:cNvPr id="17" name="TextBox 16"/>
+          <p:cNvSpPr txBox="1"/>
+          <p:nvPr/>
+        </p:nvSpPr>
+        <p:spPr>
+          <a:xfrm>
+            <a:off x="2324100" y="4810125"/>
+            <a:ext cx="9906000" cy="361950"/>
+          </a:xfrm>
+          <a:prstGeom prst="rect">
+            <a:avLst/>
+          </a:prstGeom>
+          <a:noFill/>
+        </p:spPr>
+        <p:txBody>
+          <a:bodyPr wrap="square" lIns="0" rIns="0" tIns="0" bIns="0" anchor="t">
+            <a:spAutoFit/>
+          </a:bodyPr>
+          <a:lstStyle/>
+          <a:p>
+            <a:pPr algn="l">
+              <a:lnSpc>
+                <a:spcPct val="120000"/>
+              </a:lnSpc>
+            </a:pPr>
+            <a:r>
+              <a:rPr sz="2025" b="0">
+                <a:solidFill>
+                  <a:srgbClr val="3D3D3D"/>
+                </a:solidFill>
+                <a:latin typeface="Pretendard"/>
+                <a:ea typeface="Pretendard"/>
+                <a:cs typeface="Pretendard"/>
+              </a:rPr>
+              <a:t>earliest 가 새 그룹에만 적용된다는 이론을 확인</a:t>
+            </a:r>
+          </a:p>
+        </p:txBody>
+      </p:sp>
+      <p:sp>
+        <p:nvSpPr>
+          <p:cNvPr id="18" name="Rounded Rectangle 17"/>
+          <p:cNvSpPr/>
+          <p:nvPr/>
+        </p:nvSpPr>
+        <p:spPr>
+          <a:xfrm>
+            <a:off x="1143000" y="5467350"/>
+            <a:ext cx="11430000" cy="1095375"/>
           </a:xfrm>
           <a:prstGeom prst="roundRect">
             <a:avLst>
-              <a:gd name="adj" fmla="val 8771"/>
+              <a:gd name="adj" fmla="val 4347"/>
             </a:avLst>
           </a:prstGeom>
           <a:solidFill>
@@ -4146,14 +4230,14 @@
       </p:sp>
       <p:sp>
         <p:nvSpPr>
-          <p:cNvPr id="17" name="Oval 16"/>
-          <p:cNvSpPr/>
-          <p:nvPr/>
-        </p:nvSpPr>
-        <p:spPr>
-          <a:xfrm>
-            <a:off x="1390650" y="4195762"/>
-            <a:ext cx="533400" cy="533400"/>
+          <p:cNvPr id="19" name="Oval 18"/>
+          <p:cNvSpPr/>
+          <p:nvPr/>
+        </p:nvSpPr>
+        <p:spPr>
+          <a:xfrm>
+            <a:off x="1447800" y="5715000"/>
+            <a:ext cx="590550" cy="590550"/>
           </a:xfrm>
           <a:prstGeom prst="ellipse">
             <a:avLst/>
@@ -4176,14 +4260,14 @@
       </p:sp>
       <p:sp>
         <p:nvSpPr>
-          <p:cNvPr id="18" name="TextBox 17"/>
-          <p:cNvSpPr txBox="1"/>
-          <p:nvPr/>
-        </p:nvSpPr>
-        <p:spPr>
-          <a:xfrm>
-            <a:off x="1390650" y="4319588"/>
-            <a:ext cx="533400" cy="323850"/>
+          <p:cNvPr id="20" name="TextBox 19"/>
+          <p:cNvSpPr txBox="1"/>
+          <p:nvPr/>
+        </p:nvSpPr>
+        <p:spPr>
+          <a:xfrm>
+            <a:off x="1447800" y="5867400"/>
+            <a:ext cx="590550" cy="323850"/>
           </a:xfrm>
           <a:prstGeom prst="rect">
             <a:avLst/>
@@ -4202,7 +4286,7 @@
               </a:lnSpc>
             </a:pPr>
             <a:r>
-              <a:rPr sz="2100" b="1">
+              <a:rPr sz="2250" b="1">
                 <a:solidFill>
                   <a:srgbClr val="FFFFFF"/>
                 </a:solidFill>
@@ -4217,33 +4301,33 @@
       </p:sp>
       <p:sp>
         <p:nvSpPr>
-          <p:cNvPr id="19" name="TextBox 18"/>
-          <p:cNvSpPr txBox="1"/>
-          <p:nvPr/>
-        </p:nvSpPr>
-        <p:spPr>
-          <a:xfrm>
-            <a:off x="2190750" y="4191000"/>
-            <a:ext cx="14573250" cy="542925"/>
-          </a:xfrm>
-          <a:prstGeom prst="rect">
-            <a:avLst/>
-          </a:prstGeom>
-          <a:noFill/>
-        </p:spPr>
-        <p:txBody>
-          <a:bodyPr wrap="square" lIns="0" rIns="0" tIns="0" bIns="0" anchor="ctr">
+          <p:cNvPr id="21" name="TextBox 20"/>
+          <p:cNvSpPr txBox="1"/>
+          <p:nvPr/>
+        </p:nvSpPr>
+        <p:spPr>
+          <a:xfrm>
+            <a:off x="2324100" y="5676900"/>
+            <a:ext cx="9906000" cy="400050"/>
+          </a:xfrm>
+          <a:prstGeom prst="rect">
+            <a:avLst/>
+          </a:prstGeom>
+          <a:noFill/>
+        </p:spPr>
+        <p:txBody>
+          <a:bodyPr wrap="square" lIns="0" rIns="0" tIns="0" bIns="0" anchor="t">
             <a:spAutoFit/>
           </a:bodyPr>
           <a:lstStyle/>
           <a:p>
             <a:pPr algn="l">
               <a:lnSpc>
-                <a:spcPct val="100000"/>
-              </a:lnSpc>
-            </a:pPr>
-            <a:r>
-              <a:rPr sz="2100" b="1">
+                <a:spcPct val="110000"/>
+              </a:lnSpc>
+            </a:pPr>
+            <a:r>
+              <a:rPr sz="2475" b="1">
                 <a:solidFill>
                   <a:srgbClr val="0D2B5E"/>
                 </a:solidFill>
@@ -4251,463 +4335,66 @@
                 <a:ea typeface="Pretendard"/>
                 <a:cs typeface="Pretendard"/>
               </a:rPr>
-              <a:t>Consumer 터미널에 고객별 누적 금액이 늘어난다</a:t>
-            </a:r>
-          </a:p>
-        </p:txBody>
-      </p:sp>
-      <p:sp>
-        <p:nvSpPr>
-          <p:cNvPr id="20" name="Rounded Rectangle 19"/>
-          <p:cNvSpPr/>
-          <p:nvPr/>
-        </p:nvSpPr>
-        <p:spPr>
-          <a:xfrm>
-            <a:off x="1143000" y="4848225"/>
-            <a:ext cx="16002000" cy="542925"/>
+              <a:t>enable.auto.commit False + c.commit(msg)</a:t>
+            </a:r>
+          </a:p>
+        </p:txBody>
+      </p:sp>
+      <p:sp>
+        <p:nvSpPr>
+          <p:cNvPr id="22" name="TextBox 21"/>
+          <p:cNvSpPr txBox="1"/>
+          <p:nvPr/>
+        </p:nvSpPr>
+        <p:spPr>
+          <a:xfrm>
+            <a:off x="2324100" y="6076950"/>
+            <a:ext cx="9906000" cy="361950"/>
+          </a:xfrm>
+          <a:prstGeom prst="rect">
+            <a:avLst/>
+          </a:prstGeom>
+          <a:noFill/>
+        </p:spPr>
+        <p:txBody>
+          <a:bodyPr wrap="square" lIns="0" rIns="0" tIns="0" bIns="0" anchor="t">
+            <a:spAutoFit/>
+          </a:bodyPr>
+          <a:lstStyle/>
+          <a:p>
+            <a:pPr algn="l">
+              <a:lnSpc>
+                <a:spcPct val="120000"/>
+              </a:lnSpc>
+            </a:pPr>
+            <a:r>
+              <a:rPr sz="2025" b="0">
+                <a:solidFill>
+                  <a:srgbClr val="3D3D3D"/>
+                </a:solidFill>
+                <a:latin typeface="Pretendard"/>
+                <a:ea typeface="Pretendard"/>
+                <a:cs typeface="Pretendard"/>
+              </a:rPr>
+              <a:t>5의 배수 금액이면 예외 — 커밋하지 않고 break, 다시 켜면 그 메시지부터</a:t>
+            </a:r>
+          </a:p>
+        </p:txBody>
+      </p:sp>
+      <p:sp>
+        <p:nvSpPr>
+          <p:cNvPr id="23" name="Rounded Rectangle 22"/>
+          <p:cNvSpPr/>
+          <p:nvPr/>
+        </p:nvSpPr>
+        <p:spPr>
+          <a:xfrm>
+            <a:off x="13144500" y="2933700"/>
+            <a:ext cx="4000500" cy="3629025"/>
           </a:xfrm>
           <a:prstGeom prst="roundRect">
             <a:avLst>
-              <a:gd name="adj" fmla="val 8771"/>
-            </a:avLst>
-          </a:prstGeom>
-          <a:solidFill>
-            <a:srgbClr val="FAFBFD"/>
-          </a:solidFill>
-          <a:ln w="9525">
-            <a:solidFill>
-              <a:srgbClr val="DCE1E8"/>
-            </a:solidFill>
-          </a:ln>
-          <a:effectLst/>
-        </p:spPr>
-        <p:txBody>
-          <a:bodyPr rtlCol="0" anchor="ctr" wrap="square"/>
-          <a:lstStyle/>
-          <a:p>
-            <a:pPr algn="ctr"/>
-          </a:p>
-        </p:txBody>
-      </p:sp>
-      <p:sp>
-        <p:nvSpPr>
-          <p:cNvPr id="21" name="Oval 20"/>
-          <p:cNvSpPr/>
-          <p:nvPr/>
-        </p:nvSpPr>
-        <p:spPr>
-          <a:xfrm>
-            <a:off x="1390650" y="4852988"/>
-            <a:ext cx="533400" cy="533400"/>
-          </a:xfrm>
-          <a:prstGeom prst="ellipse">
-            <a:avLst/>
-          </a:prstGeom>
-          <a:solidFill>
-            <a:srgbClr val="0D2B5E"/>
-          </a:solidFill>
-          <a:ln>
-            <a:noFill/>
-          </a:ln>
-          <a:effectLst/>
-        </p:spPr>
-        <p:txBody>
-          <a:bodyPr rtlCol="0" anchor="ctr" wrap="square"/>
-          <a:lstStyle/>
-          <a:p>
-            <a:pPr algn="ctr"/>
-          </a:p>
-        </p:txBody>
-      </p:sp>
-      <p:sp>
-        <p:nvSpPr>
-          <p:cNvPr id="22" name="TextBox 21"/>
-          <p:cNvSpPr txBox="1"/>
-          <p:nvPr/>
-        </p:nvSpPr>
-        <p:spPr>
-          <a:xfrm>
-            <a:off x="1390650" y="4976812"/>
-            <a:ext cx="533400" cy="323850"/>
-          </a:xfrm>
-          <a:prstGeom prst="rect">
-            <a:avLst/>
-          </a:prstGeom>
-          <a:noFill/>
-        </p:spPr>
-        <p:txBody>
-          <a:bodyPr wrap="square" lIns="0" rIns="0" tIns="0" bIns="0" anchor="t">
-            <a:spAutoFit/>
-          </a:bodyPr>
-          <a:lstStyle/>
-          <a:p>
-            <a:pPr algn="ctr">
-              <a:lnSpc>
-                <a:spcPct val="100000"/>
-              </a:lnSpc>
-            </a:pPr>
-            <a:r>
-              <a:rPr sz="2100" b="1">
-                <a:solidFill>
-                  <a:srgbClr val="FFFFFF"/>
-                </a:solidFill>
-                <a:latin typeface="Pretendard"/>
-                <a:ea typeface="Pretendard"/>
-                <a:cs typeface="Pretendard"/>
-              </a:rPr>
-              <a:t>4</a:t>
-            </a:r>
-          </a:p>
-        </p:txBody>
-      </p:sp>
-      <p:sp>
-        <p:nvSpPr>
-          <p:cNvPr id="23" name="TextBox 22"/>
-          <p:cNvSpPr txBox="1"/>
-          <p:nvPr/>
-        </p:nvSpPr>
-        <p:spPr>
-          <a:xfrm>
-            <a:off x="2190750" y="4848225"/>
-            <a:ext cx="14573250" cy="542925"/>
-          </a:xfrm>
-          <a:prstGeom prst="rect">
-            <a:avLst/>
-          </a:prstGeom>
-          <a:noFill/>
-        </p:spPr>
-        <p:txBody>
-          <a:bodyPr wrap="square" lIns="0" rIns="0" tIns="0" bIns="0" anchor="ctr">
-            <a:spAutoFit/>
-          </a:bodyPr>
-          <a:lstStyle/>
-          <a:p>
-            <a:pPr algn="l">
-              <a:lnSpc>
-                <a:spcPct val="100000"/>
-              </a:lnSpc>
-            </a:pPr>
-            <a:r>
-              <a:rPr sz="2100" b="1">
-                <a:solidFill>
-                  <a:srgbClr val="0D2B5E"/>
-                </a:solidFill>
-                <a:latin typeface="Pretendard"/>
-                <a:ea typeface="Pretendard"/>
-                <a:cs typeface="Pretendard"/>
-              </a:rPr>
-              <a:t>같은 그룹은 새 메시지만, 다른 그룹은 전부 다시 읽는다</a:t>
-            </a:r>
-          </a:p>
-        </p:txBody>
-      </p:sp>
-      <p:sp>
-        <p:nvSpPr>
-          <p:cNvPr id="24" name="Rounded Rectangle 23"/>
-          <p:cNvSpPr/>
-          <p:nvPr/>
-        </p:nvSpPr>
-        <p:spPr>
-          <a:xfrm>
-            <a:off x="1143000" y="5505450"/>
-            <a:ext cx="16002000" cy="542925"/>
-          </a:xfrm>
-          <a:prstGeom prst="roundRect">
-            <a:avLst>
-              <a:gd name="adj" fmla="val 8771"/>
-            </a:avLst>
-          </a:prstGeom>
-          <a:solidFill>
-            <a:srgbClr val="FAFBFD"/>
-          </a:solidFill>
-          <a:ln w="9525">
-            <a:solidFill>
-              <a:srgbClr val="DCE1E8"/>
-            </a:solidFill>
-          </a:ln>
-          <a:effectLst/>
-        </p:spPr>
-        <p:txBody>
-          <a:bodyPr rtlCol="0" anchor="ctr" wrap="square"/>
-          <a:lstStyle/>
-          <a:p>
-            <a:pPr algn="ctr"/>
-          </a:p>
-        </p:txBody>
-      </p:sp>
-      <p:sp>
-        <p:nvSpPr>
-          <p:cNvPr id="25" name="Oval 24"/>
-          <p:cNvSpPr/>
-          <p:nvPr/>
-        </p:nvSpPr>
-        <p:spPr>
-          <a:xfrm>
-            <a:off x="1390650" y="5510212"/>
-            <a:ext cx="533400" cy="533400"/>
-          </a:xfrm>
-          <a:prstGeom prst="ellipse">
-            <a:avLst/>
-          </a:prstGeom>
-          <a:solidFill>
-            <a:srgbClr val="0D2B5E"/>
-          </a:solidFill>
-          <a:ln>
-            <a:noFill/>
-          </a:ln>
-          <a:effectLst/>
-        </p:spPr>
-        <p:txBody>
-          <a:bodyPr rtlCol="0" anchor="ctr" wrap="square"/>
-          <a:lstStyle/>
-          <a:p>
-            <a:pPr algn="ctr"/>
-          </a:p>
-        </p:txBody>
-      </p:sp>
-      <p:sp>
-        <p:nvSpPr>
-          <p:cNvPr id="26" name="TextBox 25"/>
-          <p:cNvSpPr txBox="1"/>
-          <p:nvPr/>
-        </p:nvSpPr>
-        <p:spPr>
-          <a:xfrm>
-            <a:off x="1390650" y="5634038"/>
-            <a:ext cx="533400" cy="323850"/>
-          </a:xfrm>
-          <a:prstGeom prst="rect">
-            <a:avLst/>
-          </a:prstGeom>
-          <a:noFill/>
-        </p:spPr>
-        <p:txBody>
-          <a:bodyPr wrap="square" lIns="0" rIns="0" tIns="0" bIns="0" anchor="t">
-            <a:spAutoFit/>
-          </a:bodyPr>
-          <a:lstStyle/>
-          <a:p>
-            <a:pPr algn="ctr">
-              <a:lnSpc>
-                <a:spcPct val="100000"/>
-              </a:lnSpc>
-            </a:pPr>
-            <a:r>
-              <a:rPr sz="2100" b="1">
-                <a:solidFill>
-                  <a:srgbClr val="FFFFFF"/>
-                </a:solidFill>
-                <a:latin typeface="Pretendard"/>
-                <a:ea typeface="Pretendard"/>
-                <a:cs typeface="Pretendard"/>
-              </a:rPr>
-              <a:t>5</a:t>
-            </a:r>
-          </a:p>
-        </p:txBody>
-      </p:sp>
-      <p:sp>
-        <p:nvSpPr>
-          <p:cNvPr id="27" name="TextBox 26"/>
-          <p:cNvSpPr txBox="1"/>
-          <p:nvPr/>
-        </p:nvSpPr>
-        <p:spPr>
-          <a:xfrm>
-            <a:off x="2190750" y="5505450"/>
-            <a:ext cx="14573250" cy="542925"/>
-          </a:xfrm>
-          <a:prstGeom prst="rect">
-            <a:avLst/>
-          </a:prstGeom>
-          <a:noFill/>
-        </p:spPr>
-        <p:txBody>
-          <a:bodyPr wrap="square" lIns="0" rIns="0" tIns="0" bIns="0" anchor="ctr">
-            <a:spAutoFit/>
-          </a:bodyPr>
-          <a:lstStyle/>
-          <a:p>
-            <a:pPr algn="l">
-              <a:lnSpc>
-                <a:spcPct val="100000"/>
-              </a:lnSpc>
-            </a:pPr>
-            <a:r>
-              <a:rPr sz="2100" b="1">
-                <a:solidFill>
-                  <a:srgbClr val="0D2B5E"/>
-                </a:solidFill>
-                <a:latin typeface="Pretendard"/>
-                <a:ea typeface="Pretendard"/>
-                <a:cs typeface="Pretendard"/>
-              </a:rPr>
-              <a:t>수동 커밋에서 실패한 메시지는 재시작 때 다시 읽힌다</a:t>
-            </a:r>
-          </a:p>
-        </p:txBody>
-      </p:sp>
-      <p:sp>
-        <p:nvSpPr>
-          <p:cNvPr id="28" name="Rounded Rectangle 27"/>
-          <p:cNvSpPr/>
-          <p:nvPr/>
-        </p:nvSpPr>
-        <p:spPr>
-          <a:xfrm>
-            <a:off x="1143000" y="6162675"/>
-            <a:ext cx="16002000" cy="542925"/>
-          </a:xfrm>
-          <a:prstGeom prst="roundRect">
-            <a:avLst>
-              <a:gd name="adj" fmla="val 8771"/>
-            </a:avLst>
-          </a:prstGeom>
-          <a:solidFill>
-            <a:srgbClr val="FAFBFD"/>
-          </a:solidFill>
-          <a:ln w="9525">
-            <a:solidFill>
-              <a:srgbClr val="DCE1E8"/>
-            </a:solidFill>
-          </a:ln>
-          <a:effectLst/>
-        </p:spPr>
-        <p:txBody>
-          <a:bodyPr rtlCol="0" anchor="ctr" wrap="square"/>
-          <a:lstStyle/>
-          <a:p>
-            <a:pPr algn="ctr"/>
-          </a:p>
-        </p:txBody>
-      </p:sp>
-      <p:sp>
-        <p:nvSpPr>
-          <p:cNvPr id="29" name="Oval 28"/>
-          <p:cNvSpPr/>
-          <p:nvPr/>
-        </p:nvSpPr>
-        <p:spPr>
-          <a:xfrm>
-            <a:off x="1390650" y="6167438"/>
-            <a:ext cx="533400" cy="533400"/>
-          </a:xfrm>
-          <a:prstGeom prst="ellipse">
-            <a:avLst/>
-          </a:prstGeom>
-          <a:solidFill>
-            <a:srgbClr val="0D2B5E"/>
-          </a:solidFill>
-          <a:ln>
-            <a:noFill/>
-          </a:ln>
-          <a:effectLst/>
-        </p:spPr>
-        <p:txBody>
-          <a:bodyPr rtlCol="0" anchor="ctr" wrap="square"/>
-          <a:lstStyle/>
-          <a:p>
-            <a:pPr algn="ctr"/>
-          </a:p>
-        </p:txBody>
-      </p:sp>
-      <p:sp>
-        <p:nvSpPr>
-          <p:cNvPr id="30" name="TextBox 29"/>
-          <p:cNvSpPr txBox="1"/>
-          <p:nvPr/>
-        </p:nvSpPr>
-        <p:spPr>
-          <a:xfrm>
-            <a:off x="1390650" y="6291262"/>
-            <a:ext cx="533400" cy="323850"/>
-          </a:xfrm>
-          <a:prstGeom prst="rect">
-            <a:avLst/>
-          </a:prstGeom>
-          <a:noFill/>
-        </p:spPr>
-        <p:txBody>
-          <a:bodyPr wrap="square" lIns="0" rIns="0" tIns="0" bIns="0" anchor="t">
-            <a:spAutoFit/>
-          </a:bodyPr>
-          <a:lstStyle/>
-          <a:p>
-            <a:pPr algn="ctr">
-              <a:lnSpc>
-                <a:spcPct val="100000"/>
-              </a:lnSpc>
-            </a:pPr>
-            <a:r>
-              <a:rPr sz="2100" b="1">
-                <a:solidFill>
-                  <a:srgbClr val="FFFFFF"/>
-                </a:solidFill>
-                <a:latin typeface="Pretendard"/>
-                <a:ea typeface="Pretendard"/>
-                <a:cs typeface="Pretendard"/>
-              </a:rPr>
-              <a:t>6</a:t>
-            </a:r>
-          </a:p>
-        </p:txBody>
-      </p:sp>
-      <p:sp>
-        <p:nvSpPr>
-          <p:cNvPr id="31" name="TextBox 30"/>
-          <p:cNvSpPr txBox="1"/>
-          <p:nvPr/>
-        </p:nvSpPr>
-        <p:spPr>
-          <a:xfrm>
-            <a:off x="2190750" y="6162675"/>
-            <a:ext cx="14573250" cy="542925"/>
-          </a:xfrm>
-          <a:prstGeom prst="rect">
-            <a:avLst/>
-          </a:prstGeom>
-          <a:noFill/>
-        </p:spPr>
-        <p:txBody>
-          <a:bodyPr wrap="square" lIns="0" rIns="0" tIns="0" bIns="0" anchor="ctr">
-            <a:spAutoFit/>
-          </a:bodyPr>
-          <a:lstStyle/>
-          <a:p>
-            <a:pPr algn="l">
-              <a:lnSpc>
-                <a:spcPct val="100000"/>
-              </a:lnSpc>
-            </a:pPr>
-            <a:r>
-              <a:rPr sz="2100" b="1">
-                <a:solidFill>
-                  <a:srgbClr val="0D2B5E"/>
-                </a:solidFill>
-                <a:latin typeface="Pretendard"/>
-                <a:ea typeface="Pretendard"/>
-                <a:cs typeface="Pretendard"/>
-              </a:rPr>
-              <a:t>Consumer 를 끄면 LAG 이 쌓이고, 켜면 전 파티션 0 이 된다</a:t>
-            </a:r>
-          </a:p>
-        </p:txBody>
-      </p:sp>
-      <p:sp>
-        <p:nvSpPr>
-          <p:cNvPr id="32" name="Rounded Rectangle 31"/>
-          <p:cNvSpPr/>
-          <p:nvPr/>
-        </p:nvSpPr>
-        <p:spPr>
-          <a:xfrm>
-            <a:off x="1143000" y="6953250"/>
-            <a:ext cx="16002000" cy="876300"/>
-          </a:xfrm>
-          <a:prstGeom prst="roundRect">
-            <a:avLst>
-              <a:gd name="adj" fmla="val 5434"/>
+              <a:gd name="adj" fmla="val 1312"/>
             </a:avLst>
           </a:prstGeom>
           <a:solidFill>
@@ -4730,14 +4417,14 @@
       </p:sp>
       <p:sp>
         <p:nvSpPr>
-          <p:cNvPr id="33" name="TextBox 32"/>
-          <p:cNvSpPr txBox="1"/>
-          <p:nvPr/>
-        </p:nvSpPr>
-        <p:spPr>
-          <a:xfrm>
-            <a:off x="1143000" y="7200900"/>
-            <a:ext cx="16002000" cy="438150"/>
+          <p:cNvPr id="24" name="TextBox 23"/>
+          <p:cNvSpPr txBox="1"/>
+          <p:nvPr/>
+        </p:nvSpPr>
+        <p:spPr>
+          <a:xfrm>
+            <a:off x="13487400" y="3929062"/>
+            <a:ext cx="3314700" cy="304800"/>
           </a:xfrm>
           <a:prstGeom prst="rect">
             <a:avLst/>
@@ -4750,13 +4437,54 @@
           </a:bodyPr>
           <a:lstStyle/>
           <a:p>
-            <a:pPr algn="ctr">
+            <a:pPr algn="l">
               <a:lnSpc>
                 <a:spcPct val="100000"/>
               </a:lnSpc>
             </a:pPr>
             <a:r>
-              <a:rPr sz="2475" b="1">
+              <a:rPr sz="1800" b="1" spc="190">
+                <a:solidFill>
+                  <a:srgbClr val="1E5BC6"/>
+                </a:solidFill>
+                <a:latin typeface="Pretendard"/>
+                <a:ea typeface="Pretendard"/>
+                <a:cs typeface="Pretendard"/>
+              </a:rPr>
+              <a:t>LAG 관찰</a:t>
+            </a:r>
+          </a:p>
+        </p:txBody>
+      </p:sp>
+      <p:sp>
+        <p:nvSpPr>
+          <p:cNvPr id="25" name="TextBox 24"/>
+          <p:cNvSpPr txBox="1"/>
+          <p:nvPr/>
+        </p:nvSpPr>
+        <p:spPr>
+          <a:xfrm>
+            <a:off x="13487400" y="4329112"/>
+            <a:ext cx="3314700" cy="1238250"/>
+          </a:xfrm>
+          <a:prstGeom prst="rect">
+            <a:avLst/>
+          </a:prstGeom>
+          <a:noFill/>
+        </p:spPr>
+        <p:txBody>
+          <a:bodyPr wrap="square" lIns="0" rIns="0" tIns="0" bIns="0" anchor="t">
+            <a:spAutoFit/>
+          </a:bodyPr>
+          <a:lstStyle/>
+          <a:p>
+            <a:pPr algn="l">
+              <a:lnSpc>
+                <a:spcPct val="138000"/>
+              </a:lnSpc>
+            </a:pPr>
+            <a:r>
+              <a:rPr sz="2700" b="1">
                 <a:solidFill>
                   <a:srgbClr val="0D2B5E"/>
                 </a:solidFill>
@@ -4764,14 +4492,103 @@
                 <a:ea typeface="Pretendard"/>
                 <a:cs typeface="Pretendard"/>
               </a:rPr>
-              <a:t>미니 과제: consumer.py 둘 동시 실행 · acks all 추가 · 집계를 파일이나 SQLite 에 저장</a:t>
-            </a:r>
-          </a:p>
-        </p:txBody>
-      </p:sp>
-      <p:sp>
-        <p:nvSpPr>
-          <p:cNvPr id="34" name="Rectangle 33"/>
+              <a:t>꺼 두면 쌓이고</a:t>
+            </a:r>
+          </a:p>
+          <a:p>
+            <a:pPr algn="l">
+              <a:lnSpc>
+                <a:spcPct val="138000"/>
+              </a:lnSpc>
+            </a:pPr>
+            <a:r>
+              <a:rPr sz="2700" b="1">
+                <a:solidFill>
+                  <a:srgbClr val="0D2B5E"/>
+                </a:solidFill>
+                <a:latin typeface="Pretendard"/>
+                <a:ea typeface="Pretendard"/>
+                <a:cs typeface="Pretendard"/>
+              </a:rPr>
+              <a:t>켜면 0</a:t>
+            </a:r>
+          </a:p>
+        </p:txBody>
+      </p:sp>
+      <p:sp>
+        <p:nvSpPr>
+          <p:cNvPr id="26" name="Rectangle 25"/>
+          <p:cNvSpPr/>
+          <p:nvPr/>
+        </p:nvSpPr>
+        <p:spPr>
+          <a:xfrm>
+            <a:off x="1143000" y="7581900"/>
+            <a:ext cx="38100" cy="323850"/>
+          </a:xfrm>
+          <a:prstGeom prst="rect">
+            <a:avLst/>
+          </a:prstGeom>
+          <a:solidFill>
+            <a:srgbClr val="BFD3F5"/>
+          </a:solidFill>
+          <a:ln>
+            <a:noFill/>
+          </a:ln>
+          <a:effectLst/>
+        </p:spPr>
+        <p:txBody>
+          <a:bodyPr rtlCol="0" anchor="ctr" wrap="square"/>
+          <a:lstStyle/>
+          <a:p>
+            <a:pPr algn="ctr"/>
+          </a:p>
+        </p:txBody>
+      </p:sp>
+      <p:sp>
+        <p:nvSpPr>
+          <p:cNvPr id="27" name="TextBox 26"/>
+          <p:cNvSpPr txBox="1"/>
+          <p:nvPr/>
+        </p:nvSpPr>
+        <p:spPr>
+          <a:xfrm>
+            <a:off x="1314450" y="7581900"/>
+            <a:ext cx="15830550" cy="342900"/>
+          </a:xfrm>
+          <a:prstGeom prst="rect">
+            <a:avLst/>
+          </a:prstGeom>
+          <a:noFill/>
+        </p:spPr>
+        <p:txBody>
+          <a:bodyPr wrap="square" lIns="0" rIns="0" tIns="0" bIns="0" anchor="t">
+            <a:spAutoFit/>
+          </a:bodyPr>
+          <a:lstStyle/>
+          <a:p>
+            <a:pPr algn="l">
+              <a:lnSpc>
+                <a:spcPct val="100000"/>
+              </a:lnSpc>
+            </a:pPr>
+            <a:r>
+              <a:rPr sz="1725" b="1">
+                <a:solidFill>
+                  <a:srgbClr val="7D7D7D"/>
+                </a:solidFill>
+                <a:latin typeface="Pretendard"/>
+                <a:ea typeface="Pretendard"/>
+                <a:cs typeface="Pretendard"/>
+              </a:rPr>
+              <a:t>--describe --group order-agg · 꺼 둔 동안 실측 LAG 1번 4 · 2번 26 → 켜면 0 · 0번 줄이 없는 것은 메시지가 없는 칸</a:t>
+            </a:r>
+          </a:p>
+        </p:txBody>
+      </p:sp>
+      <p:sp>
+        <p:nvSpPr>
+          <p:cNvPr id="28" name="Rectangle 27"/>
           <p:cNvSpPr/>
           <p:nvPr/>
         </p:nvSpPr>
@@ -4801,7 +4618,7 @@
       </p:sp>
       <p:sp>
         <p:nvSpPr>
-          <p:cNvPr id="35" name="TextBox 34"/>
+          <p:cNvPr id="29" name="TextBox 28"/>
           <p:cNvSpPr txBox="1"/>
           <p:nvPr/>
         </p:nvSpPr>
@@ -4842,7 +4659,7 @@
       </p:sp>
       <p:sp>
         <p:nvSpPr>
-          <p:cNvPr id="36" name="TextBox 35"/>
+          <p:cNvPr id="30" name="TextBox 29"/>
           <p:cNvSpPr txBox="1"/>
           <p:nvPr/>
         </p:nvSpPr>
@@ -4907,6 +4724,2350 @@
         </p:nvSpPr>
         <p:spPr>
           <a:xfrm>
+            <a:off x="15811500" y="8382000"/>
+            <a:ext cx="4953000" cy="4953000"/>
+          </a:xfrm>
+          <a:prstGeom prst="ellipse">
+            <a:avLst/>
+          </a:prstGeom>
+          <a:solidFill>
+            <a:srgbClr val="F3F6FC"/>
+          </a:solidFill>
+          <a:ln>
+            <a:noFill/>
+          </a:ln>
+          <a:effectLst/>
+        </p:spPr>
+        <p:txBody>
+          <a:bodyPr rtlCol="0" anchor="ctr" wrap="square"/>
+          <a:lstStyle/>
+          <a:p>
+            <a:pPr algn="ctr"/>
+          </a:p>
+        </p:txBody>
+      </p:sp>
+      <p:sp>
+        <p:nvSpPr>
+          <p:cNvPr id="3" name="deckgen:decor"/>
+          <p:cNvSpPr/>
+          <p:nvPr/>
+        </p:nvSpPr>
+        <p:spPr>
+          <a:xfrm>
+            <a:off x="16859250" y="9429750"/>
+            <a:ext cx="2857500" cy="2857500"/>
+          </a:xfrm>
+          <a:prstGeom prst="ellipse">
+            <a:avLst/>
+          </a:prstGeom>
+          <a:solidFill>
+            <a:srgbClr val="FFFFFF"/>
+          </a:solidFill>
+          <a:ln>
+            <a:noFill/>
+          </a:ln>
+          <a:effectLst/>
+        </p:spPr>
+        <p:txBody>
+          <a:bodyPr rtlCol="0" anchor="ctr" wrap="square"/>
+          <a:lstStyle/>
+          <a:p>
+            <a:pPr algn="ctr"/>
+          </a:p>
+        </p:txBody>
+      </p:sp>
+      <p:sp>
+        <p:nvSpPr>
+          <p:cNvPr id="4" name="deckgen:decor"/>
+          <p:cNvSpPr/>
+          <p:nvPr/>
+        </p:nvSpPr>
+        <p:spPr>
+          <a:xfrm>
+            <a:off x="-1428750" y="1428750"/>
+            <a:ext cx="2857500" cy="2857500"/>
+          </a:xfrm>
+          <a:prstGeom prst="ellipse">
+            <a:avLst/>
+          </a:prstGeom>
+          <a:solidFill>
+            <a:srgbClr val="F7F8FA"/>
+          </a:solidFill>
+          <a:ln>
+            <a:noFill/>
+          </a:ln>
+          <a:effectLst/>
+        </p:spPr>
+        <p:txBody>
+          <a:bodyPr rtlCol="0" anchor="ctr" wrap="square"/>
+          <a:lstStyle/>
+          <a:p>
+            <a:pPr algn="ctr"/>
+          </a:p>
+        </p:txBody>
+      </p:sp>
+      <p:sp>
+        <p:nvSpPr>
+          <p:cNvPr id="5" name="TextBox 4"/>
+          <p:cNvSpPr txBox="1"/>
+          <p:nvPr/>
+        </p:nvSpPr>
+        <p:spPr>
+          <a:xfrm>
+            <a:off x="1143000" y="838200"/>
+            <a:ext cx="16002000" cy="342900"/>
+          </a:xfrm>
+          <a:prstGeom prst="rect">
+            <a:avLst/>
+          </a:prstGeom>
+          <a:noFill/>
+        </p:spPr>
+        <p:txBody>
+          <a:bodyPr wrap="square" lIns="0" rIns="0" tIns="0" bIns="0" anchor="t">
+            <a:spAutoFit/>
+          </a:bodyPr>
+          <a:lstStyle/>
+          <a:p>
+            <a:pPr algn="l">
+              <a:lnSpc>
+                <a:spcPct val="100000"/>
+              </a:lnSpc>
+            </a:pPr>
+            <a:r>
+              <a:rPr sz="1950" b="1" spc="160">
+                <a:solidFill>
+                  <a:srgbClr val="1E5BC6"/>
+                </a:solidFill>
+                <a:latin typeface="Pretendard"/>
+                <a:ea typeface="Pretendard"/>
+                <a:cs typeface="Pretendard"/>
+              </a:rPr>
+              <a:t>6단계 — 왜 break 로 멈추나</a:t>
+            </a:r>
+          </a:p>
+        </p:txBody>
+      </p:sp>
+      <p:sp>
+        <p:nvSpPr>
+          <p:cNvPr id="6" name="TextBox 5"/>
+          <p:cNvSpPr txBox="1"/>
+          <p:nvPr/>
+        </p:nvSpPr>
+        <p:spPr>
+          <a:xfrm>
+            <a:off x="1143000" y="1162050"/>
+            <a:ext cx="16002000" cy="762000"/>
+          </a:xfrm>
+          <a:prstGeom prst="rect">
+            <a:avLst/>
+          </a:prstGeom>
+          <a:noFill/>
+        </p:spPr>
+        <p:txBody>
+          <a:bodyPr wrap="square" lIns="0" rIns="0" tIns="0" bIns="0" anchor="t">
+            <a:spAutoFit/>
+          </a:bodyPr>
+          <a:lstStyle/>
+          <a:p>
+            <a:pPr algn="l">
+              <a:lnSpc>
+                <a:spcPct val="100000"/>
+              </a:lnSpc>
+            </a:pPr>
+            <a:r>
+              <a:rPr sz="5100" b="1">
+                <a:solidFill>
+                  <a:srgbClr val="0D2B5E"/>
+                </a:solidFill>
+                <a:latin typeface="Pretendard"/>
+                <a:ea typeface="Pretendard"/>
+                <a:cs typeface="Pretendard"/>
+              </a:rPr>
+              <a:t>커밋은 「이 파티션의 여기까지」라는 뜻</a:t>
+            </a:r>
+          </a:p>
+        </p:txBody>
+      </p:sp>
+      <p:sp>
+        <p:nvSpPr>
+          <p:cNvPr id="7" name="Rectangle 6"/>
+          <p:cNvSpPr/>
+          <p:nvPr/>
+        </p:nvSpPr>
+        <p:spPr>
+          <a:xfrm>
+            <a:off x="1143000" y="2038350"/>
+            <a:ext cx="16002000" cy="28575"/>
+          </a:xfrm>
+          <a:prstGeom prst="rect">
+            <a:avLst/>
+          </a:prstGeom>
+          <a:solidFill>
+            <a:srgbClr val="0D2B5E"/>
+          </a:solidFill>
+          <a:ln>
+            <a:noFill/>
+          </a:ln>
+          <a:effectLst/>
+        </p:spPr>
+        <p:txBody>
+          <a:bodyPr rtlCol="0" anchor="ctr" wrap="square"/>
+          <a:lstStyle/>
+          <a:p>
+            <a:pPr algn="ctr"/>
+          </a:p>
+        </p:txBody>
+      </p:sp>
+      <p:sp>
+        <p:nvSpPr>
+          <p:cNvPr id="8" name="TextBox 7"/>
+          <p:cNvSpPr txBox="1"/>
+          <p:nvPr/>
+        </p:nvSpPr>
+        <p:spPr>
+          <a:xfrm>
+            <a:off x="1143000" y="2857500"/>
+            <a:ext cx="7372350" cy="533400"/>
+          </a:xfrm>
+          <a:prstGeom prst="rect">
+            <a:avLst/>
+          </a:prstGeom>
+          <a:noFill/>
+        </p:spPr>
+        <p:txBody>
+          <a:bodyPr wrap="square" lIns="0" rIns="0" tIns="0" bIns="0" anchor="t">
+            <a:spAutoFit/>
+          </a:bodyPr>
+          <a:lstStyle/>
+          <a:p>
+            <a:pPr algn="l">
+              <a:lnSpc>
+                <a:spcPct val="110000"/>
+              </a:lnSpc>
+            </a:pPr>
+            <a:r>
+              <a:rPr sz="3150" b="1">
+                <a:solidFill>
+                  <a:srgbClr val="0D2B5E"/>
+                </a:solidFill>
+                <a:latin typeface="Pretendard"/>
+                <a:ea typeface="Pretendard"/>
+                <a:cs typeface="Pretendard"/>
+              </a:rPr>
+              <a:t>처음 판 — 건너뜀(continue)</a:t>
+            </a:r>
+          </a:p>
+        </p:txBody>
+      </p:sp>
+      <p:sp>
+        <p:nvSpPr>
+          <p:cNvPr id="9" name="TextBox 8"/>
+          <p:cNvSpPr txBox="1"/>
+          <p:nvPr/>
+        </p:nvSpPr>
+        <p:spPr>
+          <a:xfrm>
+            <a:off x="1143000" y="3467100"/>
+            <a:ext cx="7372350" cy="876300"/>
+          </a:xfrm>
+          <a:prstGeom prst="rect">
+            <a:avLst/>
+          </a:prstGeom>
+          <a:noFill/>
+        </p:spPr>
+        <p:txBody>
+          <a:bodyPr wrap="square" lIns="0" rIns="0" tIns="0" bIns="0" anchor="t">
+            <a:spAutoFit/>
+          </a:bodyPr>
+          <a:lstStyle/>
+          <a:p>
+            <a:pPr algn="l">
+              <a:lnSpc>
+                <a:spcPct val="146000"/>
+              </a:lnSpc>
+            </a:pPr>
+            <a:r>
+              <a:rPr sz="2250" b="0">
+                <a:solidFill>
+                  <a:srgbClr val="3D3D3D"/>
+                </a:solidFill>
+                <a:latin typeface="Pretendard"/>
+                <a:ea typeface="Pretendard"/>
+                <a:cs typeface="Pretendard"/>
+              </a:rPr>
+              <a:t>같은 파티션 뒤 메시지를 commit(msg) 하면</a:t>
+            </a:r>
+          </a:p>
+        </p:txBody>
+      </p:sp>
+      <p:sp>
+        <p:nvSpPr>
+          <p:cNvPr id="10" name="Rounded Rectangle 9"/>
+          <p:cNvSpPr/>
+          <p:nvPr/>
+        </p:nvSpPr>
+        <p:spPr>
+          <a:xfrm>
+            <a:off x="1143000" y="4610100"/>
+            <a:ext cx="7372350" cy="2857500"/>
+          </a:xfrm>
+          <a:prstGeom prst="roundRect">
+            <a:avLst>
+              <a:gd name="adj" fmla="val 1666"/>
+            </a:avLst>
+          </a:prstGeom>
+          <a:solidFill>
+            <a:srgbClr val="FAFBFD"/>
+          </a:solidFill>
+          <a:ln w="9525">
+            <a:solidFill>
+              <a:srgbClr val="DCE1E8"/>
+            </a:solidFill>
+          </a:ln>
+          <a:effectLst/>
+        </p:spPr>
+        <p:txBody>
+          <a:bodyPr rtlCol="0" anchor="ctr" wrap="square"/>
+          <a:lstStyle/>
+          <a:p>
+            <a:pPr algn="ctr"/>
+          </a:p>
+        </p:txBody>
+      </p:sp>
+      <p:sp>
+        <p:nvSpPr>
+          <p:cNvPr id="11" name="Oval 10"/>
+          <p:cNvSpPr/>
+          <p:nvPr/>
+        </p:nvSpPr>
+        <p:spPr>
+          <a:xfrm>
+            <a:off x="1447800" y="5016817"/>
+            <a:ext cx="97155" cy="97155"/>
+          </a:xfrm>
+          <a:prstGeom prst="ellipse">
+            <a:avLst/>
+          </a:prstGeom>
+          <a:solidFill>
+            <a:srgbClr val="1E5BC6"/>
+          </a:solidFill>
+          <a:ln>
+            <a:noFill/>
+          </a:ln>
+          <a:effectLst/>
+        </p:spPr>
+        <p:txBody>
+          <a:bodyPr rtlCol="0" anchor="ctr" wrap="square"/>
+          <a:lstStyle/>
+          <a:p>
+            <a:pPr algn="ctr"/>
+          </a:p>
+        </p:txBody>
+      </p:sp>
+      <p:sp>
+        <p:nvSpPr>
+          <p:cNvPr id="12" name="TextBox 11"/>
+          <p:cNvSpPr txBox="1"/>
+          <p:nvPr/>
+        </p:nvSpPr>
+        <p:spPr>
+          <a:xfrm>
+            <a:off x="1633538" y="4838700"/>
+            <a:ext cx="6634162" cy="453390"/>
+          </a:xfrm>
+          <a:prstGeom prst="rect">
+            <a:avLst/>
+          </a:prstGeom>
+          <a:noFill/>
+        </p:spPr>
+        <p:txBody>
+          <a:bodyPr wrap="square" lIns="0" rIns="0" tIns="0" bIns="0" anchor="ctr">
+            <a:spAutoFit/>
+          </a:bodyPr>
+          <a:lstStyle/>
+          <a:p>
+            <a:pPr algn="l">
+              <a:lnSpc>
+                <a:spcPct val="120000"/>
+              </a:lnSpc>
+            </a:pPr>
+            <a:r>
+              <a:rPr sz="1575" b="0">
+                <a:solidFill>
+                  <a:srgbClr val="3D3D3D"/>
+                </a:solidFill>
+                <a:latin typeface="Pretendard"/>
+                <a:ea typeface="Pretendard"/>
+                <a:cs typeface="Pretendard"/>
+              </a:rPr>
+              <a:t>「여기까지」가 실패한 메시지 뒤로 넘어간다</a:t>
+            </a:r>
+          </a:p>
+        </p:txBody>
+      </p:sp>
+      <p:sp>
+        <p:nvSpPr>
+          <p:cNvPr id="13" name="Oval 12"/>
+          <p:cNvSpPr/>
+          <p:nvPr/>
+        </p:nvSpPr>
+        <p:spPr>
+          <a:xfrm>
+            <a:off x="1447800" y="5527358"/>
+            <a:ext cx="97155" cy="97155"/>
+          </a:xfrm>
+          <a:prstGeom prst="ellipse">
+            <a:avLst/>
+          </a:prstGeom>
+          <a:solidFill>
+            <a:srgbClr val="1E5BC6"/>
+          </a:solidFill>
+          <a:ln>
+            <a:noFill/>
+          </a:ln>
+          <a:effectLst/>
+        </p:spPr>
+        <p:txBody>
+          <a:bodyPr rtlCol="0" anchor="ctr" wrap="square"/>
+          <a:lstStyle/>
+          <a:p>
+            <a:pPr algn="ctr"/>
+          </a:p>
+        </p:txBody>
+      </p:sp>
+      <p:sp>
+        <p:nvSpPr>
+          <p:cNvPr id="14" name="TextBox 13"/>
+          <p:cNvSpPr txBox="1"/>
+          <p:nvPr/>
+        </p:nvSpPr>
+        <p:spPr>
+          <a:xfrm>
+            <a:off x="1633538" y="5349240"/>
+            <a:ext cx="6634162" cy="453390"/>
+          </a:xfrm>
+          <a:prstGeom prst="rect">
+            <a:avLst/>
+          </a:prstGeom>
+          <a:noFill/>
+        </p:spPr>
+        <p:txBody>
+          <a:bodyPr wrap="square" lIns="0" rIns="0" tIns="0" bIns="0" anchor="ctr">
+            <a:spAutoFit/>
+          </a:bodyPr>
+          <a:lstStyle/>
+          <a:p>
+            <a:pPr algn="l">
+              <a:lnSpc>
+                <a:spcPct val="120000"/>
+              </a:lnSpc>
+            </a:pPr>
+            <a:r>
+              <a:rPr sz="1575" b="0">
+                <a:solidFill>
+                  <a:srgbClr val="3D3D3D"/>
+                </a:solidFill>
+                <a:latin typeface="Pretendard"/>
+                <a:ea typeface="Pretendard"/>
+                <a:cs typeface="Pretendard"/>
+              </a:rPr>
+              <a:t>다시 켜도 실패한 것을 읽지 않는다</a:t>
+            </a:r>
+          </a:p>
+        </p:txBody>
+      </p:sp>
+      <p:sp>
+        <p:nvSpPr>
+          <p:cNvPr id="15" name="Oval 14"/>
+          <p:cNvSpPr/>
+          <p:nvPr/>
+        </p:nvSpPr>
+        <p:spPr>
+          <a:xfrm>
+            <a:off x="1447800" y="6037898"/>
+            <a:ext cx="97155" cy="97155"/>
+          </a:xfrm>
+          <a:prstGeom prst="ellipse">
+            <a:avLst/>
+          </a:prstGeom>
+          <a:solidFill>
+            <a:srgbClr val="1E5BC6"/>
+          </a:solidFill>
+          <a:ln>
+            <a:noFill/>
+          </a:ln>
+          <a:effectLst/>
+        </p:spPr>
+        <p:txBody>
+          <a:bodyPr rtlCol="0" anchor="ctr" wrap="square"/>
+          <a:lstStyle/>
+          <a:p>
+            <a:pPr algn="ctr"/>
+          </a:p>
+        </p:txBody>
+      </p:sp>
+      <p:sp>
+        <p:nvSpPr>
+          <p:cNvPr id="16" name="TextBox 15"/>
+          <p:cNvSpPr txBox="1"/>
+          <p:nvPr/>
+        </p:nvSpPr>
+        <p:spPr>
+          <a:xfrm>
+            <a:off x="1633538" y="5859780"/>
+            <a:ext cx="6634162" cy="453390"/>
+          </a:xfrm>
+          <a:prstGeom prst="rect">
+            <a:avLst/>
+          </a:prstGeom>
+          <a:noFill/>
+        </p:spPr>
+        <p:txBody>
+          <a:bodyPr wrap="square" lIns="0" rIns="0" tIns="0" bIns="0" anchor="ctr">
+            <a:spAutoFit/>
+          </a:bodyPr>
+          <a:lstStyle/>
+          <a:p>
+            <a:pPr algn="l">
+              <a:lnSpc>
+                <a:spcPct val="120000"/>
+              </a:lnSpc>
+            </a:pPr>
+            <a:r>
+              <a:rPr sz="1575" b="0">
+                <a:solidFill>
+                  <a:srgbClr val="3D3D3D"/>
+                </a:solidFill>
+                <a:latin typeface="Pretendard"/>
+                <a:ea typeface="Pretendard"/>
+                <a:cs typeface="Pretendard"/>
+              </a:rPr>
+              <a:t>실측 — 30 건 중 7 건 실패, 다시 켜니 0 건</a:t>
+            </a:r>
+          </a:p>
+        </p:txBody>
+      </p:sp>
+      <p:sp>
+        <p:nvSpPr>
+          <p:cNvPr id="17" name="TextBox 16"/>
+          <p:cNvSpPr txBox="1"/>
+          <p:nvPr/>
+        </p:nvSpPr>
+        <p:spPr>
+          <a:xfrm>
+            <a:off x="9772650" y="2857500"/>
+            <a:ext cx="7372350" cy="533400"/>
+          </a:xfrm>
+          <a:prstGeom prst="rect">
+            <a:avLst/>
+          </a:prstGeom>
+          <a:noFill/>
+        </p:spPr>
+        <p:txBody>
+          <a:bodyPr wrap="square" lIns="0" rIns="0" tIns="0" bIns="0" anchor="t">
+            <a:spAutoFit/>
+          </a:bodyPr>
+          <a:lstStyle/>
+          <a:p>
+            <a:pPr algn="l">
+              <a:lnSpc>
+                <a:spcPct val="110000"/>
+              </a:lnSpc>
+            </a:pPr>
+            <a:r>
+              <a:rPr sz="3150" b="1">
+                <a:solidFill>
+                  <a:srgbClr val="0D2B5E"/>
+                </a:solidFill>
+                <a:latin typeface="Pretendard"/>
+                <a:ea typeface="Pretendard"/>
+                <a:cs typeface="Pretendard"/>
+              </a:rPr>
+              <a:t>지금 판 — 멈춤(break)</a:t>
+            </a:r>
+          </a:p>
+        </p:txBody>
+      </p:sp>
+      <p:sp>
+        <p:nvSpPr>
+          <p:cNvPr id="18" name="TextBox 17"/>
+          <p:cNvSpPr txBox="1"/>
+          <p:nvPr/>
+        </p:nvSpPr>
+        <p:spPr>
+          <a:xfrm>
+            <a:off x="9772650" y="3467100"/>
+            <a:ext cx="7372350" cy="876300"/>
+          </a:xfrm>
+          <a:prstGeom prst="rect">
+            <a:avLst/>
+          </a:prstGeom>
+          <a:noFill/>
+        </p:spPr>
+        <p:txBody>
+          <a:bodyPr wrap="square" lIns="0" rIns="0" tIns="0" bIns="0" anchor="t">
+            <a:spAutoFit/>
+          </a:bodyPr>
+          <a:lstStyle/>
+          <a:p>
+            <a:pPr algn="l">
+              <a:lnSpc>
+                <a:spcPct val="146000"/>
+              </a:lnSpc>
+            </a:pPr>
+            <a:r>
+              <a:rPr sz="2250" b="0">
+                <a:solidFill>
+                  <a:srgbClr val="3D3D3D"/>
+                </a:solidFill>
+                <a:latin typeface="Pretendard"/>
+                <a:ea typeface="Pretendard"/>
+                <a:cs typeface="Pretendard"/>
+              </a:rPr>
+              <a:t>실패하면 커밋하지 않고 끝낸다</a:t>
+            </a:r>
+          </a:p>
+        </p:txBody>
+      </p:sp>
+      <p:sp>
+        <p:nvSpPr>
+          <p:cNvPr id="19" name="Rounded Rectangle 18"/>
+          <p:cNvSpPr/>
+          <p:nvPr/>
+        </p:nvSpPr>
+        <p:spPr>
+          <a:xfrm>
+            <a:off x="9772650" y="4610100"/>
+            <a:ext cx="7372350" cy="2857500"/>
+          </a:xfrm>
+          <a:prstGeom prst="roundRect">
+            <a:avLst>
+              <a:gd name="adj" fmla="val 1666"/>
+            </a:avLst>
+          </a:prstGeom>
+          <a:solidFill>
+            <a:srgbClr val="FAFBFD"/>
+          </a:solidFill>
+          <a:ln w="9525">
+            <a:solidFill>
+              <a:srgbClr val="DCE1E8"/>
+            </a:solidFill>
+          </a:ln>
+          <a:effectLst/>
+        </p:spPr>
+        <p:txBody>
+          <a:bodyPr rtlCol="0" anchor="ctr" wrap="square"/>
+          <a:lstStyle/>
+          <a:p>
+            <a:pPr algn="ctr"/>
+          </a:p>
+        </p:txBody>
+      </p:sp>
+      <p:sp>
+        <p:nvSpPr>
+          <p:cNvPr id="20" name="Oval 19"/>
+          <p:cNvSpPr/>
+          <p:nvPr/>
+        </p:nvSpPr>
+        <p:spPr>
+          <a:xfrm>
+            <a:off x="10077450" y="5016817"/>
+            <a:ext cx="97155" cy="97155"/>
+          </a:xfrm>
+          <a:prstGeom prst="ellipse">
+            <a:avLst/>
+          </a:prstGeom>
+          <a:solidFill>
+            <a:srgbClr val="1E5BC6"/>
+          </a:solidFill>
+          <a:ln>
+            <a:noFill/>
+          </a:ln>
+          <a:effectLst/>
+        </p:spPr>
+        <p:txBody>
+          <a:bodyPr rtlCol="0" anchor="ctr" wrap="square"/>
+          <a:lstStyle/>
+          <a:p>
+            <a:pPr algn="ctr"/>
+          </a:p>
+        </p:txBody>
+      </p:sp>
+      <p:sp>
+        <p:nvSpPr>
+          <p:cNvPr id="21" name="TextBox 20"/>
+          <p:cNvSpPr txBox="1"/>
+          <p:nvPr/>
+        </p:nvSpPr>
+        <p:spPr>
+          <a:xfrm>
+            <a:off x="10263188" y="4838700"/>
+            <a:ext cx="6634162" cy="453390"/>
+          </a:xfrm>
+          <a:prstGeom prst="rect">
+            <a:avLst/>
+          </a:prstGeom>
+          <a:noFill/>
+        </p:spPr>
+        <p:txBody>
+          <a:bodyPr wrap="square" lIns="0" rIns="0" tIns="0" bIns="0" anchor="ctr">
+            <a:spAutoFit/>
+          </a:bodyPr>
+          <a:lstStyle/>
+          <a:p>
+            <a:pPr algn="l">
+              <a:lnSpc>
+                <a:spcPct val="120000"/>
+              </a:lnSpc>
+            </a:pPr>
+            <a:r>
+              <a:rPr sz="1575" b="0">
+                <a:solidFill>
+                  <a:srgbClr val="3D3D3D"/>
+                </a:solidFill>
+                <a:latin typeface="Pretendard"/>
+                <a:ea typeface="Pretendard"/>
+                <a:cs typeface="Pretendard"/>
+              </a:rPr>
+              <a:t>처리 실패: 13 에서 멈춘다</a:t>
+            </a:r>
+          </a:p>
+        </p:txBody>
+      </p:sp>
+      <p:sp>
+        <p:nvSpPr>
+          <p:cNvPr id="22" name="Oval 21"/>
+          <p:cNvSpPr/>
+          <p:nvPr/>
+        </p:nvSpPr>
+        <p:spPr>
+          <a:xfrm>
+            <a:off x="10077450" y="5527358"/>
+            <a:ext cx="97155" cy="97155"/>
+          </a:xfrm>
+          <a:prstGeom prst="ellipse">
+            <a:avLst/>
+          </a:prstGeom>
+          <a:solidFill>
+            <a:srgbClr val="1E5BC6"/>
+          </a:solidFill>
+          <a:ln>
+            <a:noFill/>
+          </a:ln>
+          <a:effectLst/>
+        </p:spPr>
+        <p:txBody>
+          <a:bodyPr rtlCol="0" anchor="ctr" wrap="square"/>
+          <a:lstStyle/>
+          <a:p>
+            <a:pPr algn="ctr"/>
+          </a:p>
+        </p:txBody>
+      </p:sp>
+      <p:sp>
+        <p:nvSpPr>
+          <p:cNvPr id="23" name="TextBox 22"/>
+          <p:cNvSpPr txBox="1"/>
+          <p:nvPr/>
+        </p:nvSpPr>
+        <p:spPr>
+          <a:xfrm>
+            <a:off x="10263188" y="5349240"/>
+            <a:ext cx="6634162" cy="453390"/>
+          </a:xfrm>
+          <a:prstGeom prst="rect">
+            <a:avLst/>
+          </a:prstGeom>
+          <a:noFill/>
+        </p:spPr>
+        <p:txBody>
+          <a:bodyPr wrap="square" lIns="0" rIns="0" tIns="0" bIns="0" anchor="ctr">
+            <a:spAutoFit/>
+          </a:bodyPr>
+          <a:lstStyle/>
+          <a:p>
+            <a:pPr algn="l">
+              <a:lnSpc>
+                <a:spcPct val="120000"/>
+              </a:lnSpc>
+            </a:pPr>
+            <a:r>
+              <a:rPr sz="1575" b="0">
+                <a:solidFill>
+                  <a:srgbClr val="3D3D3D"/>
+                </a:solidFill>
+                <a:latin typeface="Pretendard"/>
+                <a:ea typeface="Pretendard"/>
+                <a:cs typeface="Pretendard"/>
+              </a:rPr>
+              <a:t>다시 켜도 13 에서 또 멈춘다 (실측)</a:t>
+            </a:r>
+          </a:p>
+        </p:txBody>
+      </p:sp>
+      <p:sp>
+        <p:nvSpPr>
+          <p:cNvPr id="24" name="Oval 23"/>
+          <p:cNvSpPr/>
+          <p:nvPr/>
+        </p:nvSpPr>
+        <p:spPr>
+          <a:xfrm>
+            <a:off x="10077450" y="6037898"/>
+            <a:ext cx="97155" cy="97155"/>
+          </a:xfrm>
+          <a:prstGeom prst="ellipse">
+            <a:avLst/>
+          </a:prstGeom>
+          <a:solidFill>
+            <a:srgbClr val="1E5BC6"/>
+          </a:solidFill>
+          <a:ln>
+            <a:noFill/>
+          </a:ln>
+          <a:effectLst/>
+        </p:spPr>
+        <p:txBody>
+          <a:bodyPr rtlCol="0" anchor="ctr" wrap="square"/>
+          <a:lstStyle/>
+          <a:p>
+            <a:pPr algn="ctr"/>
+          </a:p>
+        </p:txBody>
+      </p:sp>
+      <p:sp>
+        <p:nvSpPr>
+          <p:cNvPr id="25" name="TextBox 24"/>
+          <p:cNvSpPr txBox="1"/>
+          <p:nvPr/>
+        </p:nvSpPr>
+        <p:spPr>
+          <a:xfrm>
+            <a:off x="10263188" y="5859780"/>
+            <a:ext cx="6634162" cy="453390"/>
+          </a:xfrm>
+          <a:prstGeom prst="rect">
+            <a:avLst/>
+          </a:prstGeom>
+          <a:noFill/>
+        </p:spPr>
+        <p:txBody>
+          <a:bodyPr wrap="square" lIns="0" rIns="0" tIns="0" bIns="0" anchor="ctr">
+            <a:spAutoFit/>
+          </a:bodyPr>
+          <a:lstStyle/>
+          <a:p>
+            <a:pPr algn="l">
+              <a:lnSpc>
+                <a:spcPct val="120000"/>
+              </a:lnSpc>
+            </a:pPr>
+            <a:r>
+              <a:rPr sz="1575" b="0">
+                <a:solidFill>
+                  <a:srgbClr val="3D3D3D"/>
+                </a:solidFill>
+                <a:latin typeface="Pretendard"/>
+                <a:ea typeface="Pretendard"/>
+                <a:cs typeface="Pretendard"/>
+              </a:rPr>
+              <a:t>유실 없음 · 같은 것을 또 읽음 — 실무는 재시도 뒤 DLQ</a:t>
+            </a:r>
+          </a:p>
+        </p:txBody>
+      </p:sp>
+      <p:sp>
+        <p:nvSpPr>
+          <p:cNvPr id="26" name="Oval 25"/>
+          <p:cNvSpPr/>
+          <p:nvPr/>
+        </p:nvSpPr>
+        <p:spPr>
+          <a:xfrm>
+            <a:off x="8686800" y="3771900"/>
+            <a:ext cx="914400" cy="914400"/>
+          </a:xfrm>
+          <a:prstGeom prst="ellipse">
+            <a:avLst/>
+          </a:prstGeom>
+          <a:solidFill>
+            <a:srgbClr val="0D2B5E"/>
+          </a:solidFill>
+          <a:ln>
+            <a:noFill/>
+          </a:ln>
+          <a:effectLst/>
+        </p:spPr>
+        <p:txBody>
+          <a:bodyPr rtlCol="0" anchor="ctr" wrap="square"/>
+          <a:lstStyle/>
+          <a:p>
+            <a:pPr algn="ctr"/>
+          </a:p>
+        </p:txBody>
+      </p:sp>
+      <p:sp>
+        <p:nvSpPr>
+          <p:cNvPr id="27" name="TextBox 26"/>
+          <p:cNvSpPr txBox="1"/>
+          <p:nvPr/>
+        </p:nvSpPr>
+        <p:spPr>
+          <a:xfrm>
+            <a:off x="8686800" y="4057650"/>
+            <a:ext cx="914400" cy="381000"/>
+          </a:xfrm>
+          <a:prstGeom prst="rect">
+            <a:avLst/>
+          </a:prstGeom>
+          <a:noFill/>
+        </p:spPr>
+        <p:txBody>
+          <a:bodyPr wrap="square" lIns="0" rIns="0" tIns="0" bIns="0" anchor="t">
+            <a:spAutoFit/>
+          </a:bodyPr>
+          <a:lstStyle/>
+          <a:p>
+            <a:pPr algn="ctr">
+              <a:lnSpc>
+                <a:spcPct val="100000"/>
+              </a:lnSpc>
+            </a:pPr>
+            <a:r>
+              <a:rPr sz="2250" b="1">
+                <a:solidFill>
+                  <a:srgbClr val="FFFFFF"/>
+                </a:solidFill>
+                <a:latin typeface="Pretendard"/>
+                <a:ea typeface="Pretendard"/>
+                <a:cs typeface="Pretendard"/>
+              </a:rPr>
+              <a:t>VS</a:t>
+            </a:r>
+          </a:p>
+        </p:txBody>
+      </p:sp>
+      <p:sp>
+        <p:nvSpPr>
+          <p:cNvPr id="28" name="Rectangle 27"/>
+          <p:cNvSpPr/>
+          <p:nvPr/>
+        </p:nvSpPr>
+        <p:spPr>
+          <a:xfrm>
+            <a:off x="1143000" y="8058150"/>
+            <a:ext cx="16002000" cy="9525"/>
+          </a:xfrm>
+          <a:prstGeom prst="rect">
+            <a:avLst/>
+          </a:prstGeom>
+          <a:solidFill>
+            <a:srgbClr val="DCE1E8"/>
+          </a:solidFill>
+          <a:ln>
+            <a:noFill/>
+          </a:ln>
+          <a:effectLst/>
+        </p:spPr>
+        <p:txBody>
+          <a:bodyPr rtlCol="0" anchor="ctr" wrap="square"/>
+          <a:lstStyle/>
+          <a:p>
+            <a:pPr algn="ctr"/>
+          </a:p>
+        </p:txBody>
+      </p:sp>
+      <p:sp>
+        <p:nvSpPr>
+          <p:cNvPr id="29" name="TextBox 28"/>
+          <p:cNvSpPr txBox="1"/>
+          <p:nvPr/>
+        </p:nvSpPr>
+        <p:spPr>
+          <a:xfrm>
+            <a:off x="1143000" y="8248650"/>
+            <a:ext cx="13335000" cy="323850"/>
+          </a:xfrm>
+          <a:prstGeom prst="rect">
+            <a:avLst/>
+          </a:prstGeom>
+          <a:noFill/>
+        </p:spPr>
+        <p:txBody>
+          <a:bodyPr wrap="square" lIns="0" rIns="0" tIns="0" bIns="0" anchor="t">
+            <a:spAutoFit/>
+          </a:bodyPr>
+          <a:lstStyle/>
+          <a:p>
+            <a:pPr algn="l">
+              <a:lnSpc>
+                <a:spcPct val="100000"/>
+              </a:lnSpc>
+            </a:pPr>
+            <a:r>
+              <a:rPr sz="1725" b="0">
+                <a:solidFill>
+                  <a:srgbClr val="7D7D7D"/>
+                </a:solidFill>
+                <a:latin typeface="Pretendard"/>
+                <a:ea typeface="Pretendard"/>
+                <a:cs typeface="Pretendard"/>
+              </a:rPr>
+              <a:t>데이터 엔지니어링 &amp; RAG 파이프라인 160H · 6-3 · 실습 2.5H</a:t>
+            </a:r>
+          </a:p>
+        </p:txBody>
+      </p:sp>
+      <p:sp>
+        <p:nvSpPr>
+          <p:cNvPr id="30" name="TextBox 29"/>
+          <p:cNvSpPr txBox="1"/>
+          <p:nvPr/>
+        </p:nvSpPr>
+        <p:spPr>
+          <a:xfrm>
+            <a:off x="15240000" y="8248650"/>
+            <a:ext cx="1905000" cy="323850"/>
+          </a:xfrm>
+          <a:prstGeom prst="rect">
+            <a:avLst/>
+          </a:prstGeom>
+          <a:noFill/>
+        </p:spPr>
+        <p:txBody>
+          <a:bodyPr wrap="square" lIns="0" rIns="0" tIns="0" bIns="0" anchor="t">
+            <a:spAutoFit/>
+          </a:bodyPr>
+          <a:lstStyle/>
+          <a:p>
+            <a:pPr algn="r">
+              <a:lnSpc>
+                <a:spcPct val="100000"/>
+              </a:lnSpc>
+            </a:pPr>
+            <a:r>
+              <a:rPr sz="1725" b="0">
+                <a:solidFill>
+                  <a:srgbClr val="7D7D7D"/>
+                </a:solidFill>
+                <a:latin typeface="Pretendard"/>
+                <a:ea typeface="Pretendard"/>
+                <a:cs typeface="Pretendard"/>
+              </a:rPr>
+              <a:t>11</a:t>
+            </a:r>
+          </a:p>
+        </p:txBody>
+      </p:sp>
+    </p:spTree>
+  </p:cSld>
+  <p:clrMapOvr>
+    <a:masterClrMapping/>
+  </p:clrMapOvr>
+</p:sld>
+</file>
+
+<file path=ppt/slides/slide12.xml><?xml version="1.0" encoding="utf-8"?>
+<p:sld xmlns:a="http://schemas.openxmlformats.org/drawingml/2006/main" xmlns:p="http://schemas.openxmlformats.org/presentationml/2006/main" xmlns:r="http://schemas.openxmlformats.org/officeDocument/2006/relationships">
+  <p:cSld>
+    <p:spTree>
+      <p:nvGrpSpPr>
+        <p:cNvPr id="1" name=""/>
+        <p:cNvGrpSpPr/>
+        <p:nvPr/>
+      </p:nvGrpSpPr>
+      <p:grpSpPr/>
+      <p:sp>
+        <p:nvSpPr>
+          <p:cNvPr id="2" name="deckgen:decor"/>
+          <p:cNvSpPr/>
+          <p:nvPr/>
+        </p:nvSpPr>
+        <p:spPr>
+          <a:xfrm>
+            <a:off x="15811500" y="8382000"/>
+            <a:ext cx="4953000" cy="4953000"/>
+          </a:xfrm>
+          <a:prstGeom prst="ellipse">
+            <a:avLst/>
+          </a:prstGeom>
+          <a:solidFill>
+            <a:srgbClr val="F3F6FC"/>
+          </a:solidFill>
+          <a:ln>
+            <a:noFill/>
+          </a:ln>
+          <a:effectLst/>
+        </p:spPr>
+        <p:txBody>
+          <a:bodyPr rtlCol="0" anchor="ctr" wrap="square"/>
+          <a:lstStyle/>
+          <a:p>
+            <a:pPr algn="ctr"/>
+          </a:p>
+        </p:txBody>
+      </p:sp>
+      <p:sp>
+        <p:nvSpPr>
+          <p:cNvPr id="3" name="deckgen:decor"/>
+          <p:cNvSpPr/>
+          <p:nvPr/>
+        </p:nvSpPr>
+        <p:spPr>
+          <a:xfrm>
+            <a:off x="16859250" y="9429750"/>
+            <a:ext cx="2857500" cy="2857500"/>
+          </a:xfrm>
+          <a:prstGeom prst="ellipse">
+            <a:avLst/>
+          </a:prstGeom>
+          <a:solidFill>
+            <a:srgbClr val="FFFFFF"/>
+          </a:solidFill>
+          <a:ln>
+            <a:noFill/>
+          </a:ln>
+          <a:effectLst/>
+        </p:spPr>
+        <p:txBody>
+          <a:bodyPr rtlCol="0" anchor="ctr" wrap="square"/>
+          <a:lstStyle/>
+          <a:p>
+            <a:pPr algn="ctr"/>
+          </a:p>
+        </p:txBody>
+      </p:sp>
+      <p:sp>
+        <p:nvSpPr>
+          <p:cNvPr id="4" name="deckgen:decor"/>
+          <p:cNvSpPr/>
+          <p:nvPr/>
+        </p:nvSpPr>
+        <p:spPr>
+          <a:xfrm>
+            <a:off x="-1428750" y="1428750"/>
+            <a:ext cx="2857500" cy="2857500"/>
+          </a:xfrm>
+          <a:prstGeom prst="ellipse">
+            <a:avLst/>
+          </a:prstGeom>
+          <a:solidFill>
+            <a:srgbClr val="F7F8FA"/>
+          </a:solidFill>
+          <a:ln>
+            <a:noFill/>
+          </a:ln>
+          <a:effectLst/>
+        </p:spPr>
+        <p:txBody>
+          <a:bodyPr rtlCol="0" anchor="ctr" wrap="square"/>
+          <a:lstStyle/>
+          <a:p>
+            <a:pPr algn="ctr"/>
+          </a:p>
+        </p:txBody>
+      </p:sp>
+      <p:sp>
+        <p:nvSpPr>
+          <p:cNvPr id="5" name="TextBox 4"/>
+          <p:cNvSpPr txBox="1"/>
+          <p:nvPr/>
+        </p:nvSpPr>
+        <p:spPr>
+          <a:xfrm>
+            <a:off x="1143000" y="838200"/>
+            <a:ext cx="16002000" cy="342900"/>
+          </a:xfrm>
+          <a:prstGeom prst="rect">
+            <a:avLst/>
+          </a:prstGeom>
+          <a:noFill/>
+        </p:spPr>
+        <p:txBody>
+          <a:bodyPr wrap="square" lIns="0" rIns="0" tIns="0" bIns="0" anchor="t">
+            <a:spAutoFit/>
+          </a:bodyPr>
+          <a:lstStyle/>
+          <a:p>
+            <a:pPr algn="l">
+              <a:lnSpc>
+                <a:spcPct val="100000"/>
+              </a:lnSpc>
+            </a:pPr>
+            <a:r>
+              <a:rPr sz="1950" b="1" spc="160">
+                <a:solidFill>
+                  <a:srgbClr val="1E5BC6"/>
+                </a:solidFill>
+                <a:latin typeface="Pretendard"/>
+                <a:ea typeface="Pretendard"/>
+                <a:cs typeface="Pretendard"/>
+              </a:rPr>
+              <a:t>확인 포인트</a:t>
+            </a:r>
+          </a:p>
+        </p:txBody>
+      </p:sp>
+      <p:sp>
+        <p:nvSpPr>
+          <p:cNvPr id="6" name="TextBox 5"/>
+          <p:cNvSpPr txBox="1"/>
+          <p:nvPr/>
+        </p:nvSpPr>
+        <p:spPr>
+          <a:xfrm>
+            <a:off x="1143000" y="1162050"/>
+            <a:ext cx="16002000" cy="762000"/>
+          </a:xfrm>
+          <a:prstGeom prst="rect">
+            <a:avLst/>
+          </a:prstGeom>
+          <a:noFill/>
+        </p:spPr>
+        <p:txBody>
+          <a:bodyPr wrap="square" lIns="0" rIns="0" tIns="0" bIns="0" anchor="t">
+            <a:spAutoFit/>
+          </a:bodyPr>
+          <a:lstStyle/>
+          <a:p>
+            <a:pPr algn="l">
+              <a:lnSpc>
+                <a:spcPct val="100000"/>
+              </a:lnSpc>
+            </a:pPr>
+            <a:r>
+              <a:rPr sz="5100" b="1">
+                <a:solidFill>
+                  <a:srgbClr val="0D2B5E"/>
+                </a:solidFill>
+                <a:latin typeface="Pretendard"/>
+                <a:ea typeface="Pretendard"/>
+                <a:cs typeface="Pretendard"/>
+              </a:rPr>
+              <a:t>이 2.5시간이 끝날 때 확인할 것</a:t>
+            </a:r>
+          </a:p>
+        </p:txBody>
+      </p:sp>
+      <p:sp>
+        <p:nvSpPr>
+          <p:cNvPr id="7" name="Rectangle 6"/>
+          <p:cNvSpPr/>
+          <p:nvPr/>
+        </p:nvSpPr>
+        <p:spPr>
+          <a:xfrm>
+            <a:off x="1143000" y="2038350"/>
+            <a:ext cx="16002000" cy="28575"/>
+          </a:xfrm>
+          <a:prstGeom prst="rect">
+            <a:avLst/>
+          </a:prstGeom>
+          <a:solidFill>
+            <a:srgbClr val="0D2B5E"/>
+          </a:solidFill>
+          <a:ln>
+            <a:noFill/>
+          </a:ln>
+          <a:effectLst/>
+        </p:spPr>
+        <p:txBody>
+          <a:bodyPr rtlCol="0" anchor="ctr" wrap="square"/>
+          <a:lstStyle/>
+          <a:p>
+            <a:pPr algn="ctr"/>
+          </a:p>
+        </p:txBody>
+      </p:sp>
+      <p:sp>
+        <p:nvSpPr>
+          <p:cNvPr id="8" name="Rounded Rectangle 7"/>
+          <p:cNvSpPr/>
+          <p:nvPr/>
+        </p:nvSpPr>
+        <p:spPr>
+          <a:xfrm>
+            <a:off x="1143000" y="2876550"/>
+            <a:ext cx="16002000" cy="542925"/>
+          </a:xfrm>
+          <a:prstGeom prst="roundRect">
+            <a:avLst>
+              <a:gd name="adj" fmla="val 8771"/>
+            </a:avLst>
+          </a:prstGeom>
+          <a:solidFill>
+            <a:srgbClr val="FAFBFD"/>
+          </a:solidFill>
+          <a:ln w="9525">
+            <a:solidFill>
+              <a:srgbClr val="DCE1E8"/>
+            </a:solidFill>
+          </a:ln>
+          <a:effectLst/>
+        </p:spPr>
+        <p:txBody>
+          <a:bodyPr rtlCol="0" anchor="ctr" wrap="square"/>
+          <a:lstStyle/>
+          <a:p>
+            <a:pPr algn="ctr"/>
+          </a:p>
+        </p:txBody>
+      </p:sp>
+      <p:sp>
+        <p:nvSpPr>
+          <p:cNvPr id="9" name="Oval 8"/>
+          <p:cNvSpPr/>
+          <p:nvPr/>
+        </p:nvSpPr>
+        <p:spPr>
+          <a:xfrm>
+            <a:off x="1390650" y="2881312"/>
+            <a:ext cx="533400" cy="533400"/>
+          </a:xfrm>
+          <a:prstGeom prst="ellipse">
+            <a:avLst/>
+          </a:prstGeom>
+          <a:solidFill>
+            <a:srgbClr val="0D2B5E"/>
+          </a:solidFill>
+          <a:ln>
+            <a:noFill/>
+          </a:ln>
+          <a:effectLst/>
+        </p:spPr>
+        <p:txBody>
+          <a:bodyPr rtlCol="0" anchor="ctr" wrap="square"/>
+          <a:lstStyle/>
+          <a:p>
+            <a:pPr algn="ctr"/>
+          </a:p>
+        </p:txBody>
+      </p:sp>
+      <p:sp>
+        <p:nvSpPr>
+          <p:cNvPr id="10" name="TextBox 9"/>
+          <p:cNvSpPr txBox="1"/>
+          <p:nvPr/>
+        </p:nvSpPr>
+        <p:spPr>
+          <a:xfrm>
+            <a:off x="1390650" y="3005138"/>
+            <a:ext cx="533400" cy="323850"/>
+          </a:xfrm>
+          <a:prstGeom prst="rect">
+            <a:avLst/>
+          </a:prstGeom>
+          <a:noFill/>
+        </p:spPr>
+        <p:txBody>
+          <a:bodyPr wrap="square" lIns="0" rIns="0" tIns="0" bIns="0" anchor="t">
+            <a:spAutoFit/>
+          </a:bodyPr>
+          <a:lstStyle/>
+          <a:p>
+            <a:pPr algn="ctr">
+              <a:lnSpc>
+                <a:spcPct val="100000"/>
+              </a:lnSpc>
+            </a:pPr>
+            <a:r>
+              <a:rPr sz="2100" b="1">
+                <a:solidFill>
+                  <a:srgbClr val="FFFFFF"/>
+                </a:solidFill>
+                <a:latin typeface="Pretendard"/>
+                <a:ea typeface="Pretendard"/>
+                <a:cs typeface="Pretendard"/>
+              </a:rPr>
+              <a:t>1</a:t>
+            </a:r>
+          </a:p>
+        </p:txBody>
+      </p:sp>
+      <p:sp>
+        <p:nvSpPr>
+          <p:cNvPr id="11" name="TextBox 10"/>
+          <p:cNvSpPr txBox="1"/>
+          <p:nvPr/>
+        </p:nvSpPr>
+        <p:spPr>
+          <a:xfrm>
+            <a:off x="2190750" y="2876550"/>
+            <a:ext cx="14573250" cy="542925"/>
+          </a:xfrm>
+          <a:prstGeom prst="rect">
+            <a:avLst/>
+          </a:prstGeom>
+          <a:noFill/>
+        </p:spPr>
+        <p:txBody>
+          <a:bodyPr wrap="square" lIns="0" rIns="0" tIns="0" bIns="0" anchor="ctr">
+            <a:spAutoFit/>
+          </a:bodyPr>
+          <a:lstStyle/>
+          <a:p>
+            <a:pPr algn="l">
+              <a:lnSpc>
+                <a:spcPct val="100000"/>
+              </a:lnSpc>
+            </a:pPr>
+            <a:r>
+              <a:rPr sz="2100" b="1">
+                <a:solidFill>
+                  <a:srgbClr val="0D2B5E"/>
+                </a:solidFill>
+                <a:latin typeface="Pretendard"/>
+                <a:ea typeface="Pretendard"/>
+                <a:cs typeface="Pretendard"/>
+              </a:rPr>
+              <a:t>「전송 완료 …」 30줄 — 칸은 1번 · 2번뿐, user1 은 1번</a:t>
+            </a:r>
+          </a:p>
+        </p:txBody>
+      </p:sp>
+      <p:sp>
+        <p:nvSpPr>
+          <p:cNvPr id="12" name="Rounded Rectangle 11"/>
+          <p:cNvSpPr/>
+          <p:nvPr/>
+        </p:nvSpPr>
+        <p:spPr>
+          <a:xfrm>
+            <a:off x="1143000" y="3533775"/>
+            <a:ext cx="16002000" cy="542925"/>
+          </a:xfrm>
+          <a:prstGeom prst="roundRect">
+            <a:avLst>
+              <a:gd name="adj" fmla="val 8771"/>
+            </a:avLst>
+          </a:prstGeom>
+          <a:solidFill>
+            <a:srgbClr val="FAFBFD"/>
+          </a:solidFill>
+          <a:ln w="9525">
+            <a:solidFill>
+              <a:srgbClr val="DCE1E8"/>
+            </a:solidFill>
+          </a:ln>
+          <a:effectLst/>
+        </p:spPr>
+        <p:txBody>
+          <a:bodyPr rtlCol="0" anchor="ctr" wrap="square"/>
+          <a:lstStyle/>
+          <a:p>
+            <a:pPr algn="ctr"/>
+          </a:p>
+        </p:txBody>
+      </p:sp>
+      <p:sp>
+        <p:nvSpPr>
+          <p:cNvPr id="13" name="Oval 12"/>
+          <p:cNvSpPr/>
+          <p:nvPr/>
+        </p:nvSpPr>
+        <p:spPr>
+          <a:xfrm>
+            <a:off x="1390650" y="3538538"/>
+            <a:ext cx="533400" cy="533400"/>
+          </a:xfrm>
+          <a:prstGeom prst="ellipse">
+            <a:avLst/>
+          </a:prstGeom>
+          <a:solidFill>
+            <a:srgbClr val="0D2B5E"/>
+          </a:solidFill>
+          <a:ln>
+            <a:noFill/>
+          </a:ln>
+          <a:effectLst/>
+        </p:spPr>
+        <p:txBody>
+          <a:bodyPr rtlCol="0" anchor="ctr" wrap="square"/>
+          <a:lstStyle/>
+          <a:p>
+            <a:pPr algn="ctr"/>
+          </a:p>
+        </p:txBody>
+      </p:sp>
+      <p:sp>
+        <p:nvSpPr>
+          <p:cNvPr id="14" name="TextBox 13"/>
+          <p:cNvSpPr txBox="1"/>
+          <p:nvPr/>
+        </p:nvSpPr>
+        <p:spPr>
+          <a:xfrm>
+            <a:off x="1390650" y="3662362"/>
+            <a:ext cx="533400" cy="323850"/>
+          </a:xfrm>
+          <a:prstGeom prst="rect">
+            <a:avLst/>
+          </a:prstGeom>
+          <a:noFill/>
+        </p:spPr>
+        <p:txBody>
+          <a:bodyPr wrap="square" lIns="0" rIns="0" tIns="0" bIns="0" anchor="t">
+            <a:spAutoFit/>
+          </a:bodyPr>
+          <a:lstStyle/>
+          <a:p>
+            <a:pPr algn="ctr">
+              <a:lnSpc>
+                <a:spcPct val="100000"/>
+              </a:lnSpc>
+            </a:pPr>
+            <a:r>
+              <a:rPr sz="2100" b="1">
+                <a:solidFill>
+                  <a:srgbClr val="FFFFFF"/>
+                </a:solidFill>
+                <a:latin typeface="Pretendard"/>
+                <a:ea typeface="Pretendard"/>
+                <a:cs typeface="Pretendard"/>
+              </a:rPr>
+              <a:t>2</a:t>
+            </a:r>
+          </a:p>
+        </p:txBody>
+      </p:sp>
+      <p:sp>
+        <p:nvSpPr>
+          <p:cNvPr id="15" name="TextBox 14"/>
+          <p:cNvSpPr txBox="1"/>
+          <p:nvPr/>
+        </p:nvSpPr>
+        <p:spPr>
+          <a:xfrm>
+            <a:off x="2190750" y="3533775"/>
+            <a:ext cx="14573250" cy="542925"/>
+          </a:xfrm>
+          <a:prstGeom prst="rect">
+            <a:avLst/>
+          </a:prstGeom>
+          <a:noFill/>
+        </p:spPr>
+        <p:txBody>
+          <a:bodyPr wrap="square" lIns="0" rIns="0" tIns="0" bIns="0" anchor="ctr">
+            <a:spAutoFit/>
+          </a:bodyPr>
+          <a:lstStyle/>
+          <a:p>
+            <a:pPr algn="l">
+              <a:lnSpc>
+                <a:spcPct val="100000"/>
+              </a:lnSpc>
+            </a:pPr>
+            <a:r>
+              <a:rPr sz="2100" b="1">
+                <a:solidFill>
+                  <a:srgbClr val="0D2B5E"/>
+                </a:solidFill>
+                <a:latin typeface="Pretendard"/>
+                <a:ea typeface="Pretendard"/>
+                <a:cs typeface="Pretendard"/>
+              </a:rPr>
+              <a:t>flush 없이 보낸 orders-test 는 0 건, flush 를 넣으면 1000 건</a:t>
+            </a:r>
+          </a:p>
+        </p:txBody>
+      </p:sp>
+      <p:sp>
+        <p:nvSpPr>
+          <p:cNvPr id="16" name="Rounded Rectangle 15"/>
+          <p:cNvSpPr/>
+          <p:nvPr/>
+        </p:nvSpPr>
+        <p:spPr>
+          <a:xfrm>
+            <a:off x="1143000" y="4191000"/>
+            <a:ext cx="16002000" cy="542925"/>
+          </a:xfrm>
+          <a:prstGeom prst="roundRect">
+            <a:avLst>
+              <a:gd name="adj" fmla="val 8771"/>
+            </a:avLst>
+          </a:prstGeom>
+          <a:solidFill>
+            <a:srgbClr val="FAFBFD"/>
+          </a:solidFill>
+          <a:ln w="9525">
+            <a:solidFill>
+              <a:srgbClr val="DCE1E8"/>
+            </a:solidFill>
+          </a:ln>
+          <a:effectLst/>
+        </p:spPr>
+        <p:txBody>
+          <a:bodyPr rtlCol="0" anchor="ctr" wrap="square"/>
+          <a:lstStyle/>
+          <a:p>
+            <a:pPr algn="ctr"/>
+          </a:p>
+        </p:txBody>
+      </p:sp>
+      <p:sp>
+        <p:nvSpPr>
+          <p:cNvPr id="17" name="Oval 16"/>
+          <p:cNvSpPr/>
+          <p:nvPr/>
+        </p:nvSpPr>
+        <p:spPr>
+          <a:xfrm>
+            <a:off x="1390650" y="4195762"/>
+            <a:ext cx="533400" cy="533400"/>
+          </a:xfrm>
+          <a:prstGeom prst="ellipse">
+            <a:avLst/>
+          </a:prstGeom>
+          <a:solidFill>
+            <a:srgbClr val="0D2B5E"/>
+          </a:solidFill>
+          <a:ln>
+            <a:noFill/>
+          </a:ln>
+          <a:effectLst/>
+        </p:spPr>
+        <p:txBody>
+          <a:bodyPr rtlCol="0" anchor="ctr" wrap="square"/>
+          <a:lstStyle/>
+          <a:p>
+            <a:pPr algn="ctr"/>
+          </a:p>
+        </p:txBody>
+      </p:sp>
+      <p:sp>
+        <p:nvSpPr>
+          <p:cNvPr id="18" name="TextBox 17"/>
+          <p:cNvSpPr txBox="1"/>
+          <p:nvPr/>
+        </p:nvSpPr>
+        <p:spPr>
+          <a:xfrm>
+            <a:off x="1390650" y="4319588"/>
+            <a:ext cx="533400" cy="323850"/>
+          </a:xfrm>
+          <a:prstGeom prst="rect">
+            <a:avLst/>
+          </a:prstGeom>
+          <a:noFill/>
+        </p:spPr>
+        <p:txBody>
+          <a:bodyPr wrap="square" lIns="0" rIns="0" tIns="0" bIns="0" anchor="t">
+            <a:spAutoFit/>
+          </a:bodyPr>
+          <a:lstStyle/>
+          <a:p>
+            <a:pPr algn="ctr">
+              <a:lnSpc>
+                <a:spcPct val="100000"/>
+              </a:lnSpc>
+            </a:pPr>
+            <a:r>
+              <a:rPr sz="2100" b="1">
+                <a:solidFill>
+                  <a:srgbClr val="FFFFFF"/>
+                </a:solidFill>
+                <a:latin typeface="Pretendard"/>
+                <a:ea typeface="Pretendard"/>
+                <a:cs typeface="Pretendard"/>
+              </a:rPr>
+              <a:t>3</a:t>
+            </a:r>
+          </a:p>
+        </p:txBody>
+      </p:sp>
+      <p:sp>
+        <p:nvSpPr>
+          <p:cNvPr id="19" name="TextBox 18"/>
+          <p:cNvSpPr txBox="1"/>
+          <p:nvPr/>
+        </p:nvSpPr>
+        <p:spPr>
+          <a:xfrm>
+            <a:off x="2190750" y="4191000"/>
+            <a:ext cx="14573250" cy="542925"/>
+          </a:xfrm>
+          <a:prstGeom prst="rect">
+            <a:avLst/>
+          </a:prstGeom>
+          <a:noFill/>
+        </p:spPr>
+        <p:txBody>
+          <a:bodyPr wrap="square" lIns="0" rIns="0" tIns="0" bIns="0" anchor="ctr">
+            <a:spAutoFit/>
+          </a:bodyPr>
+          <a:lstStyle/>
+          <a:p>
+            <a:pPr algn="l">
+              <a:lnSpc>
+                <a:spcPct val="100000"/>
+              </a:lnSpc>
+            </a:pPr>
+            <a:r>
+              <a:rPr sz="2100" b="1">
+                <a:solidFill>
+                  <a:srgbClr val="0D2B5E"/>
+                </a:solidFill>
+                <a:latin typeface="Pretendard"/>
+                <a:ea typeface="Pretendard"/>
+                <a:cs typeface="Pretendard"/>
+              </a:rPr>
+              <a:t>Consumer 터미널에 고객별 누적 금액이 늘어난다</a:t>
+            </a:r>
+          </a:p>
+        </p:txBody>
+      </p:sp>
+      <p:sp>
+        <p:nvSpPr>
+          <p:cNvPr id="20" name="Rounded Rectangle 19"/>
+          <p:cNvSpPr/>
+          <p:nvPr/>
+        </p:nvSpPr>
+        <p:spPr>
+          <a:xfrm>
+            <a:off x="1143000" y="4848225"/>
+            <a:ext cx="16002000" cy="542925"/>
+          </a:xfrm>
+          <a:prstGeom prst="roundRect">
+            <a:avLst>
+              <a:gd name="adj" fmla="val 8771"/>
+            </a:avLst>
+          </a:prstGeom>
+          <a:solidFill>
+            <a:srgbClr val="FAFBFD"/>
+          </a:solidFill>
+          <a:ln w="9525">
+            <a:solidFill>
+              <a:srgbClr val="DCE1E8"/>
+            </a:solidFill>
+          </a:ln>
+          <a:effectLst/>
+        </p:spPr>
+        <p:txBody>
+          <a:bodyPr rtlCol="0" anchor="ctr" wrap="square"/>
+          <a:lstStyle/>
+          <a:p>
+            <a:pPr algn="ctr"/>
+          </a:p>
+        </p:txBody>
+      </p:sp>
+      <p:sp>
+        <p:nvSpPr>
+          <p:cNvPr id="21" name="Oval 20"/>
+          <p:cNvSpPr/>
+          <p:nvPr/>
+        </p:nvSpPr>
+        <p:spPr>
+          <a:xfrm>
+            <a:off x="1390650" y="4852988"/>
+            <a:ext cx="533400" cy="533400"/>
+          </a:xfrm>
+          <a:prstGeom prst="ellipse">
+            <a:avLst/>
+          </a:prstGeom>
+          <a:solidFill>
+            <a:srgbClr val="0D2B5E"/>
+          </a:solidFill>
+          <a:ln>
+            <a:noFill/>
+          </a:ln>
+          <a:effectLst/>
+        </p:spPr>
+        <p:txBody>
+          <a:bodyPr rtlCol="0" anchor="ctr" wrap="square"/>
+          <a:lstStyle/>
+          <a:p>
+            <a:pPr algn="ctr"/>
+          </a:p>
+        </p:txBody>
+      </p:sp>
+      <p:sp>
+        <p:nvSpPr>
+          <p:cNvPr id="22" name="TextBox 21"/>
+          <p:cNvSpPr txBox="1"/>
+          <p:nvPr/>
+        </p:nvSpPr>
+        <p:spPr>
+          <a:xfrm>
+            <a:off x="1390650" y="4976812"/>
+            <a:ext cx="533400" cy="323850"/>
+          </a:xfrm>
+          <a:prstGeom prst="rect">
+            <a:avLst/>
+          </a:prstGeom>
+          <a:noFill/>
+        </p:spPr>
+        <p:txBody>
+          <a:bodyPr wrap="square" lIns="0" rIns="0" tIns="0" bIns="0" anchor="t">
+            <a:spAutoFit/>
+          </a:bodyPr>
+          <a:lstStyle/>
+          <a:p>
+            <a:pPr algn="ctr">
+              <a:lnSpc>
+                <a:spcPct val="100000"/>
+              </a:lnSpc>
+            </a:pPr>
+            <a:r>
+              <a:rPr sz="2100" b="1">
+                <a:solidFill>
+                  <a:srgbClr val="FFFFFF"/>
+                </a:solidFill>
+                <a:latin typeface="Pretendard"/>
+                <a:ea typeface="Pretendard"/>
+                <a:cs typeface="Pretendard"/>
+              </a:rPr>
+              <a:t>4</a:t>
+            </a:r>
+          </a:p>
+        </p:txBody>
+      </p:sp>
+      <p:sp>
+        <p:nvSpPr>
+          <p:cNvPr id="23" name="TextBox 22"/>
+          <p:cNvSpPr txBox="1"/>
+          <p:nvPr/>
+        </p:nvSpPr>
+        <p:spPr>
+          <a:xfrm>
+            <a:off x="2190750" y="4848225"/>
+            <a:ext cx="14573250" cy="542925"/>
+          </a:xfrm>
+          <a:prstGeom prst="rect">
+            <a:avLst/>
+          </a:prstGeom>
+          <a:noFill/>
+        </p:spPr>
+        <p:txBody>
+          <a:bodyPr wrap="square" lIns="0" rIns="0" tIns="0" bIns="0" anchor="ctr">
+            <a:spAutoFit/>
+          </a:bodyPr>
+          <a:lstStyle/>
+          <a:p>
+            <a:pPr algn="l">
+              <a:lnSpc>
+                <a:spcPct val="100000"/>
+              </a:lnSpc>
+            </a:pPr>
+            <a:r>
+              <a:rPr sz="2100" b="1">
+                <a:solidFill>
+                  <a:srgbClr val="0D2B5E"/>
+                </a:solidFill>
+                <a:latin typeface="Pretendard"/>
+                <a:ea typeface="Pretendard"/>
+                <a:cs typeface="Pretendard"/>
+              </a:rPr>
+              <a:t>같은 그룹은 새 메시지만, 다른 그룹은 전부 다시 읽는다</a:t>
+            </a:r>
+          </a:p>
+        </p:txBody>
+      </p:sp>
+      <p:sp>
+        <p:nvSpPr>
+          <p:cNvPr id="24" name="Rounded Rectangle 23"/>
+          <p:cNvSpPr/>
+          <p:nvPr/>
+        </p:nvSpPr>
+        <p:spPr>
+          <a:xfrm>
+            <a:off x="1143000" y="5505450"/>
+            <a:ext cx="16002000" cy="542925"/>
+          </a:xfrm>
+          <a:prstGeom prst="roundRect">
+            <a:avLst>
+              <a:gd name="adj" fmla="val 8771"/>
+            </a:avLst>
+          </a:prstGeom>
+          <a:solidFill>
+            <a:srgbClr val="FAFBFD"/>
+          </a:solidFill>
+          <a:ln w="9525">
+            <a:solidFill>
+              <a:srgbClr val="DCE1E8"/>
+            </a:solidFill>
+          </a:ln>
+          <a:effectLst/>
+        </p:spPr>
+        <p:txBody>
+          <a:bodyPr rtlCol="0" anchor="ctr" wrap="square"/>
+          <a:lstStyle/>
+          <a:p>
+            <a:pPr algn="ctr"/>
+          </a:p>
+        </p:txBody>
+      </p:sp>
+      <p:sp>
+        <p:nvSpPr>
+          <p:cNvPr id="25" name="Oval 24"/>
+          <p:cNvSpPr/>
+          <p:nvPr/>
+        </p:nvSpPr>
+        <p:spPr>
+          <a:xfrm>
+            <a:off x="1390650" y="5510212"/>
+            <a:ext cx="533400" cy="533400"/>
+          </a:xfrm>
+          <a:prstGeom prst="ellipse">
+            <a:avLst/>
+          </a:prstGeom>
+          <a:solidFill>
+            <a:srgbClr val="0D2B5E"/>
+          </a:solidFill>
+          <a:ln>
+            <a:noFill/>
+          </a:ln>
+          <a:effectLst/>
+        </p:spPr>
+        <p:txBody>
+          <a:bodyPr rtlCol="0" anchor="ctr" wrap="square"/>
+          <a:lstStyle/>
+          <a:p>
+            <a:pPr algn="ctr"/>
+          </a:p>
+        </p:txBody>
+      </p:sp>
+      <p:sp>
+        <p:nvSpPr>
+          <p:cNvPr id="26" name="TextBox 25"/>
+          <p:cNvSpPr txBox="1"/>
+          <p:nvPr/>
+        </p:nvSpPr>
+        <p:spPr>
+          <a:xfrm>
+            <a:off x="1390650" y="5634038"/>
+            <a:ext cx="533400" cy="323850"/>
+          </a:xfrm>
+          <a:prstGeom prst="rect">
+            <a:avLst/>
+          </a:prstGeom>
+          <a:noFill/>
+        </p:spPr>
+        <p:txBody>
+          <a:bodyPr wrap="square" lIns="0" rIns="0" tIns="0" bIns="0" anchor="t">
+            <a:spAutoFit/>
+          </a:bodyPr>
+          <a:lstStyle/>
+          <a:p>
+            <a:pPr algn="ctr">
+              <a:lnSpc>
+                <a:spcPct val="100000"/>
+              </a:lnSpc>
+            </a:pPr>
+            <a:r>
+              <a:rPr sz="2100" b="1">
+                <a:solidFill>
+                  <a:srgbClr val="FFFFFF"/>
+                </a:solidFill>
+                <a:latin typeface="Pretendard"/>
+                <a:ea typeface="Pretendard"/>
+                <a:cs typeface="Pretendard"/>
+              </a:rPr>
+              <a:t>5</a:t>
+            </a:r>
+          </a:p>
+        </p:txBody>
+      </p:sp>
+      <p:sp>
+        <p:nvSpPr>
+          <p:cNvPr id="27" name="TextBox 26"/>
+          <p:cNvSpPr txBox="1"/>
+          <p:nvPr/>
+        </p:nvSpPr>
+        <p:spPr>
+          <a:xfrm>
+            <a:off x="2190750" y="5505450"/>
+            <a:ext cx="14573250" cy="542925"/>
+          </a:xfrm>
+          <a:prstGeom prst="rect">
+            <a:avLst/>
+          </a:prstGeom>
+          <a:noFill/>
+        </p:spPr>
+        <p:txBody>
+          <a:bodyPr wrap="square" lIns="0" rIns="0" tIns="0" bIns="0" anchor="ctr">
+            <a:spAutoFit/>
+          </a:bodyPr>
+          <a:lstStyle/>
+          <a:p>
+            <a:pPr algn="l">
+              <a:lnSpc>
+                <a:spcPct val="100000"/>
+              </a:lnSpc>
+            </a:pPr>
+            <a:r>
+              <a:rPr sz="2100" b="1">
+                <a:solidFill>
+                  <a:srgbClr val="0D2B5E"/>
+                </a:solidFill>
+                <a:latin typeface="Pretendard"/>
+                <a:ea typeface="Pretendard"/>
+                <a:cs typeface="Pretendard"/>
+              </a:rPr>
+              <a:t>수동 커밋은 실패에서 멈추고, 다시 켜도 같은 메시지에서 멈춘다</a:t>
+            </a:r>
+          </a:p>
+        </p:txBody>
+      </p:sp>
+      <p:sp>
+        <p:nvSpPr>
+          <p:cNvPr id="28" name="Rounded Rectangle 27"/>
+          <p:cNvSpPr/>
+          <p:nvPr/>
+        </p:nvSpPr>
+        <p:spPr>
+          <a:xfrm>
+            <a:off x="1143000" y="6162675"/>
+            <a:ext cx="16002000" cy="542925"/>
+          </a:xfrm>
+          <a:prstGeom prst="roundRect">
+            <a:avLst>
+              <a:gd name="adj" fmla="val 8771"/>
+            </a:avLst>
+          </a:prstGeom>
+          <a:solidFill>
+            <a:srgbClr val="FAFBFD"/>
+          </a:solidFill>
+          <a:ln w="9525">
+            <a:solidFill>
+              <a:srgbClr val="DCE1E8"/>
+            </a:solidFill>
+          </a:ln>
+          <a:effectLst/>
+        </p:spPr>
+        <p:txBody>
+          <a:bodyPr rtlCol="0" anchor="ctr" wrap="square"/>
+          <a:lstStyle/>
+          <a:p>
+            <a:pPr algn="ctr"/>
+          </a:p>
+        </p:txBody>
+      </p:sp>
+      <p:sp>
+        <p:nvSpPr>
+          <p:cNvPr id="29" name="Oval 28"/>
+          <p:cNvSpPr/>
+          <p:nvPr/>
+        </p:nvSpPr>
+        <p:spPr>
+          <a:xfrm>
+            <a:off x="1390650" y="6167438"/>
+            <a:ext cx="533400" cy="533400"/>
+          </a:xfrm>
+          <a:prstGeom prst="ellipse">
+            <a:avLst/>
+          </a:prstGeom>
+          <a:solidFill>
+            <a:srgbClr val="0D2B5E"/>
+          </a:solidFill>
+          <a:ln>
+            <a:noFill/>
+          </a:ln>
+          <a:effectLst/>
+        </p:spPr>
+        <p:txBody>
+          <a:bodyPr rtlCol="0" anchor="ctr" wrap="square"/>
+          <a:lstStyle/>
+          <a:p>
+            <a:pPr algn="ctr"/>
+          </a:p>
+        </p:txBody>
+      </p:sp>
+      <p:sp>
+        <p:nvSpPr>
+          <p:cNvPr id="30" name="TextBox 29"/>
+          <p:cNvSpPr txBox="1"/>
+          <p:nvPr/>
+        </p:nvSpPr>
+        <p:spPr>
+          <a:xfrm>
+            <a:off x="1390650" y="6291262"/>
+            <a:ext cx="533400" cy="323850"/>
+          </a:xfrm>
+          <a:prstGeom prst="rect">
+            <a:avLst/>
+          </a:prstGeom>
+          <a:noFill/>
+        </p:spPr>
+        <p:txBody>
+          <a:bodyPr wrap="square" lIns="0" rIns="0" tIns="0" bIns="0" anchor="t">
+            <a:spAutoFit/>
+          </a:bodyPr>
+          <a:lstStyle/>
+          <a:p>
+            <a:pPr algn="ctr">
+              <a:lnSpc>
+                <a:spcPct val="100000"/>
+              </a:lnSpc>
+            </a:pPr>
+            <a:r>
+              <a:rPr sz="2100" b="1">
+                <a:solidFill>
+                  <a:srgbClr val="FFFFFF"/>
+                </a:solidFill>
+                <a:latin typeface="Pretendard"/>
+                <a:ea typeface="Pretendard"/>
+                <a:cs typeface="Pretendard"/>
+              </a:rPr>
+              <a:t>6</a:t>
+            </a:r>
+          </a:p>
+        </p:txBody>
+      </p:sp>
+      <p:sp>
+        <p:nvSpPr>
+          <p:cNvPr id="31" name="TextBox 30"/>
+          <p:cNvSpPr txBox="1"/>
+          <p:nvPr/>
+        </p:nvSpPr>
+        <p:spPr>
+          <a:xfrm>
+            <a:off x="2190750" y="6162675"/>
+            <a:ext cx="14573250" cy="542925"/>
+          </a:xfrm>
+          <a:prstGeom prst="rect">
+            <a:avLst/>
+          </a:prstGeom>
+          <a:noFill/>
+        </p:spPr>
+        <p:txBody>
+          <a:bodyPr wrap="square" lIns="0" rIns="0" tIns="0" bIns="0" anchor="ctr">
+            <a:spAutoFit/>
+          </a:bodyPr>
+          <a:lstStyle/>
+          <a:p>
+            <a:pPr algn="l">
+              <a:lnSpc>
+                <a:spcPct val="100000"/>
+              </a:lnSpc>
+            </a:pPr>
+            <a:r>
+              <a:rPr sz="2100" b="1">
+                <a:solidFill>
+                  <a:srgbClr val="0D2B5E"/>
+                </a:solidFill>
+                <a:latin typeface="Pretendard"/>
+                <a:ea typeface="Pretendard"/>
+                <a:cs typeface="Pretendard"/>
+              </a:rPr>
+              <a:t>Consumer 를 끄면 LAG 이 쌓이고, 켜면 전 파티션 0 이 된다</a:t>
+            </a:r>
+          </a:p>
+        </p:txBody>
+      </p:sp>
+      <p:sp>
+        <p:nvSpPr>
+          <p:cNvPr id="32" name="Rounded Rectangle 31"/>
+          <p:cNvSpPr/>
+          <p:nvPr/>
+        </p:nvSpPr>
+        <p:spPr>
+          <a:xfrm>
+            <a:off x="1143000" y="6953250"/>
+            <a:ext cx="16002000" cy="876300"/>
+          </a:xfrm>
+          <a:prstGeom prst="roundRect">
+            <a:avLst>
+              <a:gd name="adj" fmla="val 5434"/>
+            </a:avLst>
+          </a:prstGeom>
+          <a:solidFill>
+            <a:srgbClr val="EDF3FD"/>
+          </a:solidFill>
+          <a:ln w="9525">
+            <a:solidFill>
+              <a:srgbClr val="BFD3F5"/>
+            </a:solidFill>
+          </a:ln>
+          <a:effectLst/>
+        </p:spPr>
+        <p:txBody>
+          <a:bodyPr rtlCol="0" anchor="ctr" wrap="square"/>
+          <a:lstStyle/>
+          <a:p>
+            <a:pPr algn="ctr"/>
+          </a:p>
+        </p:txBody>
+      </p:sp>
+      <p:sp>
+        <p:nvSpPr>
+          <p:cNvPr id="33" name="TextBox 32"/>
+          <p:cNvSpPr txBox="1"/>
+          <p:nvPr/>
+        </p:nvSpPr>
+        <p:spPr>
+          <a:xfrm>
+            <a:off x="1143000" y="7200900"/>
+            <a:ext cx="16002000" cy="438150"/>
+          </a:xfrm>
+          <a:prstGeom prst="rect">
+            <a:avLst/>
+          </a:prstGeom>
+          <a:noFill/>
+        </p:spPr>
+        <p:txBody>
+          <a:bodyPr wrap="square" lIns="0" rIns="0" tIns="0" bIns="0" anchor="t">
+            <a:spAutoFit/>
+          </a:bodyPr>
+          <a:lstStyle/>
+          <a:p>
+            <a:pPr algn="ctr">
+              <a:lnSpc>
+                <a:spcPct val="100000"/>
+              </a:lnSpc>
+            </a:pPr>
+            <a:r>
+              <a:rPr sz="2475" b="1">
+                <a:solidFill>
+                  <a:srgbClr val="0D2B5E"/>
+                </a:solidFill>
+                <a:latin typeface="Pretendard"/>
+                <a:ea typeface="Pretendard"/>
+                <a:cs typeface="Pretendard"/>
+              </a:rPr>
+              <a:t>미니 과제: consumer.py 둘 동시 실행 · acks all 추가 · 집계를 파일이나 SQLite 에 저장</a:t>
+            </a:r>
+          </a:p>
+        </p:txBody>
+      </p:sp>
+      <p:sp>
+        <p:nvSpPr>
+          <p:cNvPr id="34" name="Rectangle 33"/>
+          <p:cNvSpPr/>
+          <p:nvPr/>
+        </p:nvSpPr>
+        <p:spPr>
+          <a:xfrm>
+            <a:off x="1143000" y="8058150"/>
+            <a:ext cx="16002000" cy="9525"/>
+          </a:xfrm>
+          <a:prstGeom prst="rect">
+            <a:avLst/>
+          </a:prstGeom>
+          <a:solidFill>
+            <a:srgbClr val="DCE1E8"/>
+          </a:solidFill>
+          <a:ln>
+            <a:noFill/>
+          </a:ln>
+          <a:effectLst/>
+        </p:spPr>
+        <p:txBody>
+          <a:bodyPr rtlCol="0" anchor="ctr" wrap="square"/>
+          <a:lstStyle/>
+          <a:p>
+            <a:pPr algn="ctr"/>
+          </a:p>
+        </p:txBody>
+      </p:sp>
+      <p:sp>
+        <p:nvSpPr>
+          <p:cNvPr id="35" name="TextBox 34"/>
+          <p:cNvSpPr txBox="1"/>
+          <p:nvPr/>
+        </p:nvSpPr>
+        <p:spPr>
+          <a:xfrm>
+            <a:off x="1143000" y="8248650"/>
+            <a:ext cx="13335000" cy="323850"/>
+          </a:xfrm>
+          <a:prstGeom prst="rect">
+            <a:avLst/>
+          </a:prstGeom>
+          <a:noFill/>
+        </p:spPr>
+        <p:txBody>
+          <a:bodyPr wrap="square" lIns="0" rIns="0" tIns="0" bIns="0" anchor="t">
+            <a:spAutoFit/>
+          </a:bodyPr>
+          <a:lstStyle/>
+          <a:p>
+            <a:pPr algn="l">
+              <a:lnSpc>
+                <a:spcPct val="100000"/>
+              </a:lnSpc>
+            </a:pPr>
+            <a:r>
+              <a:rPr sz="1725" b="0">
+                <a:solidFill>
+                  <a:srgbClr val="7D7D7D"/>
+                </a:solidFill>
+                <a:latin typeface="Pretendard"/>
+                <a:ea typeface="Pretendard"/>
+                <a:cs typeface="Pretendard"/>
+              </a:rPr>
+              <a:t>데이터 엔지니어링 &amp; RAG 파이프라인 160H · 6-3 · 실습 2.5H</a:t>
+            </a:r>
+          </a:p>
+        </p:txBody>
+      </p:sp>
+      <p:sp>
+        <p:nvSpPr>
+          <p:cNvPr id="36" name="TextBox 35"/>
+          <p:cNvSpPr txBox="1"/>
+          <p:nvPr/>
+        </p:nvSpPr>
+        <p:spPr>
+          <a:xfrm>
+            <a:off x="15240000" y="8248650"/>
+            <a:ext cx="1905000" cy="323850"/>
+          </a:xfrm>
+          <a:prstGeom prst="rect">
+            <a:avLst/>
+          </a:prstGeom>
+          <a:noFill/>
+        </p:spPr>
+        <p:txBody>
+          <a:bodyPr wrap="square" lIns="0" rIns="0" tIns="0" bIns="0" anchor="t">
+            <a:spAutoFit/>
+          </a:bodyPr>
+          <a:lstStyle/>
+          <a:p>
+            <a:pPr algn="r">
+              <a:lnSpc>
+                <a:spcPct val="100000"/>
+              </a:lnSpc>
+            </a:pPr>
+            <a:r>
+              <a:rPr sz="1725" b="0">
+                <a:solidFill>
+                  <a:srgbClr val="7D7D7D"/>
+                </a:solidFill>
+                <a:latin typeface="Pretendard"/>
+                <a:ea typeface="Pretendard"/>
+                <a:cs typeface="Pretendard"/>
+              </a:rPr>
+              <a:t>12</a:t>
+            </a:r>
+          </a:p>
+        </p:txBody>
+      </p:sp>
+    </p:spTree>
+  </p:cSld>
+  <p:clrMapOvr>
+    <a:masterClrMapping/>
+  </p:clrMapOvr>
+</p:sld>
+</file>
+
+<file path=ppt/slides/slide13.xml><?xml version="1.0" encoding="utf-8"?>
+<p:sld xmlns:a="http://schemas.openxmlformats.org/drawingml/2006/main" xmlns:p="http://schemas.openxmlformats.org/presentationml/2006/main" xmlns:r="http://schemas.openxmlformats.org/officeDocument/2006/relationships">
+  <p:cSld>
+    <p:spTree>
+      <p:nvGrpSpPr>
+        <p:cNvPr id="1" name=""/>
+        <p:cNvGrpSpPr/>
+        <p:nvPr/>
+      </p:nvGrpSpPr>
+      <p:grpSpPr/>
+      <p:sp>
+        <p:nvSpPr>
+          <p:cNvPr id="2" name="deckgen:decor"/>
+          <p:cNvSpPr/>
+          <p:nvPr/>
+        </p:nvSpPr>
+        <p:spPr>
+          <a:xfrm>
             <a:off x="14859000" y="6667500"/>
             <a:ext cx="5905500" cy="5905500"/>
           </a:xfrm>
@@ -5154,7 +7315,7 @@
         </p:nvSpPr>
         <p:spPr>
           <a:xfrm>
-            <a:off x="1428750" y="5486400"/>
+            <a:off x="1428750" y="5476875"/>
             <a:ext cx="419100" cy="381000"/>
           </a:xfrm>
           <a:prstGeom prst="rect">
@@ -5195,7 +7356,7 @@
         </p:nvSpPr>
         <p:spPr>
           <a:xfrm>
-            <a:off x="1905000" y="5486400"/>
+            <a:off x="1905000" y="5476875"/>
             <a:ext cx="6724650" cy="381000"/>
           </a:xfrm>
           <a:prstGeom prst="rect">
@@ -5270,7 +7431,7 @@
         </p:nvSpPr>
         <p:spPr>
           <a:xfrm>
-            <a:off x="9658350" y="5486400"/>
+            <a:off x="9658350" y="5476875"/>
             <a:ext cx="419100" cy="381000"/>
           </a:xfrm>
           <a:prstGeom prst="rect">
@@ -5311,7 +7472,7 @@
         </p:nvSpPr>
         <p:spPr>
           <a:xfrm>
-            <a:off x="10134600" y="5486400"/>
+            <a:off x="10134600" y="5476875"/>
             <a:ext cx="6724650" cy="381000"/>
           </a:xfrm>
           <a:prstGeom prst="rect">
@@ -5386,7 +7547,7 @@
         </p:nvSpPr>
         <p:spPr>
           <a:xfrm>
-            <a:off x="1428750" y="6515100"/>
+            <a:off x="1428750" y="6505575"/>
             <a:ext cx="419100" cy="381000"/>
           </a:xfrm>
           <a:prstGeom prst="rect">
@@ -5427,7 +7588,7 @@
         </p:nvSpPr>
         <p:spPr>
           <a:xfrm>
-            <a:off x="1905000" y="6515100"/>
+            <a:off x="1905000" y="6505575"/>
             <a:ext cx="6724650" cy="381000"/>
           </a:xfrm>
           <a:prstGeom prst="rect">
@@ -5502,7 +7663,7 @@
         </p:nvSpPr>
         <p:spPr>
           <a:xfrm>
-            <a:off x="9658350" y="6515100"/>
+            <a:off x="9658350" y="6505575"/>
             <a:ext cx="419100" cy="381000"/>
           </a:xfrm>
           <a:prstGeom prst="rect">
@@ -5543,7 +7704,7 @@
         </p:nvSpPr>
         <p:spPr>
           <a:xfrm>
-            <a:off x="10134600" y="6515100"/>
+            <a:off x="10134600" y="6505575"/>
             <a:ext cx="6724650" cy="381000"/>
           </a:xfrm>
           <a:prstGeom prst="rect">
@@ -6562,7 +8723,7 @@
                 <a:ea typeface="Pretendard"/>
                 <a:cs typeface="Pretendard"/>
               </a:rPr>
-              <a:t>6-2 의 docker compose 가 떠 있고 orders 토픽(파티션 3)이 있어야 시작할 수 있습니다</a:t>
+              <a:t>실습점검에서 compose 를 켜고 orders 토픽(파티션 3)을 비워 둔 뒤 시작합니다</a:t>
             </a:r>
           </a:p>
         </p:txBody>
@@ -8848,7 +11009,7 @@
                 <a:ea typeface="Pretendard"/>
                 <a:cs typeface="Pretendard"/>
               </a:rPr>
-              <a:t>이번 주 Python 클라이언트는 confluent-kafka 로 통일 — Python 3.10+ 가상환경에서</a:t>
+              <a:t>이번 주 Python 클라이언트는 confluent-kafka 로 통일 — 버전은 2.16.1 처럼 찍힌다(실측)</a:t>
             </a:r>
           </a:p>
         </p:txBody>
@@ -9922,7 +12083,7 @@
                 <a:ea typeface="Pretendard"/>
                 <a:cs typeface="Pretendard"/>
               </a:rPr>
-              <a:t>고객 ID 를 키로 — 같은 파티션에</a:t>
+              <a:t>고객 ID 를 키로 — 같은 고객은 같은 칸</a:t>
             </a:r>
           </a:p>
         </p:txBody>
@@ -10304,7 +12465,7 @@
                 <a:ea typeface="Pretendard"/>
                 <a:cs typeface="Pretendard"/>
               </a:rPr>
-              <a:t>확인: 「전송 완료 topic=orders partition=N offset=M」 30줄 — 같은 customer 키는 항상 같은 partition 번호</a:t>
+              <a:t>확인: 「전송 완료 topic=orders partition=N offset=M」 30줄 — 출력에 고객이 없으니 칸은 4단계 consumer 의 [p칸:오프셋] 으로</a:t>
             </a:r>
           </a:p>
         </p:txBody>
@@ -10565,7 +12726,7 @@
                 <a:ea typeface="Pretendard"/>
                 <a:cs typeface="Pretendard"/>
               </a:rPr>
-              <a:t>3단계 — 일부러 실패시키기</a:t>
+              <a:t>2단계</a:t>
             </a:r>
           </a:p>
         </p:txBody>
@@ -10606,7 +12767,7 @@
                 <a:ea typeface="Pretendard"/>
                 <a:cs typeface="Pretendard"/>
               </a:rPr>
-              <a:t>flush 를 빼고 1000건 — 이론의 경고를 직접</a:t>
+              <a:t>같은 키라도 CLI 와 파이썬은 칸이 다르다</a:t>
             </a:r>
           </a:p>
         </p:txBody>
@@ -10649,8 +12810,8 @@
         </p:nvSpPr>
         <p:spPr>
           <a:xfrm>
-            <a:off x="1143000" y="3067050"/>
-            <a:ext cx="16002000" cy="438150"/>
+            <a:off x="1143000" y="2857500"/>
+            <a:ext cx="7372350" cy="533400"/>
           </a:xfrm>
           <a:prstGeom prst="rect">
             <a:avLst/>
@@ -10665,11 +12826,52 @@
           <a:p>
             <a:pPr algn="l">
               <a:lnSpc>
-                <a:spcPct val="130000"/>
-              </a:lnSpc>
-            </a:pPr>
-            <a:r>
-              <a:rPr sz="2550" b="1">
+                <a:spcPct val="110000"/>
+              </a:lnSpc>
+            </a:pPr>
+            <a:r>
+              <a:rPr sz="3150" b="1">
+                <a:solidFill>
+                  <a:srgbClr val="0D2B5E"/>
+                </a:solidFill>
+                <a:latin typeface="Pretendard"/>
+                <a:ea typeface="Pretendard"/>
+                <a:cs typeface="Pretendard"/>
+              </a:rPr>
+              <a:t>6-2 CLI (자바 클라이언트)</a:t>
+            </a:r>
+          </a:p>
+        </p:txBody>
+      </p:sp>
+      <p:sp>
+        <p:nvSpPr>
+          <p:cNvPr id="9" name="TextBox 8"/>
+          <p:cNvSpPr txBox="1"/>
+          <p:nvPr/>
+        </p:nvSpPr>
+        <p:spPr>
+          <a:xfrm>
+            <a:off x="1143000" y="3467100"/>
+            <a:ext cx="7372350" cy="876300"/>
+          </a:xfrm>
+          <a:prstGeom prst="rect">
+            <a:avLst/>
+          </a:prstGeom>
+          <a:noFill/>
+        </p:spPr>
+        <p:txBody>
+          <a:bodyPr wrap="square" lIns="0" rIns="0" tIns="0" bIns="0" anchor="t">
+            <a:spAutoFit/>
+          </a:bodyPr>
+          <a:lstStyle/>
+          <a:p>
+            <a:pPr algn="l">
+              <a:lnSpc>
+                <a:spcPct val="146000"/>
+              </a:lnSpc>
+            </a:pPr>
+            <a:r>
+              <a:rPr sz="2250" b="0">
                 <a:solidFill>
                   <a:srgbClr val="3D3D3D"/>
                 </a:solidFill>
@@ -10677,25 +12879,25 @@
                 <a:ea typeface="Pretendard"/>
                 <a:cs typeface="Pretendard"/>
               </a:rPr>
-              <a:t>sleep 을 없애고 flush 도 뺀 producer_noflush.py 로 orders-test 토픽에 보냅니다</a:t>
-            </a:r>
-          </a:p>
-        </p:txBody>
-      </p:sp>
-      <p:sp>
-        <p:nvSpPr>
-          <p:cNvPr id="9" name="Rounded Rectangle 8"/>
-          <p:cNvSpPr/>
-          <p:nvPr/>
-        </p:nvSpPr>
-        <p:spPr>
-          <a:xfrm>
-            <a:off x="1143000" y="3924300"/>
-            <a:ext cx="2895600" cy="3143250"/>
+              <a:t>한 클라이언트 안에서는 같은 키 = 언제나 같은 칸</a:t>
+            </a:r>
+          </a:p>
+        </p:txBody>
+      </p:sp>
+      <p:sp>
+        <p:nvSpPr>
+          <p:cNvPr id="10" name="Rounded Rectangle 9"/>
+          <p:cNvSpPr/>
+          <p:nvPr/>
+        </p:nvSpPr>
+        <p:spPr>
+          <a:xfrm>
+            <a:off x="1143000" y="4610100"/>
+            <a:ext cx="7372350" cy="2857500"/>
           </a:xfrm>
           <a:prstGeom prst="roundRect">
             <a:avLst>
-              <a:gd name="adj" fmla="val 1644"/>
+              <a:gd name="adj" fmla="val 1666"/>
             </a:avLst>
           </a:prstGeom>
           <a:solidFill>
@@ -10718,20 +12920,20 @@
       </p:sp>
       <p:sp>
         <p:nvSpPr>
-          <p:cNvPr id="10" name="Rectangle 9"/>
-          <p:cNvSpPr/>
-          <p:nvPr/>
-        </p:nvSpPr>
-        <p:spPr>
-          <a:xfrm>
-            <a:off x="1143000" y="3924300"/>
-            <a:ext cx="2895600" cy="914400"/>
-          </a:xfrm>
-          <a:prstGeom prst="rect">
-            <a:avLst/>
-          </a:prstGeom>
-          <a:solidFill>
-            <a:srgbClr val="0D2B5E"/>
+          <p:cNvPr id="11" name="Oval 10"/>
+          <p:cNvSpPr/>
+          <p:nvPr/>
+        </p:nvSpPr>
+        <p:spPr>
+          <a:xfrm>
+            <a:off x="1447800" y="5016817"/>
+            <a:ext cx="97155" cy="97155"/>
+          </a:xfrm>
+          <a:prstGeom prst="ellipse">
+            <a:avLst/>
+          </a:prstGeom>
+          <a:solidFill>
+            <a:srgbClr val="1E5BC6"/>
           </a:solidFill>
           <a:ln>
             <a:noFill/>
@@ -10748,14 +12950,197 @@
       </p:sp>
       <p:sp>
         <p:nvSpPr>
-          <p:cNvPr id="11" name="TextBox 10"/>
-          <p:cNvSpPr txBox="1"/>
-          <p:nvPr/>
-        </p:nvSpPr>
-        <p:spPr>
-          <a:xfrm>
-            <a:off x="1143000" y="4171950"/>
-            <a:ext cx="2895600" cy="419100"/>
+          <p:cNvPr id="12" name="TextBox 11"/>
+          <p:cNvSpPr txBox="1"/>
+          <p:nvPr/>
+        </p:nvSpPr>
+        <p:spPr>
+          <a:xfrm>
+            <a:off x="1633538" y="4838700"/>
+            <a:ext cx="6634162" cy="453390"/>
+          </a:xfrm>
+          <a:prstGeom prst="rect">
+            <a:avLst/>
+          </a:prstGeom>
+          <a:noFill/>
+        </p:spPr>
+        <p:txBody>
+          <a:bodyPr wrap="square" lIns="0" rIns="0" tIns="0" bIns="0" anchor="ctr">
+            <a:spAutoFit/>
+          </a:bodyPr>
+          <a:lstStyle/>
+          <a:p>
+            <a:pPr algn="l">
+              <a:lnSpc>
+                <a:spcPct val="120000"/>
+              </a:lnSpc>
+            </a:pPr>
+            <a:r>
+              <a:rPr sz="1575" b="0">
+                <a:solidFill>
+                  <a:srgbClr val="3D3D3D"/>
+                </a:solidFill>
+                <a:latin typeface="Pretendard"/>
+                <a:ea typeface="Pretendard"/>
+                <a:cs typeface="Pretendard"/>
+              </a:rPr>
+              <a:t>user1 → 0번 (6-2 실측)</a:t>
+            </a:r>
+          </a:p>
+        </p:txBody>
+      </p:sp>
+      <p:sp>
+        <p:nvSpPr>
+          <p:cNvPr id="13" name="Oval 12"/>
+          <p:cNvSpPr/>
+          <p:nvPr/>
+        </p:nvSpPr>
+        <p:spPr>
+          <a:xfrm>
+            <a:off x="1447800" y="5527358"/>
+            <a:ext cx="97155" cy="97155"/>
+          </a:xfrm>
+          <a:prstGeom prst="ellipse">
+            <a:avLst/>
+          </a:prstGeom>
+          <a:solidFill>
+            <a:srgbClr val="1E5BC6"/>
+          </a:solidFill>
+          <a:ln>
+            <a:noFill/>
+          </a:ln>
+          <a:effectLst/>
+        </p:spPr>
+        <p:txBody>
+          <a:bodyPr rtlCol="0" anchor="ctr" wrap="square"/>
+          <a:lstStyle/>
+          <a:p>
+            <a:pPr algn="ctr"/>
+          </a:p>
+        </p:txBody>
+      </p:sp>
+      <p:sp>
+        <p:nvSpPr>
+          <p:cNvPr id="14" name="TextBox 13"/>
+          <p:cNvSpPr txBox="1"/>
+          <p:nvPr/>
+        </p:nvSpPr>
+        <p:spPr>
+          <a:xfrm>
+            <a:off x="1633538" y="5349240"/>
+            <a:ext cx="6634162" cy="453390"/>
+          </a:xfrm>
+          <a:prstGeom prst="rect">
+            <a:avLst/>
+          </a:prstGeom>
+          <a:noFill/>
+        </p:spPr>
+        <p:txBody>
+          <a:bodyPr wrap="square" lIns="0" rIns="0" tIns="0" bIns="0" anchor="ctr">
+            <a:spAutoFit/>
+          </a:bodyPr>
+          <a:lstStyle/>
+          <a:p>
+            <a:pPr algn="l">
+              <a:lnSpc>
+                <a:spcPct val="120000"/>
+              </a:lnSpc>
+            </a:pPr>
+            <a:r>
+              <a:rPr sz="1575" b="0">
+                <a:solidFill>
+                  <a:srgbClr val="3D3D3D"/>
+                </a:solidFill>
+                <a:latin typeface="Pretendard"/>
+                <a:ea typeface="Pretendard"/>
+                <a:cs typeface="Pretendard"/>
+              </a:rPr>
+              <a:t>자바의 기본 해시</a:t>
+            </a:r>
+          </a:p>
+        </p:txBody>
+      </p:sp>
+      <p:sp>
+        <p:nvSpPr>
+          <p:cNvPr id="15" name="Oval 14"/>
+          <p:cNvSpPr/>
+          <p:nvPr/>
+        </p:nvSpPr>
+        <p:spPr>
+          <a:xfrm>
+            <a:off x="1447800" y="6037898"/>
+            <a:ext cx="97155" cy="97155"/>
+          </a:xfrm>
+          <a:prstGeom prst="ellipse">
+            <a:avLst/>
+          </a:prstGeom>
+          <a:solidFill>
+            <a:srgbClr val="1E5BC6"/>
+          </a:solidFill>
+          <a:ln>
+            <a:noFill/>
+          </a:ln>
+          <a:effectLst/>
+        </p:spPr>
+        <p:txBody>
+          <a:bodyPr rtlCol="0" anchor="ctr" wrap="square"/>
+          <a:lstStyle/>
+          <a:p>
+            <a:pPr algn="ctr"/>
+          </a:p>
+        </p:txBody>
+      </p:sp>
+      <p:sp>
+        <p:nvSpPr>
+          <p:cNvPr id="16" name="TextBox 15"/>
+          <p:cNvSpPr txBox="1"/>
+          <p:nvPr/>
+        </p:nvSpPr>
+        <p:spPr>
+          <a:xfrm>
+            <a:off x="1633538" y="5859780"/>
+            <a:ext cx="6634162" cy="453390"/>
+          </a:xfrm>
+          <a:prstGeom prst="rect">
+            <a:avLst/>
+          </a:prstGeom>
+          <a:noFill/>
+        </p:spPr>
+        <p:txBody>
+          <a:bodyPr wrap="square" lIns="0" rIns="0" tIns="0" bIns="0" anchor="ctr">
+            <a:spAutoFit/>
+          </a:bodyPr>
+          <a:lstStyle/>
+          <a:p>
+            <a:pPr algn="l">
+              <a:lnSpc>
+                <a:spcPct val="120000"/>
+              </a:lnSpc>
+            </a:pPr>
+            <a:r>
+              <a:rPr sz="1575" b="0">
+                <a:solidFill>
+                  <a:srgbClr val="3D3D3D"/>
+                </a:solidFill>
+                <a:latin typeface="Pretendard"/>
+                <a:ea typeface="Pretendard"/>
+                <a:cs typeface="Pretendard"/>
+              </a:rPr>
+              <a:t>둘을 섞어 보내면 같은 키가 두 칸으로 갈라진다</a:t>
+            </a:r>
+          </a:p>
+        </p:txBody>
+      </p:sp>
+      <p:sp>
+        <p:nvSpPr>
+          <p:cNvPr id="17" name="TextBox 16"/>
+          <p:cNvSpPr txBox="1"/>
+          <p:nvPr/>
+        </p:nvSpPr>
+        <p:spPr>
+          <a:xfrm>
+            <a:off x="9772650" y="2857500"/>
+            <a:ext cx="7372350" cy="533400"/>
           </a:xfrm>
           <a:prstGeom prst="rect">
             <a:avLst/>
@@ -10768,35 +13153,35 @@
           </a:bodyPr>
           <a:lstStyle/>
           <a:p>
-            <a:pPr algn="ctr">
-              <a:lnSpc>
-                <a:spcPct val="100000"/>
-              </a:lnSpc>
-            </a:pPr>
-            <a:r>
-              <a:rPr sz="2475" b="1">
-                <a:solidFill>
-                  <a:srgbClr val="FFFFFF"/>
-                </a:solidFill>
-                <a:latin typeface="Pretendard"/>
-                <a:ea typeface="Pretendard"/>
-                <a:cs typeface="Pretendard"/>
-              </a:rPr>
-              <a:t>토픽 생성</a:t>
-            </a:r>
-          </a:p>
-        </p:txBody>
-      </p:sp>
-      <p:sp>
-        <p:nvSpPr>
-          <p:cNvPr id="12" name="TextBox 11"/>
-          <p:cNvSpPr txBox="1"/>
-          <p:nvPr/>
-        </p:nvSpPr>
-        <p:spPr>
-          <a:xfrm>
-            <a:off x="1352550" y="5143500"/>
-            <a:ext cx="2476500" cy="1524000"/>
+            <a:pPr algn="l">
+              <a:lnSpc>
+                <a:spcPct val="110000"/>
+              </a:lnSpc>
+            </a:pPr>
+            <a:r>
+              <a:rPr sz="3150" b="1">
+                <a:solidFill>
+                  <a:srgbClr val="0D2B5E"/>
+                </a:solidFill>
+                <a:latin typeface="Pretendard"/>
+                <a:ea typeface="Pretendard"/>
+                <a:cs typeface="Pretendard"/>
+              </a:rPr>
+              <a:t>오늘 파이썬 (librdkafka)</a:t>
+            </a:r>
+          </a:p>
+        </p:txBody>
+      </p:sp>
+      <p:sp>
+        <p:nvSpPr>
+          <p:cNvPr id="18" name="TextBox 17"/>
+          <p:cNvSpPr txBox="1"/>
+          <p:nvPr/>
+        </p:nvSpPr>
+        <p:spPr>
+          <a:xfrm>
+            <a:off x="9772650" y="3467100"/>
+            <a:ext cx="7372350" cy="876300"/>
           </a:xfrm>
           <a:prstGeom prst="rect">
             <a:avLst/>
@@ -10809,13 +13194,13 @@
           </a:bodyPr>
           <a:lstStyle/>
           <a:p>
-            <a:pPr algn="ctr">
+            <a:pPr algn="l">
               <a:lnSpc>
                 <a:spcPct val="146000"/>
               </a:lnSpc>
             </a:pPr>
             <a:r>
-              <a:rPr sz="2100" b="0">
+              <a:rPr sz="2250" b="0">
                 <a:solidFill>
                   <a:srgbClr val="3D3D3D"/>
                 </a:solidFill>
@@ -10823,43 +13208,25 @@
                 <a:ea typeface="Pretendard"/>
                 <a:cs typeface="Pretendard"/>
               </a:rPr>
-              <a:t>orders-test</a:t>
-            </a:r>
-          </a:p>
-          <a:p>
-            <a:pPr algn="ctr">
-              <a:lnSpc>
-                <a:spcPct val="146000"/>
-              </a:lnSpc>
-            </a:pPr>
-            <a:r>
-              <a:rPr sz="2100" b="0">
-                <a:solidFill>
-                  <a:srgbClr val="3D3D3D"/>
-                </a:solidFill>
-                <a:latin typeface="Pretendard"/>
-                <a:ea typeface="Pretendard"/>
-                <a:cs typeface="Pretendard"/>
-              </a:rPr>
-              <a:t>파티션 1</a:t>
-            </a:r>
-          </a:p>
-        </p:txBody>
-      </p:sp>
-      <p:sp>
-        <p:nvSpPr>
-          <p:cNvPr id="13" name="Rounded Rectangle 12"/>
-          <p:cNvSpPr/>
-          <p:nvPr/>
-        </p:nvSpPr>
-        <p:spPr>
-          <a:xfrm>
-            <a:off x="4419600" y="3924300"/>
-            <a:ext cx="2895600" cy="3143250"/>
+              <a:t>기본 해시가 자바와 다르다</a:t>
+            </a:r>
+          </a:p>
+        </p:txBody>
+      </p:sp>
+      <p:sp>
+        <p:nvSpPr>
+          <p:cNvPr id="19" name="Rounded Rectangle 18"/>
+          <p:cNvSpPr/>
+          <p:nvPr/>
+        </p:nvSpPr>
+        <p:spPr>
+          <a:xfrm>
+            <a:off x="9772650" y="4610100"/>
+            <a:ext cx="7372350" cy="2857500"/>
           </a:xfrm>
           <a:prstGeom prst="roundRect">
             <a:avLst>
-              <a:gd name="adj" fmla="val 1644"/>
+              <a:gd name="adj" fmla="val 1666"/>
             </a:avLst>
           </a:prstGeom>
           <a:solidFill>
@@ -10882,16 +13249,16 @@
       </p:sp>
       <p:sp>
         <p:nvSpPr>
-          <p:cNvPr id="14" name="Rectangle 13"/>
-          <p:cNvSpPr/>
-          <p:nvPr/>
-        </p:nvSpPr>
-        <p:spPr>
-          <a:xfrm>
-            <a:off x="4419600" y="3924300"/>
-            <a:ext cx="2895600" cy="914400"/>
-          </a:xfrm>
-          <a:prstGeom prst="rect">
+          <p:cNvPr id="20" name="Oval 19"/>
+          <p:cNvSpPr/>
+          <p:nvPr/>
+        </p:nvSpPr>
+        <p:spPr>
+          <a:xfrm>
+            <a:off x="10077450" y="5016817"/>
+            <a:ext cx="97155" cy="97155"/>
+          </a:xfrm>
+          <a:prstGeom prst="ellipse">
             <a:avLst/>
           </a:prstGeom>
           <a:solidFill>
@@ -10912,74 +13279,33 @@
       </p:sp>
       <p:sp>
         <p:nvSpPr>
-          <p:cNvPr id="15" name="TextBox 14"/>
-          <p:cNvSpPr txBox="1"/>
-          <p:nvPr/>
-        </p:nvSpPr>
-        <p:spPr>
-          <a:xfrm>
-            <a:off x="4419600" y="4171950"/>
-            <a:ext cx="2895600" cy="419100"/>
-          </a:xfrm>
-          <a:prstGeom prst="rect">
-            <a:avLst/>
-          </a:prstGeom>
-          <a:noFill/>
-        </p:spPr>
-        <p:txBody>
-          <a:bodyPr wrap="square" lIns="0" rIns="0" tIns="0" bIns="0" anchor="t">
-            <a:spAutoFit/>
-          </a:bodyPr>
-          <a:lstStyle/>
-          <a:p>
-            <a:pPr algn="ctr">
-              <a:lnSpc>
-                <a:spcPct val="100000"/>
-              </a:lnSpc>
-            </a:pPr>
-            <a:r>
-              <a:rPr sz="2475" b="1">
-                <a:solidFill>
-                  <a:srgbClr val="FFFFFF"/>
-                </a:solidFill>
-                <a:latin typeface="Pretendard"/>
-                <a:ea typeface="Pretendard"/>
-                <a:cs typeface="Pretendard"/>
-              </a:rPr>
-              <a:t>producer_noflush</a:t>
-            </a:r>
-          </a:p>
-        </p:txBody>
-      </p:sp>
-      <p:sp>
-        <p:nvSpPr>
-          <p:cNvPr id="16" name="TextBox 15"/>
-          <p:cNvSpPr txBox="1"/>
-          <p:nvPr/>
-        </p:nvSpPr>
-        <p:spPr>
-          <a:xfrm>
-            <a:off x="4629150" y="5143500"/>
-            <a:ext cx="2476500" cy="1524000"/>
-          </a:xfrm>
-          <a:prstGeom prst="rect">
-            <a:avLst/>
-          </a:prstGeom>
-          <a:noFill/>
-        </p:spPr>
-        <p:txBody>
-          <a:bodyPr wrap="square" lIns="0" rIns="0" tIns="0" bIns="0" anchor="t">
-            <a:spAutoFit/>
-          </a:bodyPr>
-          <a:lstStyle/>
-          <a:p>
-            <a:pPr algn="ctr">
-              <a:lnSpc>
-                <a:spcPct val="146000"/>
-              </a:lnSpc>
-            </a:pPr>
-            <a:r>
-              <a:rPr sz="2100" b="0">
+          <p:cNvPr id="21" name="TextBox 20"/>
+          <p:cNvSpPr txBox="1"/>
+          <p:nvPr/>
+        </p:nvSpPr>
+        <p:spPr>
+          <a:xfrm>
+            <a:off x="10263188" y="4838700"/>
+            <a:ext cx="6634162" cy="453390"/>
+          </a:xfrm>
+          <a:prstGeom prst="rect">
+            <a:avLst/>
+          </a:prstGeom>
+          <a:noFill/>
+        </p:spPr>
+        <p:txBody>
+          <a:bodyPr wrap="square" lIns="0" rIns="0" tIns="0" bIns="0" anchor="ctr">
+            <a:spAutoFit/>
+          </a:bodyPr>
+          <a:lstStyle/>
+          <a:p>
+            <a:pPr algn="l">
+              <a:lnSpc>
+                <a:spcPct val="120000"/>
+              </a:lnSpc>
+            </a:pPr>
+            <a:r>
+              <a:rPr sz="1575" b="0">
                 <a:solidFill>
                   <a:srgbClr val="3D3D3D"/>
                 </a:solidFill>
@@ -10987,79 +13313,27 @@
                 <a:ea typeface="Pretendard"/>
                 <a:cs typeface="Pretendard"/>
               </a:rPr>
-              <a:t>1000건 produce</a:t>
-            </a:r>
-          </a:p>
-          <a:p>
-            <a:pPr algn="ctr">
-              <a:lnSpc>
-                <a:spcPct val="146000"/>
-              </a:lnSpc>
-            </a:pPr>
-            <a:r>
-              <a:rPr sz="2100" b="0">
-                <a:solidFill>
-                  <a:srgbClr val="3D3D3D"/>
-                </a:solidFill>
-                <a:latin typeface="Pretendard"/>
-                <a:ea typeface="Pretendard"/>
-                <a:cs typeface="Pretendard"/>
-              </a:rPr>
-              <a:t>flush 없음</a:t>
-            </a:r>
-          </a:p>
-        </p:txBody>
-      </p:sp>
-      <p:sp>
-        <p:nvSpPr>
-          <p:cNvPr id="17" name="Rounded Rectangle 16"/>
-          <p:cNvSpPr/>
-          <p:nvPr/>
-        </p:nvSpPr>
-        <p:spPr>
-          <a:xfrm>
-            <a:off x="7696200" y="3924300"/>
-            <a:ext cx="2895600" cy="3143250"/>
-          </a:xfrm>
-          <a:prstGeom prst="roundRect">
-            <a:avLst>
-              <a:gd name="adj" fmla="val 1644"/>
-            </a:avLst>
-          </a:prstGeom>
-          <a:solidFill>
-            <a:srgbClr val="FAFBFD"/>
-          </a:solidFill>
-          <a:ln w="9525">
-            <a:solidFill>
-              <a:srgbClr val="DCE1E8"/>
-            </a:solidFill>
-          </a:ln>
-          <a:effectLst/>
-        </p:spPr>
-        <p:txBody>
-          <a:bodyPr rtlCol="0" anchor="ctr" wrap="square"/>
-          <a:lstStyle/>
-          <a:p>
-            <a:pPr algn="ctr"/>
-          </a:p>
-        </p:txBody>
-      </p:sp>
-      <p:sp>
-        <p:nvSpPr>
-          <p:cNvPr id="18" name="Rectangle 17"/>
-          <p:cNvSpPr/>
-          <p:nvPr/>
-        </p:nvSpPr>
-        <p:spPr>
-          <a:xfrm>
-            <a:off x="7696200" y="3924300"/>
-            <a:ext cx="2895600" cy="914400"/>
-          </a:xfrm>
-          <a:prstGeom prst="rect">
-            <a:avLst/>
-          </a:prstGeom>
-          <a:solidFill>
-            <a:srgbClr val="0D2B5E"/>
+              <a:t>user1 → 1번 · user2 · user3 → 2번</a:t>
+            </a:r>
+          </a:p>
+        </p:txBody>
+      </p:sp>
+      <p:sp>
+        <p:nvSpPr>
+          <p:cNvPr id="22" name="Oval 21"/>
+          <p:cNvSpPr/>
+          <p:nvPr/>
+        </p:nvSpPr>
+        <p:spPr>
+          <a:xfrm>
+            <a:off x="10077450" y="5527358"/>
+            <a:ext cx="97155" cy="97155"/>
+          </a:xfrm>
+          <a:prstGeom prst="ellipse">
+            <a:avLst/>
+          </a:prstGeom>
+          <a:solidFill>
+            <a:srgbClr val="1E5BC6"/>
           </a:solidFill>
           <a:ln>
             <a:noFill/>
@@ -11076,74 +13350,33 @@
       </p:sp>
       <p:sp>
         <p:nvSpPr>
-          <p:cNvPr id="19" name="TextBox 18"/>
-          <p:cNvSpPr txBox="1"/>
-          <p:nvPr/>
-        </p:nvSpPr>
-        <p:spPr>
-          <a:xfrm>
-            <a:off x="7696200" y="4171950"/>
-            <a:ext cx="2895600" cy="419100"/>
-          </a:xfrm>
-          <a:prstGeom prst="rect">
-            <a:avLst/>
-          </a:prstGeom>
-          <a:noFill/>
-        </p:spPr>
-        <p:txBody>
-          <a:bodyPr wrap="square" lIns="0" rIns="0" tIns="0" bIns="0" anchor="t">
-            <a:spAutoFit/>
-          </a:bodyPr>
-          <a:lstStyle/>
-          <a:p>
-            <a:pPr algn="ctr">
-              <a:lnSpc>
-                <a:spcPct val="100000"/>
-              </a:lnSpc>
-            </a:pPr>
-            <a:r>
-              <a:rPr sz="2475" b="1">
-                <a:solidFill>
-                  <a:srgbClr val="FFFFFF"/>
-                </a:solidFill>
-                <a:latin typeface="Pretendard"/>
-                <a:ea typeface="Pretendard"/>
-                <a:cs typeface="Pretendard"/>
-              </a:rPr>
-              <a:t>sleep 3</a:t>
-            </a:r>
-          </a:p>
-        </p:txBody>
-      </p:sp>
-      <p:sp>
-        <p:nvSpPr>
-          <p:cNvPr id="20" name="TextBox 19"/>
-          <p:cNvSpPr txBox="1"/>
-          <p:nvPr/>
-        </p:nvSpPr>
-        <p:spPr>
-          <a:xfrm>
-            <a:off x="7905750" y="5143500"/>
-            <a:ext cx="2476500" cy="1524000"/>
-          </a:xfrm>
-          <a:prstGeom prst="rect">
-            <a:avLst/>
-          </a:prstGeom>
-          <a:noFill/>
-        </p:spPr>
-        <p:txBody>
-          <a:bodyPr wrap="square" lIns="0" rIns="0" tIns="0" bIns="0" anchor="t">
-            <a:spAutoFit/>
-          </a:bodyPr>
-          <a:lstStyle/>
-          <a:p>
-            <a:pPr algn="ctr">
-              <a:lnSpc>
-                <a:spcPct val="146000"/>
-              </a:lnSpc>
-            </a:pPr>
-            <a:r>
-              <a:rPr sz="2100" b="0">
+          <p:cNvPr id="23" name="TextBox 22"/>
+          <p:cNvSpPr txBox="1"/>
+          <p:nvPr/>
+        </p:nvSpPr>
+        <p:spPr>
+          <a:xfrm>
+            <a:off x="10263188" y="5349240"/>
+            <a:ext cx="6634162" cy="453390"/>
+          </a:xfrm>
+          <a:prstGeom prst="rect">
+            <a:avLst/>
+          </a:prstGeom>
+          <a:noFill/>
+        </p:spPr>
+        <p:txBody>
+          <a:bodyPr wrap="square" lIns="0" rIns="0" tIns="0" bIns="0" anchor="ctr">
+            <a:spAutoFit/>
+          </a:bodyPr>
+          <a:lstStyle/>
+          <a:p>
+            <a:pPr algn="l">
+              <a:lnSpc>
+                <a:spcPct val="120000"/>
+              </a:lnSpc>
+            </a:pPr>
+            <a:r>
+              <a:rPr sz="1575" b="0">
                 <a:solidFill>
                   <a:srgbClr val="3D3D3D"/>
                 </a:solidFill>
@@ -11151,57 +13384,23 @@
                 <a:ea typeface="Pretendard"/>
                 <a:cs typeface="Pretendard"/>
               </a:rPr>
-              <a:t>잠시 기다린 뒤</a:t>
-            </a:r>
-          </a:p>
-        </p:txBody>
-      </p:sp>
-      <p:sp>
-        <p:nvSpPr>
-          <p:cNvPr id="21" name="Rounded Rectangle 20"/>
-          <p:cNvSpPr/>
-          <p:nvPr/>
-        </p:nvSpPr>
-        <p:spPr>
-          <a:xfrm>
-            <a:off x="10972800" y="3924300"/>
-            <a:ext cx="2895600" cy="3143250"/>
-          </a:xfrm>
-          <a:prstGeom prst="roundRect">
-            <a:avLst>
-              <a:gd name="adj" fmla="val 1644"/>
-            </a:avLst>
-          </a:prstGeom>
-          <a:solidFill>
-            <a:srgbClr val="FAFBFD"/>
-          </a:solidFill>
-          <a:ln w="9525">
-            <a:solidFill>
-              <a:srgbClr val="DCE1E8"/>
-            </a:solidFill>
-          </a:ln>
-          <a:effectLst/>
-        </p:spPr>
-        <p:txBody>
-          <a:bodyPr rtlCol="0" anchor="ctr" wrap="square"/>
-          <a:lstStyle/>
-          <a:p>
-            <a:pPr algn="ctr"/>
-          </a:p>
-        </p:txBody>
-      </p:sp>
-      <p:sp>
-        <p:nvSpPr>
-          <p:cNvPr id="22" name="Rectangle 21"/>
-          <p:cNvSpPr/>
-          <p:nvPr/>
-        </p:nvSpPr>
-        <p:spPr>
-          <a:xfrm>
-            <a:off x="10972800" y="3924300"/>
-            <a:ext cx="2895600" cy="914400"/>
-          </a:xfrm>
-          <a:prstGeom prst="rect">
+              <a:t>0번은 빈 칸 (실측)</a:t>
+            </a:r>
+          </a:p>
+        </p:txBody>
+      </p:sp>
+      <p:sp>
+        <p:nvSpPr>
+          <p:cNvPr id="24" name="Oval 23"/>
+          <p:cNvSpPr/>
+          <p:nvPr/>
+        </p:nvSpPr>
+        <p:spPr>
+          <a:xfrm>
+            <a:off x="10077450" y="6037898"/>
+            <a:ext cx="97155" cy="97155"/>
+          </a:xfrm>
+          <a:prstGeom prst="ellipse">
             <a:avLst/>
           </a:prstGeom>
           <a:solidFill>
@@ -11222,74 +13421,33 @@
       </p:sp>
       <p:sp>
         <p:nvSpPr>
-          <p:cNvPr id="23" name="TextBox 22"/>
-          <p:cNvSpPr txBox="1"/>
-          <p:nvPr/>
-        </p:nvSpPr>
-        <p:spPr>
-          <a:xfrm>
-            <a:off x="10972800" y="4171950"/>
-            <a:ext cx="2895600" cy="419100"/>
-          </a:xfrm>
-          <a:prstGeom prst="rect">
-            <a:avLst/>
-          </a:prstGeom>
-          <a:noFill/>
-        </p:spPr>
-        <p:txBody>
-          <a:bodyPr wrap="square" lIns="0" rIns="0" tIns="0" bIns="0" anchor="t">
-            <a:spAutoFit/>
-          </a:bodyPr>
-          <a:lstStyle/>
-          <a:p>
-            <a:pPr algn="ctr">
-              <a:lnSpc>
-                <a:spcPct val="100000"/>
-              </a:lnSpc>
-            </a:pPr>
-            <a:r>
-              <a:rPr sz="2475" b="1">
-                <a:solidFill>
-                  <a:srgbClr val="FFFFFF"/>
-                </a:solidFill>
-                <a:latin typeface="Pretendard"/>
-                <a:ea typeface="Pretendard"/>
-                <a:cs typeface="Pretendard"/>
-              </a:rPr>
-              <a:t>오프셋 조회</a:t>
-            </a:r>
-          </a:p>
-        </p:txBody>
-      </p:sp>
-      <p:sp>
-        <p:nvSpPr>
-          <p:cNvPr id="24" name="TextBox 23"/>
-          <p:cNvSpPr txBox="1"/>
-          <p:nvPr/>
-        </p:nvSpPr>
-        <p:spPr>
-          <a:xfrm>
-            <a:off x="11182350" y="5143500"/>
-            <a:ext cx="2476500" cy="1524000"/>
-          </a:xfrm>
-          <a:prstGeom prst="rect">
-            <a:avLst/>
-          </a:prstGeom>
-          <a:noFill/>
-        </p:spPr>
-        <p:txBody>
-          <a:bodyPr wrap="square" lIns="0" rIns="0" tIns="0" bIns="0" anchor="t">
-            <a:spAutoFit/>
-          </a:bodyPr>
-          <a:lstStyle/>
-          <a:p>
-            <a:pPr algn="ctr">
-              <a:lnSpc>
-                <a:spcPct val="146000"/>
-              </a:lnSpc>
-            </a:pPr>
-            <a:r>
-              <a:rPr sz="2100" b="0">
+          <p:cNvPr id="25" name="TextBox 24"/>
+          <p:cNvSpPr txBox="1"/>
+          <p:nvPr/>
+        </p:nvSpPr>
+        <p:spPr>
+          <a:xfrm>
+            <a:off x="10263188" y="5859780"/>
+            <a:ext cx="6634162" cy="453390"/>
+          </a:xfrm>
+          <a:prstGeom prst="rect">
+            <a:avLst/>
+          </a:prstGeom>
+          <a:noFill/>
+        </p:spPr>
+        <p:txBody>
+          <a:bodyPr wrap="square" lIns="0" rIns="0" tIns="0" bIns="0" anchor="ctr">
+            <a:spAutoFit/>
+          </a:bodyPr>
+          <a:lstStyle/>
+          <a:p>
+            <a:pPr algn="l">
+              <a:lnSpc>
+                <a:spcPct val="120000"/>
+              </a:lnSpc>
+            </a:pPr>
+            <a:r>
+              <a:rPr sz="1575" b="0">
                 <a:solidFill>
                   <a:srgbClr val="3D3D3D"/>
                 </a:solidFill>
@@ -11297,75 +13455,23 @@
                 <a:ea typeface="Pretendard"/>
                 <a:cs typeface="Pretendard"/>
               </a:rPr>
-              <a:t>get-offsets 로</a:t>
-            </a:r>
-          </a:p>
-          <a:p>
-            <a:pPr algn="ctr">
-              <a:lnSpc>
-                <a:spcPct val="146000"/>
-              </a:lnSpc>
-            </a:pPr>
-            <a:r>
-              <a:rPr sz="2100" b="0">
-                <a:solidFill>
-                  <a:srgbClr val="3D3D3D"/>
-                </a:solidFill>
-                <a:latin typeface="Pretendard"/>
-                <a:ea typeface="Pretendard"/>
-                <a:cs typeface="Pretendard"/>
-              </a:rPr>
-              <a:t>쌓인 개수 확인</a:t>
-            </a:r>
-          </a:p>
-        </p:txBody>
-      </p:sp>
-      <p:sp>
-        <p:nvSpPr>
-          <p:cNvPr id="25" name="Rounded Rectangle 24"/>
-          <p:cNvSpPr/>
-          <p:nvPr/>
-        </p:nvSpPr>
-        <p:spPr>
-          <a:xfrm>
-            <a:off x="14249400" y="3924300"/>
-            <a:ext cx="2895600" cy="3143250"/>
-          </a:xfrm>
-          <a:prstGeom prst="roundRect">
-            <a:avLst>
-              <a:gd name="adj" fmla="val 1644"/>
-            </a:avLst>
-          </a:prstGeom>
-          <a:solidFill>
-            <a:srgbClr val="FAFBFD"/>
-          </a:solidFill>
-          <a:ln w="9525">
-            <a:solidFill>
-              <a:srgbClr val="DCE1E8"/>
-            </a:solidFill>
-          </a:ln>
-          <a:effectLst/>
-        </p:spPr>
-        <p:txBody>
-          <a:bodyPr rtlCol="0" anchor="ctr" wrap="square"/>
-          <a:lstStyle/>
-          <a:p>
-            <a:pPr algn="ctr"/>
-          </a:p>
-        </p:txBody>
-      </p:sp>
-      <p:sp>
-        <p:nvSpPr>
-          <p:cNvPr id="26" name="Rectangle 25"/>
-          <p:cNvSpPr/>
-          <p:nvPr/>
-        </p:nvSpPr>
-        <p:spPr>
-          <a:xfrm>
-            <a:off x="14249400" y="3924300"/>
-            <a:ext cx="2895600" cy="914400"/>
-          </a:xfrm>
-          <a:prstGeom prst="rect">
+              <a:t>"partitioner": "murmur2_random" 이면 같아짐</a:t>
+            </a:r>
+          </a:p>
+        </p:txBody>
+      </p:sp>
+      <p:sp>
+        <p:nvSpPr>
+          <p:cNvPr id="26" name="Oval 25"/>
+          <p:cNvSpPr/>
+          <p:nvPr/>
+        </p:nvSpPr>
+        <p:spPr>
+          <a:xfrm>
+            <a:off x="8686800" y="3771900"/>
+            <a:ext cx="914400" cy="914400"/>
+          </a:xfrm>
+          <a:prstGeom prst="ellipse">
             <a:avLst/>
           </a:prstGeom>
           <a:solidFill>
@@ -11392,8 +13498,8 @@
         </p:nvSpPr>
         <p:spPr>
           <a:xfrm>
-            <a:off x="14249400" y="4171950"/>
-            <a:ext cx="2895600" cy="419100"/>
+            <a:off x="8686800" y="4057650"/>
+            <a:ext cx="914400" cy="381000"/>
           </a:xfrm>
           <a:prstGeom prst="rect">
             <a:avLst/>
@@ -11412,7 +13518,7 @@
               </a:lnSpc>
             </a:pPr>
             <a:r>
-              <a:rPr sz="2475" b="1">
+              <a:rPr sz="2250" b="1">
                 <a:solidFill>
                   <a:srgbClr val="FFFFFF"/>
                 </a:solidFill>
@@ -11420,73 +13526,14 @@
                 <a:ea typeface="Pretendard"/>
                 <a:cs typeface="Pretendard"/>
               </a:rPr>
-              <a:t>flush 넣고 재실행</a:t>
-            </a:r>
-          </a:p>
-        </p:txBody>
-      </p:sp>
-      <p:sp>
-        <p:nvSpPr>
-          <p:cNvPr id="28" name="TextBox 27"/>
-          <p:cNvSpPr txBox="1"/>
-          <p:nvPr/>
-        </p:nvSpPr>
-        <p:spPr>
-          <a:xfrm>
-            <a:off x="14458950" y="5143500"/>
-            <a:ext cx="2476500" cy="1524000"/>
-          </a:xfrm>
-          <a:prstGeom prst="rect">
-            <a:avLst/>
-          </a:prstGeom>
-          <a:noFill/>
-        </p:spPr>
-        <p:txBody>
-          <a:bodyPr wrap="square" lIns="0" rIns="0" tIns="0" bIns="0" anchor="t">
-            <a:spAutoFit/>
-          </a:bodyPr>
-          <a:lstStyle/>
-          <a:p>
-            <a:pPr algn="ctr">
-              <a:lnSpc>
-                <a:spcPct val="146000"/>
-              </a:lnSpc>
-            </a:pPr>
-            <a:r>
-              <a:rPr sz="2100" b="0">
-                <a:solidFill>
-                  <a:srgbClr val="3D3D3D"/>
-                </a:solidFill>
-                <a:latin typeface="Pretendard"/>
-                <a:ea typeface="Pretendard"/>
-                <a:cs typeface="Pretendard"/>
-              </a:rPr>
-              <a:t>정확히 1000</a:t>
-            </a:r>
-          </a:p>
-          <a:p>
-            <a:pPr algn="ctr">
-              <a:lnSpc>
-                <a:spcPct val="146000"/>
-              </a:lnSpc>
-            </a:pPr>
-            <a:r>
-              <a:rPr sz="2100" b="0">
-                <a:solidFill>
-                  <a:srgbClr val="3D3D3D"/>
-                </a:solidFill>
-                <a:latin typeface="Pretendard"/>
-                <a:ea typeface="Pretendard"/>
-                <a:cs typeface="Pretendard"/>
-              </a:rPr>
-              <a:t>비교</a:t>
-            </a:r>
-          </a:p>
-        </p:txBody>
-      </p:sp>
-      <p:sp>
-        <p:nvSpPr>
-          <p:cNvPr id="29" name="Rectangle 28"/>
+              <a:t>VS</a:t>
+            </a:r>
+          </a:p>
+        </p:txBody>
+      </p:sp>
+      <p:sp>
+        <p:nvSpPr>
+          <p:cNvPr id="28" name="Rectangle 27"/>
           <p:cNvSpPr/>
           <p:nvPr/>
         </p:nvSpPr>
@@ -11516,7 +13563,7 @@
       </p:sp>
       <p:sp>
         <p:nvSpPr>
-          <p:cNvPr id="30" name="TextBox 29"/>
+          <p:cNvPr id="29" name="TextBox 28"/>
           <p:cNvSpPr txBox="1"/>
           <p:nvPr/>
         </p:nvSpPr>
@@ -11557,7 +13604,7 @@
       </p:sp>
       <p:sp>
         <p:nvSpPr>
-          <p:cNvPr id="31" name="TextBox 30"/>
+          <p:cNvPr id="30" name="TextBox 29"/>
           <p:cNvSpPr txBox="1"/>
           <p:nvPr/>
         </p:nvSpPr>
@@ -11781,7 +13828,7 @@
                 <a:ea typeface="Pretendard"/>
                 <a:cs typeface="Pretendard"/>
               </a:rPr>
-              <a:t>「보냈다고 생각한 건수」와 실제 쌓인 개수</a:t>
+              <a:t>flush 를 빼고 1000건 — 이론의 경고를 직접</a:t>
             </a:r>
           </a:p>
         </p:txBody>
@@ -11824,8 +13871,8 @@
         </p:nvSpPr>
         <p:spPr>
           <a:xfrm>
-            <a:off x="1143000" y="2857500"/>
-            <a:ext cx="7372350" cy="533400"/>
+            <a:off x="1143000" y="3067050"/>
+            <a:ext cx="16002000" cy="438150"/>
           </a:xfrm>
           <a:prstGeom prst="rect">
             <a:avLst/>
@@ -11840,52 +13887,11 @@
           <a:p>
             <a:pPr algn="l">
               <a:lnSpc>
-                <a:spcPct val="110000"/>
-              </a:lnSpc>
-            </a:pPr>
-            <a:r>
-              <a:rPr sz="3150" b="1">
-                <a:solidFill>
-                  <a:srgbClr val="0D2B5E"/>
-                </a:solidFill>
-                <a:latin typeface="Pretendard"/>
-                <a:ea typeface="Pretendard"/>
-                <a:cs typeface="Pretendard"/>
-              </a:rPr>
-              <a:t>flush() 없음</a:t>
-            </a:r>
-          </a:p>
-        </p:txBody>
-      </p:sp>
-      <p:sp>
-        <p:nvSpPr>
-          <p:cNvPr id="9" name="TextBox 8"/>
-          <p:cNvSpPr txBox="1"/>
-          <p:nvPr/>
-        </p:nvSpPr>
-        <p:spPr>
-          <a:xfrm>
-            <a:off x="1143000" y="3467100"/>
-            <a:ext cx="7372350" cy="876300"/>
-          </a:xfrm>
-          <a:prstGeom prst="rect">
-            <a:avLst/>
-          </a:prstGeom>
-          <a:noFill/>
-        </p:spPr>
-        <p:txBody>
-          <a:bodyPr wrap="square" lIns="0" rIns="0" tIns="0" bIns="0" anchor="t">
-            <a:spAutoFit/>
-          </a:bodyPr>
-          <a:lstStyle/>
-          <a:p>
-            <a:pPr algn="l">
-              <a:lnSpc>
-                <a:spcPct val="146000"/>
-              </a:lnSpc>
-            </a:pPr>
-            <a:r>
-              <a:rPr sz="2250" b="0">
+                <a:spcPct val="130000"/>
+              </a:lnSpc>
+            </a:pPr>
+            <a:r>
+              <a:rPr sz="2550" b="1">
                 <a:solidFill>
                   <a:srgbClr val="3D3D3D"/>
                 </a:solidFill>
@@ -11893,25 +13899,25 @@
                 <a:ea typeface="Pretendard"/>
                 <a:cs typeface="Pretendard"/>
               </a:rPr>
-              <a:t>프로그램이 먼저 끝나 버퍼에 남은 것이 사라진다</a:t>
-            </a:r>
-          </a:p>
-        </p:txBody>
-      </p:sp>
-      <p:sp>
-        <p:nvSpPr>
-          <p:cNvPr id="10" name="Rounded Rectangle 9"/>
-          <p:cNvSpPr/>
-          <p:nvPr/>
-        </p:nvSpPr>
-        <p:spPr>
-          <a:xfrm>
-            <a:off x="1143000" y="4610100"/>
-            <a:ext cx="7372350" cy="2857500"/>
+              <a:t>sleep 을 없애고 flush 도 뺀 producer_noflush.py 로 orders-test 토픽에 보냅니다</a:t>
+            </a:r>
+          </a:p>
+        </p:txBody>
+      </p:sp>
+      <p:sp>
+        <p:nvSpPr>
+          <p:cNvPr id="9" name="Rounded Rectangle 8"/>
+          <p:cNvSpPr/>
+          <p:nvPr/>
+        </p:nvSpPr>
+        <p:spPr>
+          <a:xfrm>
+            <a:off x="1143000" y="3924300"/>
+            <a:ext cx="2895600" cy="3143250"/>
           </a:xfrm>
           <a:prstGeom prst="roundRect">
             <a:avLst>
-              <a:gd name="adj" fmla="val 1666"/>
+              <a:gd name="adj" fmla="val 1644"/>
             </a:avLst>
           </a:prstGeom>
           <a:solidFill>
@@ -11934,20 +13940,20 @@
       </p:sp>
       <p:sp>
         <p:nvSpPr>
-          <p:cNvPr id="11" name="Oval 10"/>
-          <p:cNvSpPr/>
-          <p:nvPr/>
-        </p:nvSpPr>
-        <p:spPr>
-          <a:xfrm>
-            <a:off x="1447800" y="5016817"/>
-            <a:ext cx="97155" cy="97155"/>
-          </a:xfrm>
-          <a:prstGeom prst="ellipse">
-            <a:avLst/>
-          </a:prstGeom>
-          <a:solidFill>
-            <a:srgbClr val="1E5BC6"/>
+          <p:cNvPr id="10" name="Rectangle 9"/>
+          <p:cNvSpPr/>
+          <p:nvPr/>
+        </p:nvSpPr>
+        <p:spPr>
+          <a:xfrm>
+            <a:off x="1143000" y="3924300"/>
+            <a:ext cx="2895600" cy="914400"/>
+          </a:xfrm>
+          <a:prstGeom prst="rect">
+            <a:avLst/>
+          </a:prstGeom>
+          <a:solidFill>
+            <a:srgbClr val="0D2B5E"/>
           </a:solidFill>
           <a:ln>
             <a:noFill/>
@@ -11964,33 +13970,74 @@
       </p:sp>
       <p:sp>
         <p:nvSpPr>
+          <p:cNvPr id="11" name="TextBox 10"/>
+          <p:cNvSpPr txBox="1"/>
+          <p:nvPr/>
+        </p:nvSpPr>
+        <p:spPr>
+          <a:xfrm>
+            <a:off x="1143000" y="4171950"/>
+            <a:ext cx="2895600" cy="419100"/>
+          </a:xfrm>
+          <a:prstGeom prst="rect">
+            <a:avLst/>
+          </a:prstGeom>
+          <a:noFill/>
+        </p:spPr>
+        <p:txBody>
+          <a:bodyPr wrap="square" lIns="0" rIns="0" tIns="0" bIns="0" anchor="t">
+            <a:spAutoFit/>
+          </a:bodyPr>
+          <a:lstStyle/>
+          <a:p>
+            <a:pPr algn="ctr">
+              <a:lnSpc>
+                <a:spcPct val="100000"/>
+              </a:lnSpc>
+            </a:pPr>
+            <a:r>
+              <a:rPr sz="2475" b="1">
+                <a:solidFill>
+                  <a:srgbClr val="FFFFFF"/>
+                </a:solidFill>
+                <a:latin typeface="Pretendard"/>
+                <a:ea typeface="Pretendard"/>
+                <a:cs typeface="Pretendard"/>
+              </a:rPr>
+              <a:t>토픽 생성</a:t>
+            </a:r>
+          </a:p>
+        </p:txBody>
+      </p:sp>
+      <p:sp>
+        <p:nvSpPr>
           <p:cNvPr id="12" name="TextBox 11"/>
           <p:cNvSpPr txBox="1"/>
           <p:nvPr/>
         </p:nvSpPr>
         <p:spPr>
           <a:xfrm>
-            <a:off x="1633538" y="4838700"/>
-            <a:ext cx="6634162" cy="453390"/>
-          </a:xfrm>
-          <a:prstGeom prst="rect">
-            <a:avLst/>
-          </a:prstGeom>
-          <a:noFill/>
-        </p:spPr>
-        <p:txBody>
-          <a:bodyPr wrap="square" lIns="0" rIns="0" tIns="0" bIns="0" anchor="ctr">
-            <a:spAutoFit/>
-          </a:bodyPr>
-          <a:lstStyle/>
-          <a:p>
-            <a:pPr algn="l">
-              <a:lnSpc>
-                <a:spcPct val="120000"/>
-              </a:lnSpc>
-            </a:pPr>
-            <a:r>
-              <a:rPr sz="1575" b="0">
+            <a:off x="1352550" y="5143500"/>
+            <a:ext cx="2476500" cy="1524000"/>
+          </a:xfrm>
+          <a:prstGeom prst="rect">
+            <a:avLst/>
+          </a:prstGeom>
+          <a:noFill/>
+        </p:spPr>
+        <p:txBody>
+          <a:bodyPr wrap="square" lIns="0" rIns="0" tIns="0" bIns="0" anchor="t">
+            <a:spAutoFit/>
+          </a:bodyPr>
+          <a:lstStyle/>
+          <a:p>
+            <a:pPr algn="ctr">
+              <a:lnSpc>
+                <a:spcPct val="146000"/>
+              </a:lnSpc>
+            </a:pPr>
+            <a:r>
+              <a:rPr sz="2100" b="0">
                 <a:solidFill>
                   <a:srgbClr val="3D3D3D"/>
                 </a:solidFill>
@@ -11998,70 +14045,17 @@
                 <a:ea typeface="Pretendard"/>
                 <a:cs typeface="Pretendard"/>
               </a:rPr>
-              <a:t>보냈다고 생각한 건수: 1000</a:t>
-            </a:r>
-          </a:p>
-        </p:txBody>
-      </p:sp>
-      <p:sp>
-        <p:nvSpPr>
-          <p:cNvPr id="13" name="Oval 12"/>
-          <p:cNvSpPr/>
-          <p:nvPr/>
-        </p:nvSpPr>
-        <p:spPr>
-          <a:xfrm>
-            <a:off x="1447800" y="5527358"/>
-            <a:ext cx="97155" cy="97155"/>
-          </a:xfrm>
-          <a:prstGeom prst="ellipse">
-            <a:avLst/>
-          </a:prstGeom>
-          <a:solidFill>
-            <a:srgbClr val="1E5BC6"/>
-          </a:solidFill>
-          <a:ln>
-            <a:noFill/>
-          </a:ln>
-          <a:effectLst/>
-        </p:spPr>
-        <p:txBody>
-          <a:bodyPr rtlCol="0" anchor="ctr" wrap="square"/>
-          <a:lstStyle/>
-          <a:p>
-            <a:pPr algn="ctr"/>
-          </a:p>
-        </p:txBody>
-      </p:sp>
-      <p:sp>
-        <p:nvSpPr>
-          <p:cNvPr id="14" name="TextBox 13"/>
-          <p:cNvSpPr txBox="1"/>
-          <p:nvPr/>
-        </p:nvSpPr>
-        <p:spPr>
-          <a:xfrm>
-            <a:off x="1633538" y="5349240"/>
-            <a:ext cx="6634162" cy="453390"/>
-          </a:xfrm>
-          <a:prstGeom prst="rect">
-            <a:avLst/>
-          </a:prstGeom>
-          <a:noFill/>
-        </p:spPr>
-        <p:txBody>
-          <a:bodyPr wrap="square" lIns="0" rIns="0" tIns="0" bIns="0" anchor="ctr">
-            <a:spAutoFit/>
-          </a:bodyPr>
-          <a:lstStyle/>
-          <a:p>
-            <a:pPr algn="l">
-              <a:lnSpc>
-                <a:spcPct val="120000"/>
-              </a:lnSpc>
-            </a:pPr>
-            <a:r>
-              <a:rPr sz="1575" b="0">
+              <a:t>orders-test</a:t>
+            </a:r>
+          </a:p>
+          <a:p>
+            <a:pPr algn="ctr">
+              <a:lnSpc>
+                <a:spcPct val="146000"/>
+              </a:lnSpc>
+            </a:pPr>
+            <a:r>
+              <a:rPr sz="2100" b="0">
                 <a:solidFill>
                   <a:srgbClr val="3D3D3D"/>
                 </a:solidFill>
@@ -12069,178 +14063,25 @@
                 <a:ea typeface="Pretendard"/>
                 <a:cs typeface="Pretendard"/>
               </a:rPr>
-              <a:t>kafka-get-offsets.sh 가 준 수가 더 적으면 유실 재현</a:t>
-            </a:r>
-          </a:p>
-        </p:txBody>
-      </p:sp>
-      <p:sp>
-        <p:nvSpPr>
-          <p:cNvPr id="15" name="Oval 14"/>
-          <p:cNvSpPr/>
-          <p:nvPr/>
-        </p:nvSpPr>
-        <p:spPr>
-          <a:xfrm>
-            <a:off x="1447800" y="6037898"/>
-            <a:ext cx="97155" cy="97155"/>
-          </a:xfrm>
-          <a:prstGeom prst="ellipse">
-            <a:avLst/>
-          </a:prstGeom>
-          <a:solidFill>
-            <a:srgbClr val="1E5BC6"/>
-          </a:solidFill>
-          <a:ln>
-            <a:noFill/>
-          </a:ln>
-          <a:effectLst/>
-        </p:spPr>
-        <p:txBody>
-          <a:bodyPr rtlCol="0" anchor="ctr" wrap="square"/>
-          <a:lstStyle/>
-          <a:p>
-            <a:pPr algn="ctr"/>
-          </a:p>
-        </p:txBody>
-      </p:sp>
-      <p:sp>
-        <p:nvSpPr>
-          <p:cNvPr id="16" name="TextBox 15"/>
-          <p:cNvSpPr txBox="1"/>
-          <p:nvPr/>
-        </p:nvSpPr>
-        <p:spPr>
-          <a:xfrm>
-            <a:off x="1633538" y="5859780"/>
-            <a:ext cx="6634162" cy="453390"/>
-          </a:xfrm>
-          <a:prstGeom prst="rect">
-            <a:avLst/>
-          </a:prstGeom>
-          <a:noFill/>
-        </p:spPr>
-        <p:txBody>
-          <a:bodyPr wrap="square" lIns="0" rIns="0" tIns="0" bIns="0" anchor="ctr">
-            <a:spAutoFit/>
-          </a:bodyPr>
-          <a:lstStyle/>
-          <a:p>
-            <a:pPr algn="l">
-              <a:lnSpc>
-                <a:spcPct val="120000"/>
-              </a:lnSpc>
-            </a:pPr>
-            <a:r>
-              <a:rPr sz="1575" b="0">
-                <a:solidFill>
-                  <a:srgbClr val="3D3D3D"/>
-                </a:solidFill>
-                <a:latin typeface="Pretendard"/>
-                <a:ea typeface="Pretendard"/>
-                <a:cs typeface="Pretendard"/>
-              </a:rPr>
-              <a:t>환경에 따라 다 들어갈 수도 있다</a:t>
-            </a:r>
-          </a:p>
-        </p:txBody>
-      </p:sp>
-      <p:sp>
-        <p:nvSpPr>
-          <p:cNvPr id="17" name="TextBox 16"/>
-          <p:cNvSpPr txBox="1"/>
-          <p:nvPr/>
-        </p:nvSpPr>
-        <p:spPr>
-          <a:xfrm>
-            <a:off x="9772650" y="2857500"/>
-            <a:ext cx="7372350" cy="533400"/>
-          </a:xfrm>
-          <a:prstGeom prst="rect">
-            <a:avLst/>
-          </a:prstGeom>
-          <a:noFill/>
-        </p:spPr>
-        <p:txBody>
-          <a:bodyPr wrap="square" lIns="0" rIns="0" tIns="0" bIns="0" anchor="t">
-            <a:spAutoFit/>
-          </a:bodyPr>
-          <a:lstStyle/>
-          <a:p>
-            <a:pPr algn="l">
-              <a:lnSpc>
-                <a:spcPct val="110000"/>
-              </a:lnSpc>
-            </a:pPr>
-            <a:r>
-              <a:rPr sz="3150" b="1">
-                <a:solidFill>
-                  <a:srgbClr val="0D2B5E"/>
-                </a:solidFill>
-                <a:latin typeface="Pretendard"/>
-                <a:ea typeface="Pretendard"/>
-                <a:cs typeface="Pretendard"/>
-              </a:rPr>
-              <a:t>flush() 있음</a:t>
-            </a:r>
-          </a:p>
-        </p:txBody>
-      </p:sp>
-      <p:sp>
-        <p:nvSpPr>
-          <p:cNvPr id="18" name="TextBox 17"/>
-          <p:cNvSpPr txBox="1"/>
-          <p:nvPr/>
-        </p:nvSpPr>
-        <p:spPr>
-          <a:xfrm>
-            <a:off x="9772650" y="3467100"/>
-            <a:ext cx="7372350" cy="876300"/>
-          </a:xfrm>
-          <a:prstGeom prst="rect">
-            <a:avLst/>
-          </a:prstGeom>
-          <a:noFill/>
-        </p:spPr>
-        <p:txBody>
-          <a:bodyPr wrap="square" lIns="0" rIns="0" tIns="0" bIns="0" anchor="t">
-            <a:spAutoFit/>
-          </a:bodyPr>
-          <a:lstStyle/>
-          <a:p>
-            <a:pPr algn="l">
-              <a:lnSpc>
-                <a:spcPct val="146000"/>
-              </a:lnSpc>
-            </a:pPr>
-            <a:r>
-              <a:rPr sz="2250" b="0">
-                <a:solidFill>
-                  <a:srgbClr val="3D3D3D"/>
-                </a:solidFill>
-                <a:latin typeface="Pretendard"/>
-                <a:ea typeface="Pretendard"/>
-                <a:cs typeface="Pretendard"/>
-              </a:rPr>
-              <a:t>버퍼를 다 보낼 때까지 기다린 뒤 끝난다</a:t>
-            </a:r>
-          </a:p>
-        </p:txBody>
-      </p:sp>
-      <p:sp>
-        <p:nvSpPr>
-          <p:cNvPr id="19" name="Rounded Rectangle 18"/>
-          <p:cNvSpPr/>
-          <p:nvPr/>
-        </p:nvSpPr>
-        <p:spPr>
-          <a:xfrm>
-            <a:off x="9772650" y="4610100"/>
-            <a:ext cx="7372350" cy="2857500"/>
+              <a:t>파티션 1</a:t>
+            </a:r>
+          </a:p>
+        </p:txBody>
+      </p:sp>
+      <p:sp>
+        <p:nvSpPr>
+          <p:cNvPr id="13" name="Rounded Rectangle 12"/>
+          <p:cNvSpPr/>
+          <p:nvPr/>
+        </p:nvSpPr>
+        <p:spPr>
+          <a:xfrm>
+            <a:off x="4419600" y="3924300"/>
+            <a:ext cx="2895600" cy="3143250"/>
           </a:xfrm>
           <a:prstGeom prst="roundRect">
             <a:avLst>
-              <a:gd name="adj" fmla="val 1666"/>
+              <a:gd name="adj" fmla="val 1644"/>
             </a:avLst>
           </a:prstGeom>
           <a:solidFill>
@@ -12263,16 +14104,16 @@
       </p:sp>
       <p:sp>
         <p:nvSpPr>
-          <p:cNvPr id="20" name="Oval 19"/>
-          <p:cNvSpPr/>
-          <p:nvPr/>
-        </p:nvSpPr>
-        <p:spPr>
-          <a:xfrm>
-            <a:off x="10077450" y="5016817"/>
-            <a:ext cx="97155" cy="97155"/>
-          </a:xfrm>
-          <a:prstGeom prst="ellipse">
+          <p:cNvPr id="14" name="Rectangle 13"/>
+          <p:cNvSpPr/>
+          <p:nvPr/>
+        </p:nvSpPr>
+        <p:spPr>
+          <a:xfrm>
+            <a:off x="4419600" y="3924300"/>
+            <a:ext cx="2895600" cy="914400"/>
+          </a:xfrm>
+          <a:prstGeom prst="rect">
             <a:avLst/>
           </a:prstGeom>
           <a:solidFill>
@@ -12293,33 +14134,74 @@
       </p:sp>
       <p:sp>
         <p:nvSpPr>
-          <p:cNvPr id="21" name="TextBox 20"/>
-          <p:cNvSpPr txBox="1"/>
-          <p:nvPr/>
-        </p:nvSpPr>
-        <p:spPr>
-          <a:xfrm>
-            <a:off x="10263188" y="4838700"/>
-            <a:ext cx="6634162" cy="453390"/>
-          </a:xfrm>
-          <a:prstGeom prst="rect">
-            <a:avLst/>
-          </a:prstGeom>
-          <a:noFill/>
-        </p:spPr>
-        <p:txBody>
-          <a:bodyPr wrap="square" lIns="0" rIns="0" tIns="0" bIns="0" anchor="ctr">
-            <a:spAutoFit/>
-          </a:bodyPr>
-          <a:lstStyle/>
-          <a:p>
-            <a:pPr algn="l">
-              <a:lnSpc>
-                <a:spcPct val="120000"/>
-              </a:lnSpc>
-            </a:pPr>
-            <a:r>
-              <a:rPr sz="1575" b="0">
+          <p:cNvPr id="15" name="TextBox 14"/>
+          <p:cNvSpPr txBox="1"/>
+          <p:nvPr/>
+        </p:nvSpPr>
+        <p:spPr>
+          <a:xfrm>
+            <a:off x="4419600" y="4171950"/>
+            <a:ext cx="2895600" cy="419100"/>
+          </a:xfrm>
+          <a:prstGeom prst="rect">
+            <a:avLst/>
+          </a:prstGeom>
+          <a:noFill/>
+        </p:spPr>
+        <p:txBody>
+          <a:bodyPr wrap="square" lIns="0" rIns="0" tIns="0" bIns="0" anchor="t">
+            <a:spAutoFit/>
+          </a:bodyPr>
+          <a:lstStyle/>
+          <a:p>
+            <a:pPr algn="ctr">
+              <a:lnSpc>
+                <a:spcPct val="100000"/>
+              </a:lnSpc>
+            </a:pPr>
+            <a:r>
+              <a:rPr sz="2475" b="1">
+                <a:solidFill>
+                  <a:srgbClr val="FFFFFF"/>
+                </a:solidFill>
+                <a:latin typeface="Pretendard"/>
+                <a:ea typeface="Pretendard"/>
+                <a:cs typeface="Pretendard"/>
+              </a:rPr>
+              <a:t>producer_noflush</a:t>
+            </a:r>
+          </a:p>
+        </p:txBody>
+      </p:sp>
+      <p:sp>
+        <p:nvSpPr>
+          <p:cNvPr id="16" name="TextBox 15"/>
+          <p:cNvSpPr txBox="1"/>
+          <p:nvPr/>
+        </p:nvSpPr>
+        <p:spPr>
+          <a:xfrm>
+            <a:off x="4629150" y="5143500"/>
+            <a:ext cx="2476500" cy="1524000"/>
+          </a:xfrm>
+          <a:prstGeom prst="rect">
+            <a:avLst/>
+          </a:prstGeom>
+          <a:noFill/>
+        </p:spPr>
+        <p:txBody>
+          <a:bodyPr wrap="square" lIns="0" rIns="0" tIns="0" bIns="0" anchor="t">
+            <a:spAutoFit/>
+          </a:bodyPr>
+          <a:lstStyle/>
+          <a:p>
+            <a:pPr algn="ctr">
+              <a:lnSpc>
+                <a:spcPct val="146000"/>
+              </a:lnSpc>
+            </a:pPr>
+            <a:r>
+              <a:rPr sz="2100" b="0">
                 <a:solidFill>
                   <a:srgbClr val="3D3D3D"/>
                 </a:solidFill>
@@ -12327,27 +14209,79 @@
                 <a:ea typeface="Pretendard"/>
                 <a:cs typeface="Pretendard"/>
               </a:rPr>
-              <a:t>정확히 1000</a:t>
-            </a:r>
-          </a:p>
-        </p:txBody>
-      </p:sp>
-      <p:sp>
-        <p:nvSpPr>
-          <p:cNvPr id="22" name="Oval 21"/>
-          <p:cNvSpPr/>
-          <p:nvPr/>
-        </p:nvSpPr>
-        <p:spPr>
-          <a:xfrm>
-            <a:off x="10077450" y="5527358"/>
-            <a:ext cx="97155" cy="97155"/>
-          </a:xfrm>
-          <a:prstGeom prst="ellipse">
-            <a:avLst/>
-          </a:prstGeom>
-          <a:solidFill>
-            <a:srgbClr val="1E5BC6"/>
+              <a:t>1000건 produce</a:t>
+            </a:r>
+          </a:p>
+          <a:p>
+            <a:pPr algn="ctr">
+              <a:lnSpc>
+                <a:spcPct val="146000"/>
+              </a:lnSpc>
+            </a:pPr>
+            <a:r>
+              <a:rPr sz="2100" b="0">
+                <a:solidFill>
+                  <a:srgbClr val="3D3D3D"/>
+                </a:solidFill>
+                <a:latin typeface="Pretendard"/>
+                <a:ea typeface="Pretendard"/>
+                <a:cs typeface="Pretendard"/>
+              </a:rPr>
+              <a:t>flush 없음</a:t>
+            </a:r>
+          </a:p>
+        </p:txBody>
+      </p:sp>
+      <p:sp>
+        <p:nvSpPr>
+          <p:cNvPr id="17" name="Rounded Rectangle 16"/>
+          <p:cNvSpPr/>
+          <p:nvPr/>
+        </p:nvSpPr>
+        <p:spPr>
+          <a:xfrm>
+            <a:off x="7696200" y="3924300"/>
+            <a:ext cx="2895600" cy="3143250"/>
+          </a:xfrm>
+          <a:prstGeom prst="roundRect">
+            <a:avLst>
+              <a:gd name="adj" fmla="val 1644"/>
+            </a:avLst>
+          </a:prstGeom>
+          <a:solidFill>
+            <a:srgbClr val="FAFBFD"/>
+          </a:solidFill>
+          <a:ln w="9525">
+            <a:solidFill>
+              <a:srgbClr val="DCE1E8"/>
+            </a:solidFill>
+          </a:ln>
+          <a:effectLst/>
+        </p:spPr>
+        <p:txBody>
+          <a:bodyPr rtlCol="0" anchor="ctr" wrap="square"/>
+          <a:lstStyle/>
+          <a:p>
+            <a:pPr algn="ctr"/>
+          </a:p>
+        </p:txBody>
+      </p:sp>
+      <p:sp>
+        <p:nvSpPr>
+          <p:cNvPr id="18" name="Rectangle 17"/>
+          <p:cNvSpPr/>
+          <p:nvPr/>
+        </p:nvSpPr>
+        <p:spPr>
+          <a:xfrm>
+            <a:off x="7696200" y="3924300"/>
+            <a:ext cx="2895600" cy="914400"/>
+          </a:xfrm>
+          <a:prstGeom prst="rect">
+            <a:avLst/>
+          </a:prstGeom>
+          <a:solidFill>
+            <a:srgbClr val="0D2B5E"/>
           </a:solidFill>
           <a:ln>
             <a:noFill/>
@@ -12364,33 +14298,74 @@
       </p:sp>
       <p:sp>
         <p:nvSpPr>
-          <p:cNvPr id="23" name="TextBox 22"/>
-          <p:cNvSpPr txBox="1"/>
-          <p:nvPr/>
-        </p:nvSpPr>
-        <p:spPr>
-          <a:xfrm>
-            <a:off x="10263188" y="5349240"/>
-            <a:ext cx="6634162" cy="453390"/>
-          </a:xfrm>
-          <a:prstGeom prst="rect">
-            <a:avLst/>
-          </a:prstGeom>
-          <a:noFill/>
-        </p:spPr>
-        <p:txBody>
-          <a:bodyPr wrap="square" lIns="0" rIns="0" tIns="0" bIns="0" anchor="ctr">
-            <a:spAutoFit/>
-          </a:bodyPr>
-          <a:lstStyle/>
-          <a:p>
-            <a:pPr algn="l">
-              <a:lnSpc>
-                <a:spcPct val="120000"/>
-              </a:lnSpc>
-            </a:pPr>
-            <a:r>
-              <a:rPr sz="1575" b="0">
+          <p:cNvPr id="19" name="TextBox 18"/>
+          <p:cNvSpPr txBox="1"/>
+          <p:nvPr/>
+        </p:nvSpPr>
+        <p:spPr>
+          <a:xfrm>
+            <a:off x="7696200" y="4171950"/>
+            <a:ext cx="2895600" cy="419100"/>
+          </a:xfrm>
+          <a:prstGeom prst="rect">
+            <a:avLst/>
+          </a:prstGeom>
+          <a:noFill/>
+        </p:spPr>
+        <p:txBody>
+          <a:bodyPr wrap="square" lIns="0" rIns="0" tIns="0" bIns="0" anchor="t">
+            <a:spAutoFit/>
+          </a:bodyPr>
+          <a:lstStyle/>
+          <a:p>
+            <a:pPr algn="ctr">
+              <a:lnSpc>
+                <a:spcPct val="100000"/>
+              </a:lnSpc>
+            </a:pPr>
+            <a:r>
+              <a:rPr sz="2475" b="1">
+                <a:solidFill>
+                  <a:srgbClr val="FFFFFF"/>
+                </a:solidFill>
+                <a:latin typeface="Pretendard"/>
+                <a:ea typeface="Pretendard"/>
+                <a:cs typeface="Pretendard"/>
+              </a:rPr>
+              <a:t>sleep 3</a:t>
+            </a:r>
+          </a:p>
+        </p:txBody>
+      </p:sp>
+      <p:sp>
+        <p:nvSpPr>
+          <p:cNvPr id="20" name="TextBox 19"/>
+          <p:cNvSpPr txBox="1"/>
+          <p:nvPr/>
+        </p:nvSpPr>
+        <p:spPr>
+          <a:xfrm>
+            <a:off x="7905750" y="5143500"/>
+            <a:ext cx="2476500" cy="1524000"/>
+          </a:xfrm>
+          <a:prstGeom prst="rect">
+            <a:avLst/>
+          </a:prstGeom>
+          <a:noFill/>
+        </p:spPr>
+        <p:txBody>
+          <a:bodyPr wrap="square" lIns="0" rIns="0" tIns="0" bIns="0" anchor="t">
+            <a:spAutoFit/>
+          </a:bodyPr>
+          <a:lstStyle/>
+          <a:p>
+            <a:pPr algn="ctr">
+              <a:lnSpc>
+                <a:spcPct val="146000"/>
+              </a:lnSpc>
+            </a:pPr>
+            <a:r>
+              <a:rPr sz="2100" b="0">
                 <a:solidFill>
                   <a:srgbClr val="3D3D3D"/>
                 </a:solidFill>
@@ -12398,23 +14373,57 @@
                 <a:ea typeface="Pretendard"/>
                 <a:cs typeface="Pretendard"/>
               </a:rPr>
-              <a:t>1000 이 나와도 「안전하다」는 뜻은 아니다</a:t>
-            </a:r>
-          </a:p>
-        </p:txBody>
-      </p:sp>
-      <p:sp>
-        <p:nvSpPr>
-          <p:cNvPr id="24" name="Oval 23"/>
-          <p:cNvSpPr/>
-          <p:nvPr/>
-        </p:nvSpPr>
-        <p:spPr>
-          <a:xfrm>
-            <a:off x="10077450" y="6037898"/>
-            <a:ext cx="97155" cy="97155"/>
-          </a:xfrm>
-          <a:prstGeom prst="ellipse">
+              <a:t>잠시 기다린 뒤</a:t>
+            </a:r>
+          </a:p>
+        </p:txBody>
+      </p:sp>
+      <p:sp>
+        <p:nvSpPr>
+          <p:cNvPr id="21" name="Rounded Rectangle 20"/>
+          <p:cNvSpPr/>
+          <p:nvPr/>
+        </p:nvSpPr>
+        <p:spPr>
+          <a:xfrm>
+            <a:off x="10972800" y="3924300"/>
+            <a:ext cx="2895600" cy="3143250"/>
+          </a:xfrm>
+          <a:prstGeom prst="roundRect">
+            <a:avLst>
+              <a:gd name="adj" fmla="val 1644"/>
+            </a:avLst>
+          </a:prstGeom>
+          <a:solidFill>
+            <a:srgbClr val="FAFBFD"/>
+          </a:solidFill>
+          <a:ln w="9525">
+            <a:solidFill>
+              <a:srgbClr val="DCE1E8"/>
+            </a:solidFill>
+          </a:ln>
+          <a:effectLst/>
+        </p:spPr>
+        <p:txBody>
+          <a:bodyPr rtlCol="0" anchor="ctr" wrap="square"/>
+          <a:lstStyle/>
+          <a:p>
+            <a:pPr algn="ctr"/>
+          </a:p>
+        </p:txBody>
+      </p:sp>
+      <p:sp>
+        <p:nvSpPr>
+          <p:cNvPr id="22" name="Rectangle 21"/>
+          <p:cNvSpPr/>
+          <p:nvPr/>
+        </p:nvSpPr>
+        <p:spPr>
+          <a:xfrm>
+            <a:off x="10972800" y="3924300"/>
+            <a:ext cx="2895600" cy="914400"/>
+          </a:xfrm>
+          <a:prstGeom prst="rect">
             <a:avLst/>
           </a:prstGeom>
           <a:solidFill>
@@ -12435,33 +14444,74 @@
       </p:sp>
       <p:sp>
         <p:nvSpPr>
-          <p:cNvPr id="25" name="TextBox 24"/>
-          <p:cNvSpPr txBox="1"/>
-          <p:nvPr/>
-        </p:nvSpPr>
-        <p:spPr>
-          <a:xfrm>
-            <a:off x="10263188" y="5859780"/>
-            <a:ext cx="6634162" cy="453390"/>
-          </a:xfrm>
-          <a:prstGeom prst="rect">
-            <a:avLst/>
-          </a:prstGeom>
-          <a:noFill/>
-        </p:spPr>
-        <p:txBody>
-          <a:bodyPr wrap="square" lIns="0" rIns="0" tIns="0" bIns="0" anchor="ctr">
-            <a:spAutoFit/>
-          </a:bodyPr>
-          <a:lstStyle/>
-          <a:p>
-            <a:pPr algn="l">
-              <a:lnSpc>
-                <a:spcPct val="120000"/>
-              </a:lnSpc>
-            </a:pPr>
-            <a:r>
-              <a:rPr sz="1575" b="0">
+          <p:cNvPr id="23" name="TextBox 22"/>
+          <p:cNvSpPr txBox="1"/>
+          <p:nvPr/>
+        </p:nvSpPr>
+        <p:spPr>
+          <a:xfrm>
+            <a:off x="10972800" y="4171950"/>
+            <a:ext cx="2895600" cy="419100"/>
+          </a:xfrm>
+          <a:prstGeom prst="rect">
+            <a:avLst/>
+          </a:prstGeom>
+          <a:noFill/>
+        </p:spPr>
+        <p:txBody>
+          <a:bodyPr wrap="square" lIns="0" rIns="0" tIns="0" bIns="0" anchor="t">
+            <a:spAutoFit/>
+          </a:bodyPr>
+          <a:lstStyle/>
+          <a:p>
+            <a:pPr algn="ctr">
+              <a:lnSpc>
+                <a:spcPct val="100000"/>
+              </a:lnSpc>
+            </a:pPr>
+            <a:r>
+              <a:rPr sz="2475" b="1">
+                <a:solidFill>
+                  <a:srgbClr val="FFFFFF"/>
+                </a:solidFill>
+                <a:latin typeface="Pretendard"/>
+                <a:ea typeface="Pretendard"/>
+                <a:cs typeface="Pretendard"/>
+              </a:rPr>
+              <a:t>오프셋 조회</a:t>
+            </a:r>
+          </a:p>
+        </p:txBody>
+      </p:sp>
+      <p:sp>
+        <p:nvSpPr>
+          <p:cNvPr id="24" name="TextBox 23"/>
+          <p:cNvSpPr txBox="1"/>
+          <p:nvPr/>
+        </p:nvSpPr>
+        <p:spPr>
+          <a:xfrm>
+            <a:off x="11182350" y="5143500"/>
+            <a:ext cx="2476500" cy="1524000"/>
+          </a:xfrm>
+          <a:prstGeom prst="rect">
+            <a:avLst/>
+          </a:prstGeom>
+          <a:noFill/>
+        </p:spPr>
+        <p:txBody>
+          <a:bodyPr wrap="square" lIns="0" rIns="0" tIns="0" bIns="0" anchor="t">
+            <a:spAutoFit/>
+          </a:bodyPr>
+          <a:lstStyle/>
+          <a:p>
+            <a:pPr algn="ctr">
+              <a:lnSpc>
+                <a:spcPct val="146000"/>
+              </a:lnSpc>
+            </a:pPr>
+            <a:r>
+              <a:rPr sz="2100" b="0">
                 <a:solidFill>
                   <a:srgbClr val="3D3D3D"/>
                 </a:solidFill>
@@ -12469,23 +14519,75 @@
                 <a:ea typeface="Pretendard"/>
                 <a:cs typeface="Pretendard"/>
               </a:rPr>
-              <a:t>메시지가 크거나 네트워크가 느리면 쉽게 유실</a:t>
-            </a:r>
-          </a:p>
-        </p:txBody>
-      </p:sp>
-      <p:sp>
-        <p:nvSpPr>
-          <p:cNvPr id="26" name="Oval 25"/>
-          <p:cNvSpPr/>
-          <p:nvPr/>
-        </p:nvSpPr>
-        <p:spPr>
-          <a:xfrm>
-            <a:off x="8686800" y="3771900"/>
-            <a:ext cx="914400" cy="914400"/>
-          </a:xfrm>
-          <a:prstGeom prst="ellipse">
+              <a:t>get-offsets 로</a:t>
+            </a:r>
+          </a:p>
+          <a:p>
+            <a:pPr algn="ctr">
+              <a:lnSpc>
+                <a:spcPct val="146000"/>
+              </a:lnSpc>
+            </a:pPr>
+            <a:r>
+              <a:rPr sz="2100" b="0">
+                <a:solidFill>
+                  <a:srgbClr val="3D3D3D"/>
+                </a:solidFill>
+                <a:latin typeface="Pretendard"/>
+                <a:ea typeface="Pretendard"/>
+                <a:cs typeface="Pretendard"/>
+              </a:rPr>
+              <a:t>쌓인 개수 확인</a:t>
+            </a:r>
+          </a:p>
+        </p:txBody>
+      </p:sp>
+      <p:sp>
+        <p:nvSpPr>
+          <p:cNvPr id="25" name="Rounded Rectangle 24"/>
+          <p:cNvSpPr/>
+          <p:nvPr/>
+        </p:nvSpPr>
+        <p:spPr>
+          <a:xfrm>
+            <a:off x="14249400" y="3924300"/>
+            <a:ext cx="2895600" cy="3143250"/>
+          </a:xfrm>
+          <a:prstGeom prst="roundRect">
+            <a:avLst>
+              <a:gd name="adj" fmla="val 1644"/>
+            </a:avLst>
+          </a:prstGeom>
+          <a:solidFill>
+            <a:srgbClr val="FAFBFD"/>
+          </a:solidFill>
+          <a:ln w="9525">
+            <a:solidFill>
+              <a:srgbClr val="DCE1E8"/>
+            </a:solidFill>
+          </a:ln>
+          <a:effectLst/>
+        </p:spPr>
+        <p:txBody>
+          <a:bodyPr rtlCol="0" anchor="ctr" wrap="square"/>
+          <a:lstStyle/>
+          <a:p>
+            <a:pPr algn="ctr"/>
+          </a:p>
+        </p:txBody>
+      </p:sp>
+      <p:sp>
+        <p:nvSpPr>
+          <p:cNvPr id="26" name="Rectangle 25"/>
+          <p:cNvSpPr/>
+          <p:nvPr/>
+        </p:nvSpPr>
+        <p:spPr>
+          <a:xfrm>
+            <a:off x="14249400" y="3924300"/>
+            <a:ext cx="2895600" cy="914400"/>
+          </a:xfrm>
+          <a:prstGeom prst="rect">
             <a:avLst/>
           </a:prstGeom>
           <a:solidFill>
@@ -12512,8 +14614,8 @@
         </p:nvSpPr>
         <p:spPr>
           <a:xfrm>
-            <a:off x="8686800" y="4057650"/>
-            <a:ext cx="914400" cy="381000"/>
+            <a:off x="14249400" y="4171950"/>
+            <a:ext cx="2895600" cy="419100"/>
           </a:xfrm>
           <a:prstGeom prst="rect">
             <a:avLst/>
@@ -12532,7 +14634,7 @@
               </a:lnSpc>
             </a:pPr>
             <a:r>
-              <a:rPr sz="2250" b="1">
+              <a:rPr sz="2475" b="1">
                 <a:solidFill>
                   <a:srgbClr val="FFFFFF"/>
                 </a:solidFill>
@@ -12540,14 +14642,73 @@
                 <a:ea typeface="Pretendard"/>
                 <a:cs typeface="Pretendard"/>
               </a:rPr>
-              <a:t>VS</a:t>
-            </a:r>
-          </a:p>
-        </p:txBody>
-      </p:sp>
-      <p:sp>
-        <p:nvSpPr>
-          <p:cNvPr id="28" name="Rectangle 27"/>
+              <a:t>flush 넣고 재실행</a:t>
+            </a:r>
+          </a:p>
+        </p:txBody>
+      </p:sp>
+      <p:sp>
+        <p:nvSpPr>
+          <p:cNvPr id="28" name="TextBox 27"/>
+          <p:cNvSpPr txBox="1"/>
+          <p:nvPr/>
+        </p:nvSpPr>
+        <p:spPr>
+          <a:xfrm>
+            <a:off x="14458950" y="5143500"/>
+            <a:ext cx="2476500" cy="1524000"/>
+          </a:xfrm>
+          <a:prstGeom prst="rect">
+            <a:avLst/>
+          </a:prstGeom>
+          <a:noFill/>
+        </p:spPr>
+        <p:txBody>
+          <a:bodyPr wrap="square" lIns="0" rIns="0" tIns="0" bIns="0" anchor="t">
+            <a:spAutoFit/>
+          </a:bodyPr>
+          <a:lstStyle/>
+          <a:p>
+            <a:pPr algn="ctr">
+              <a:lnSpc>
+                <a:spcPct val="146000"/>
+              </a:lnSpc>
+            </a:pPr>
+            <a:r>
+              <a:rPr sz="2100" b="0">
+                <a:solidFill>
+                  <a:srgbClr val="3D3D3D"/>
+                </a:solidFill>
+                <a:latin typeface="Pretendard"/>
+                <a:ea typeface="Pretendard"/>
+                <a:cs typeface="Pretendard"/>
+              </a:rPr>
+              <a:t>파일 끝에 p.flush()</a:t>
+            </a:r>
+          </a:p>
+          <a:p>
+            <a:pPr algn="ctr">
+              <a:lnSpc>
+                <a:spcPct val="146000"/>
+              </a:lnSpc>
+            </a:pPr>
+            <a:r>
+              <a:rPr sz="2100" b="0">
+                <a:solidFill>
+                  <a:srgbClr val="3D3D3D"/>
+                </a:solidFill>
+                <a:latin typeface="Pretendard"/>
+                <a:ea typeface="Pretendard"/>
+                <a:cs typeface="Pretendard"/>
+              </a:rPr>
+              <a:t>다시 조회</a:t>
+            </a:r>
+          </a:p>
+        </p:txBody>
+      </p:sp>
+      <p:sp>
+        <p:nvSpPr>
+          <p:cNvPr id="29" name="Rectangle 28"/>
           <p:cNvSpPr/>
           <p:nvPr/>
         </p:nvSpPr>
@@ -12577,7 +14738,7 @@
       </p:sp>
       <p:sp>
         <p:nvSpPr>
-          <p:cNvPr id="29" name="TextBox 28"/>
+          <p:cNvPr id="30" name="TextBox 29"/>
           <p:cNvSpPr txBox="1"/>
           <p:nvPr/>
         </p:nvSpPr>
@@ -12618,7 +14779,7 @@
       </p:sp>
       <p:sp>
         <p:nvSpPr>
-          <p:cNvPr id="30" name="TextBox 29"/>
+          <p:cNvPr id="31" name="TextBox 30"/>
           <p:cNvSpPr txBox="1"/>
           <p:nvPr/>
         </p:nvSpPr>
@@ -12801,7 +14962,7 @@
                 <a:ea typeface="Pretendard"/>
                 <a:cs typeface="Pretendard"/>
               </a:rPr>
-              <a:t>4단계</a:t>
+              <a:t>3단계 — 일부러 실패시키기</a:t>
             </a:r>
           </a:p>
         </p:txBody>
@@ -12842,7 +15003,7 @@
                 <a:ea typeface="Pretendard"/>
                 <a:cs typeface="Pretendard"/>
               </a:rPr>
-              <a:t>consumer.py 핵심 줄 — poll 루프와 고객별 누적</a:t>
+              <a:t>1000 건 보냈다고 찍었는데 — 실제로 쌓인 것은</a:t>
             </a:r>
           </a:p>
         </p:txBody>
@@ -12879,31 +15040,42 @@
       </p:sp>
       <p:sp>
         <p:nvSpPr>
-          <p:cNvPr id="8" name="Rectangle 7"/>
-          <p:cNvSpPr/>
-          <p:nvPr/>
-        </p:nvSpPr>
-        <p:spPr>
-          <a:xfrm>
-            <a:off x="1143000" y="2781300"/>
-            <a:ext cx="8282940" cy="590550"/>
-          </a:xfrm>
-          <a:prstGeom prst="rect">
-            <a:avLst/>
-          </a:prstGeom>
-          <a:solidFill>
-            <a:srgbClr val="0D2B5E"/>
-          </a:solidFill>
-          <a:ln>
-            <a:noFill/>
-          </a:ln>
-          <a:effectLst/>
-        </p:spPr>
-        <p:txBody>
-          <a:bodyPr rtlCol="0" anchor="ctr" wrap="square"/>
-          <a:lstStyle/>
-          <a:p>
-            <a:pPr algn="ctr"/>
+          <p:cNvPr id="8" name="TextBox 7"/>
+          <p:cNvSpPr txBox="1"/>
+          <p:nvPr/>
+        </p:nvSpPr>
+        <p:spPr>
+          <a:xfrm>
+            <a:off x="1143000" y="2857500"/>
+            <a:ext cx="7372350" cy="533400"/>
+          </a:xfrm>
+          <a:prstGeom prst="rect">
+            <a:avLst/>
+          </a:prstGeom>
+          <a:noFill/>
+        </p:spPr>
+        <p:txBody>
+          <a:bodyPr wrap="square" lIns="0" rIns="0" tIns="0" bIns="0" anchor="t">
+            <a:spAutoFit/>
+          </a:bodyPr>
+          <a:lstStyle/>
+          <a:p>
+            <a:pPr algn="l">
+              <a:lnSpc>
+                <a:spcPct val="110000"/>
+              </a:lnSpc>
+            </a:pPr>
+            <a:r>
+              <a:rPr sz="3150" b="1">
+                <a:solidFill>
+                  <a:srgbClr val="0D2B5E"/>
+                </a:solidFill>
+                <a:latin typeface="Pretendard"/>
+                <a:ea typeface="Pretendard"/>
+                <a:cs typeface="Pretendard"/>
+              </a:rPr>
+              <a:t>flush() 없음</a:t>
+            </a:r>
           </a:p>
         </p:txBody>
       </p:sp>
@@ -12915,199 +15087,53 @@
         </p:nvSpPr>
         <p:spPr>
           <a:xfrm>
-            <a:off x="1143000" y="2781300"/>
-            <a:ext cx="8282940" cy="590550"/>
-          </a:xfrm>
-          <a:prstGeom prst="rect">
-            <a:avLst/>
-          </a:prstGeom>
-          <a:noFill/>
-        </p:spPr>
-        <p:txBody>
-          <a:bodyPr wrap="square" lIns="0" rIns="0" tIns="0" bIns="0" anchor="ctr">
-            <a:spAutoFit/>
-          </a:bodyPr>
-          <a:lstStyle/>
-          <a:p>
-            <a:pPr algn="ctr">
-              <a:lnSpc>
-                <a:spcPct val="100000"/>
-              </a:lnSpc>
-            </a:pPr>
-            <a:r>
-              <a:rPr sz="2025" b="1">
-                <a:solidFill>
-                  <a:srgbClr val="FFFFFF"/>
-                </a:solidFill>
-                <a:latin typeface="Pretendard"/>
-                <a:ea typeface="Pretendard"/>
-                <a:cs typeface="Pretendard"/>
-              </a:rPr>
-              <a:t>줄</a:t>
-            </a:r>
-          </a:p>
-        </p:txBody>
-      </p:sp>
-      <p:sp>
-        <p:nvSpPr>
-          <p:cNvPr id="10" name="Rectangle 9"/>
-          <p:cNvSpPr/>
-          <p:nvPr/>
-        </p:nvSpPr>
-        <p:spPr>
-          <a:xfrm>
-            <a:off x="9464040" y="2781300"/>
-            <a:ext cx="7680960" cy="590550"/>
-          </a:xfrm>
-          <a:prstGeom prst="rect">
-            <a:avLst/>
-          </a:prstGeom>
-          <a:solidFill>
-            <a:srgbClr val="1E5BC6"/>
-          </a:solidFill>
-          <a:ln>
-            <a:noFill/>
-          </a:ln>
-          <a:effectLst/>
-        </p:spPr>
-        <p:txBody>
-          <a:bodyPr rtlCol="0" anchor="ctr" wrap="square"/>
-          <a:lstStyle/>
-          <a:p>
-            <a:pPr algn="ctr"/>
-          </a:p>
-        </p:txBody>
-      </p:sp>
-      <p:sp>
-        <p:nvSpPr>
-          <p:cNvPr id="11" name="TextBox 10"/>
-          <p:cNvSpPr txBox="1"/>
-          <p:nvPr/>
-        </p:nvSpPr>
-        <p:spPr>
-          <a:xfrm>
-            <a:off x="9464040" y="2781300"/>
-            <a:ext cx="7680960" cy="590550"/>
-          </a:xfrm>
-          <a:prstGeom prst="rect">
-            <a:avLst/>
-          </a:prstGeom>
-          <a:noFill/>
-        </p:spPr>
-        <p:txBody>
-          <a:bodyPr wrap="square" lIns="0" rIns="0" tIns="0" bIns="0" anchor="ctr">
-            <a:spAutoFit/>
-          </a:bodyPr>
-          <a:lstStyle/>
-          <a:p>
-            <a:pPr algn="ctr">
-              <a:lnSpc>
-                <a:spcPct val="100000"/>
-              </a:lnSpc>
-            </a:pPr>
-            <a:r>
-              <a:rPr sz="2025" b="1">
-                <a:solidFill>
-                  <a:srgbClr val="FFFFFF"/>
-                </a:solidFill>
-                <a:latin typeface="Pretendard"/>
-                <a:ea typeface="Pretendard"/>
-                <a:cs typeface="Pretendard"/>
-              </a:rPr>
-              <a:t>뜻</a:t>
-            </a:r>
-          </a:p>
-        </p:txBody>
-      </p:sp>
-      <p:sp>
-        <p:nvSpPr>
-          <p:cNvPr id="12" name="Rounded Rectangle 11"/>
-          <p:cNvSpPr/>
-          <p:nvPr/>
-        </p:nvSpPr>
-        <p:spPr>
-          <a:xfrm>
-            <a:off x="1143000" y="3448050"/>
-            <a:ext cx="8282940" cy="519793"/>
+            <a:off x="1143000" y="3467100"/>
+            <a:ext cx="7372350" cy="876300"/>
+          </a:xfrm>
+          <a:prstGeom prst="rect">
+            <a:avLst/>
+          </a:prstGeom>
+          <a:noFill/>
+        </p:spPr>
+        <p:txBody>
+          <a:bodyPr wrap="square" lIns="0" rIns="0" tIns="0" bIns="0" anchor="t">
+            <a:spAutoFit/>
+          </a:bodyPr>
+          <a:lstStyle/>
+          <a:p>
+            <a:pPr algn="l">
+              <a:lnSpc>
+                <a:spcPct val="146000"/>
+              </a:lnSpc>
+            </a:pPr>
+            <a:r>
+              <a:rPr sz="2250" b="0">
+                <a:solidFill>
+                  <a:srgbClr val="3D3D3D"/>
+                </a:solidFill>
+                <a:latin typeface="Pretendard"/>
+                <a:ea typeface="Pretendard"/>
+                <a:cs typeface="Pretendard"/>
+              </a:rPr>
+              <a:t>버퍼에 다 있다가 통째로 사라진다</a:t>
+            </a:r>
+          </a:p>
+        </p:txBody>
+      </p:sp>
+      <p:sp>
+        <p:nvSpPr>
+          <p:cNvPr id="10" name="Rounded Rectangle 9"/>
+          <p:cNvSpPr/>
+          <p:nvPr/>
+        </p:nvSpPr>
+        <p:spPr>
+          <a:xfrm>
+            <a:off x="1143000" y="4610100"/>
+            <a:ext cx="7372350" cy="2857500"/>
           </a:xfrm>
           <a:prstGeom prst="roundRect">
             <a:avLst>
-              <a:gd name="adj" fmla="val 7329"/>
-            </a:avLst>
-          </a:prstGeom>
-          <a:solidFill>
-            <a:srgbClr val="EDF3FD"/>
-          </a:solidFill>
-          <a:ln w="9525">
-            <a:solidFill>
-              <a:srgbClr val="BFD3F5"/>
-            </a:solidFill>
-          </a:ln>
-          <a:effectLst/>
-        </p:spPr>
-        <p:txBody>
-          <a:bodyPr rtlCol="0" anchor="ctr" wrap="square"/>
-          <a:lstStyle/>
-          <a:p>
-            <a:pPr algn="ctr"/>
-          </a:p>
-        </p:txBody>
-      </p:sp>
-      <p:sp>
-        <p:nvSpPr>
-          <p:cNvPr id="13" name="TextBox 12"/>
-          <p:cNvSpPr txBox="1"/>
-          <p:nvPr/>
-        </p:nvSpPr>
-        <p:spPr>
-          <a:xfrm>
-            <a:off x="1238250" y="3448050"/>
-            <a:ext cx="8092440" cy="519793"/>
-          </a:xfrm>
-          <a:prstGeom prst="rect">
-            <a:avLst/>
-          </a:prstGeom>
-          <a:noFill/>
-        </p:spPr>
-        <p:txBody>
-          <a:bodyPr wrap="square" lIns="0" rIns="0" tIns="0" bIns="0" anchor="ctr">
-            <a:spAutoFit/>
-          </a:bodyPr>
-          <a:lstStyle/>
-          <a:p>
-            <a:pPr algn="l">
-              <a:lnSpc>
-                <a:spcPct val="115000"/>
-              </a:lnSpc>
-            </a:pPr>
-            <a:r>
-              <a:rPr sz="1875" b="1">
-                <a:solidFill>
-                  <a:srgbClr val="0D2B5E"/>
-                </a:solidFill>
-                <a:latin typeface="Pretendard"/>
-                <a:ea typeface="Pretendard"/>
-                <a:cs typeface="Pretendard"/>
-              </a:rPr>
-              <a:t>"group.id": "order-agg"</a:t>
-            </a:r>
-          </a:p>
-        </p:txBody>
-      </p:sp>
-      <p:sp>
-        <p:nvSpPr>
-          <p:cNvPr id="14" name="Rounded Rectangle 13"/>
-          <p:cNvSpPr/>
-          <p:nvPr/>
-        </p:nvSpPr>
-        <p:spPr>
-          <a:xfrm>
-            <a:off x="9464040" y="3448050"/>
-            <a:ext cx="7680960" cy="519793"/>
-          </a:xfrm>
-          <a:prstGeom prst="roundRect">
-            <a:avLst>
-              <a:gd name="adj" fmla="val 7329"/>
+              <a:gd name="adj" fmla="val 1666"/>
             </a:avLst>
           </a:prstGeom>
           <a:solidFill>
@@ -13130,14 +15156,44 @@
       </p:sp>
       <p:sp>
         <p:nvSpPr>
-          <p:cNvPr id="15" name="TextBox 14"/>
-          <p:cNvSpPr txBox="1"/>
-          <p:nvPr/>
-        </p:nvSpPr>
-        <p:spPr>
-          <a:xfrm>
-            <a:off x="9559290" y="3448050"/>
-            <a:ext cx="7490460" cy="519793"/>
+          <p:cNvPr id="11" name="Oval 10"/>
+          <p:cNvSpPr/>
+          <p:nvPr/>
+        </p:nvSpPr>
+        <p:spPr>
+          <a:xfrm>
+            <a:off x="1447800" y="5016817"/>
+            <a:ext cx="97155" cy="97155"/>
+          </a:xfrm>
+          <a:prstGeom prst="ellipse">
+            <a:avLst/>
+          </a:prstGeom>
+          <a:solidFill>
+            <a:srgbClr val="1E5BC6"/>
+          </a:solidFill>
+          <a:ln>
+            <a:noFill/>
+          </a:ln>
+          <a:effectLst/>
+        </p:spPr>
+        <p:txBody>
+          <a:bodyPr rtlCol="0" anchor="ctr" wrap="square"/>
+          <a:lstStyle/>
+          <a:p>
+            <a:pPr algn="ctr"/>
+          </a:p>
+        </p:txBody>
+      </p:sp>
+      <p:sp>
+        <p:nvSpPr>
+          <p:cNvPr id="12" name="TextBox 11"/>
+          <p:cNvSpPr txBox="1"/>
+          <p:nvPr/>
+        </p:nvSpPr>
+        <p:spPr>
+          <a:xfrm>
+            <a:off x="1633538" y="4838700"/>
+            <a:ext cx="6634162" cy="453390"/>
           </a:xfrm>
           <a:prstGeom prst="rect">
             <a:avLst/>
@@ -13150,13 +15206,13 @@
           </a:bodyPr>
           <a:lstStyle/>
           <a:p>
-            <a:pPr algn="ctr">
-              <a:lnSpc>
-                <a:spcPct val="115000"/>
-              </a:lnSpc>
-            </a:pPr>
-            <a:r>
-              <a:rPr sz="1875" b="0">
+            <a:pPr algn="l">
+              <a:lnSpc>
+                <a:spcPct val="120000"/>
+              </a:lnSpc>
+            </a:pPr>
+            <a:r>
+              <a:rPr sz="1575" b="0">
                 <a:solidFill>
                   <a:srgbClr val="3D3D3D"/>
                 </a:solidFill>
@@ -13164,100 +15220,249 @@
                 <a:ea typeface="Pretendard"/>
                 <a:cs typeface="Pretendard"/>
               </a:rPr>
-              <a:t>이 Consumer 가 속한 그룹</a:t>
-            </a:r>
-          </a:p>
-        </p:txBody>
-      </p:sp>
-      <p:sp>
-        <p:nvSpPr>
-          <p:cNvPr id="16" name="Rounded Rectangle 15"/>
-          <p:cNvSpPr/>
-          <p:nvPr/>
-        </p:nvSpPr>
-        <p:spPr>
-          <a:xfrm>
-            <a:off x="1143000" y="4044043"/>
-            <a:ext cx="8282940" cy="519793"/>
+              <a:t>orders-test:0:0 — 한 건도 없다 (실측, 세 번 모두)</a:t>
+            </a:r>
+          </a:p>
+        </p:txBody>
+      </p:sp>
+      <p:sp>
+        <p:nvSpPr>
+          <p:cNvPr id="13" name="Oval 12"/>
+          <p:cNvSpPr/>
+          <p:nvPr/>
+        </p:nvSpPr>
+        <p:spPr>
+          <a:xfrm>
+            <a:off x="1447800" y="5527358"/>
+            <a:ext cx="97155" cy="97155"/>
+          </a:xfrm>
+          <a:prstGeom prst="ellipse">
+            <a:avLst/>
+          </a:prstGeom>
+          <a:solidFill>
+            <a:srgbClr val="1E5BC6"/>
+          </a:solidFill>
+          <a:ln>
+            <a:noFill/>
+          </a:ln>
+          <a:effectLst/>
+        </p:spPr>
+        <p:txBody>
+          <a:bodyPr rtlCol="0" anchor="ctr" wrap="square"/>
+          <a:lstStyle/>
+          <a:p>
+            <a:pPr algn="ctr"/>
+          </a:p>
+        </p:txBody>
+      </p:sp>
+      <p:sp>
+        <p:nvSpPr>
+          <p:cNvPr id="14" name="TextBox 13"/>
+          <p:cNvSpPr txBox="1"/>
+          <p:nvPr/>
+        </p:nvSpPr>
+        <p:spPr>
+          <a:xfrm>
+            <a:off x="1633538" y="5349240"/>
+            <a:ext cx="6634162" cy="453390"/>
+          </a:xfrm>
+          <a:prstGeom prst="rect">
+            <a:avLst/>
+          </a:prstGeom>
+          <a:noFill/>
+        </p:spPr>
+        <p:txBody>
+          <a:bodyPr wrap="square" lIns="0" rIns="0" tIns="0" bIns="0" anchor="ctr">
+            <a:spAutoFit/>
+          </a:bodyPr>
+          <a:lstStyle/>
+          <a:p>
+            <a:pPr algn="l">
+              <a:lnSpc>
+                <a:spcPct val="120000"/>
+              </a:lnSpc>
+            </a:pPr>
+            <a:r>
+              <a:rPr sz="1575" b="0">
+                <a:solidFill>
+                  <a:srgbClr val="3D3D3D"/>
+                </a:solidFill>
+                <a:latin typeface="Pretendard"/>
+                <a:ea typeface="Pretendard"/>
+                <a:cs typeface="Pretendard"/>
+              </a:rPr>
+              <a:t>%4|…|TERMINATE| … 1000 messages … use flush()</a:t>
+            </a:r>
+          </a:p>
+        </p:txBody>
+      </p:sp>
+      <p:sp>
+        <p:nvSpPr>
+          <p:cNvPr id="15" name="Oval 14"/>
+          <p:cNvSpPr/>
+          <p:nvPr/>
+        </p:nvSpPr>
+        <p:spPr>
+          <a:xfrm>
+            <a:off x="1447800" y="6037898"/>
+            <a:ext cx="97155" cy="97155"/>
+          </a:xfrm>
+          <a:prstGeom prst="ellipse">
+            <a:avLst/>
+          </a:prstGeom>
+          <a:solidFill>
+            <a:srgbClr val="1E5BC6"/>
+          </a:solidFill>
+          <a:ln>
+            <a:noFill/>
+          </a:ln>
+          <a:effectLst/>
+        </p:spPr>
+        <p:txBody>
+          <a:bodyPr rtlCol="0" anchor="ctr" wrap="square"/>
+          <a:lstStyle/>
+          <a:p>
+            <a:pPr algn="ctr"/>
+          </a:p>
+        </p:txBody>
+      </p:sp>
+      <p:sp>
+        <p:nvSpPr>
+          <p:cNvPr id="16" name="TextBox 15"/>
+          <p:cNvSpPr txBox="1"/>
+          <p:nvPr/>
+        </p:nvSpPr>
+        <p:spPr>
+          <a:xfrm>
+            <a:off x="1633538" y="5859780"/>
+            <a:ext cx="6634162" cy="453390"/>
+          </a:xfrm>
+          <a:prstGeom prst="rect">
+            <a:avLst/>
+          </a:prstGeom>
+          <a:noFill/>
+        </p:spPr>
+        <p:txBody>
+          <a:bodyPr wrap="square" lIns="0" rIns="0" tIns="0" bIns="0" anchor="ctr">
+            <a:spAutoFit/>
+          </a:bodyPr>
+          <a:lstStyle/>
+          <a:p>
+            <a:pPr algn="l">
+              <a:lnSpc>
+                <a:spcPct val="120000"/>
+              </a:lnSpc>
+            </a:pPr>
+            <a:r>
+              <a:rPr sz="1575" b="0">
+                <a:solidFill>
+                  <a:srgbClr val="3D3D3D"/>
+                </a:solidFill>
+                <a:latin typeface="Pretendard"/>
+                <a:ea typeface="Pretendard"/>
+                <a:cs typeface="Pretendard"/>
+              </a:rPr>
+              <a:t>오류가 아니라 경고 — 정상 종료로 보인다</a:t>
+            </a:r>
+          </a:p>
+        </p:txBody>
+      </p:sp>
+      <p:sp>
+        <p:nvSpPr>
+          <p:cNvPr id="17" name="TextBox 16"/>
+          <p:cNvSpPr txBox="1"/>
+          <p:nvPr/>
+        </p:nvSpPr>
+        <p:spPr>
+          <a:xfrm>
+            <a:off x="9772650" y="2857500"/>
+            <a:ext cx="7372350" cy="533400"/>
+          </a:xfrm>
+          <a:prstGeom prst="rect">
+            <a:avLst/>
+          </a:prstGeom>
+          <a:noFill/>
+        </p:spPr>
+        <p:txBody>
+          <a:bodyPr wrap="square" lIns="0" rIns="0" tIns="0" bIns="0" anchor="t">
+            <a:spAutoFit/>
+          </a:bodyPr>
+          <a:lstStyle/>
+          <a:p>
+            <a:pPr algn="l">
+              <a:lnSpc>
+                <a:spcPct val="110000"/>
+              </a:lnSpc>
+            </a:pPr>
+            <a:r>
+              <a:rPr sz="3150" b="1">
+                <a:solidFill>
+                  <a:srgbClr val="0D2B5E"/>
+                </a:solidFill>
+                <a:latin typeface="Pretendard"/>
+                <a:ea typeface="Pretendard"/>
+                <a:cs typeface="Pretendard"/>
+              </a:rPr>
+              <a:t>flush() 있음</a:t>
+            </a:r>
+          </a:p>
+        </p:txBody>
+      </p:sp>
+      <p:sp>
+        <p:nvSpPr>
+          <p:cNvPr id="18" name="TextBox 17"/>
+          <p:cNvSpPr txBox="1"/>
+          <p:nvPr/>
+        </p:nvSpPr>
+        <p:spPr>
+          <a:xfrm>
+            <a:off x="9772650" y="3467100"/>
+            <a:ext cx="7372350" cy="876300"/>
+          </a:xfrm>
+          <a:prstGeom prst="rect">
+            <a:avLst/>
+          </a:prstGeom>
+          <a:noFill/>
+        </p:spPr>
+        <p:txBody>
+          <a:bodyPr wrap="square" lIns="0" rIns="0" tIns="0" bIns="0" anchor="t">
+            <a:spAutoFit/>
+          </a:bodyPr>
+          <a:lstStyle/>
+          <a:p>
+            <a:pPr algn="l">
+              <a:lnSpc>
+                <a:spcPct val="146000"/>
+              </a:lnSpc>
+            </a:pPr>
+            <a:r>
+              <a:rPr sz="2250" b="0">
+                <a:solidFill>
+                  <a:srgbClr val="3D3D3D"/>
+                </a:solidFill>
+                <a:latin typeface="Pretendard"/>
+                <a:ea typeface="Pretendard"/>
+                <a:cs typeface="Pretendard"/>
+              </a:rPr>
+              <a:t>버퍼를 다 보낼 때까지 기다린 뒤 끝난다</a:t>
+            </a:r>
+          </a:p>
+        </p:txBody>
+      </p:sp>
+      <p:sp>
+        <p:nvSpPr>
+          <p:cNvPr id="19" name="Rounded Rectangle 18"/>
+          <p:cNvSpPr/>
+          <p:nvPr/>
+        </p:nvSpPr>
+        <p:spPr>
+          <a:xfrm>
+            <a:off x="9772650" y="4610100"/>
+            <a:ext cx="7372350" cy="2857500"/>
           </a:xfrm>
           <a:prstGeom prst="roundRect">
             <a:avLst>
-              <a:gd name="adj" fmla="val 7329"/>
-            </a:avLst>
-          </a:prstGeom>
-          <a:solidFill>
-            <a:srgbClr val="EDF3FD"/>
-          </a:solidFill>
-          <a:ln w="9525">
-            <a:solidFill>
-              <a:srgbClr val="BFD3F5"/>
-            </a:solidFill>
-          </a:ln>
-          <a:effectLst/>
-        </p:spPr>
-        <p:txBody>
-          <a:bodyPr rtlCol="0" anchor="ctr" wrap="square"/>
-          <a:lstStyle/>
-          <a:p>
-            <a:pPr algn="ctr"/>
-          </a:p>
-        </p:txBody>
-      </p:sp>
-      <p:sp>
-        <p:nvSpPr>
-          <p:cNvPr id="17" name="TextBox 16"/>
-          <p:cNvSpPr txBox="1"/>
-          <p:nvPr/>
-        </p:nvSpPr>
-        <p:spPr>
-          <a:xfrm>
-            <a:off x="1238250" y="4044043"/>
-            <a:ext cx="8092440" cy="519793"/>
-          </a:xfrm>
-          <a:prstGeom prst="rect">
-            <a:avLst/>
-          </a:prstGeom>
-          <a:noFill/>
-        </p:spPr>
-        <p:txBody>
-          <a:bodyPr wrap="square" lIns="0" rIns="0" tIns="0" bIns="0" anchor="ctr">
-            <a:spAutoFit/>
-          </a:bodyPr>
-          <a:lstStyle/>
-          <a:p>
-            <a:pPr algn="l">
-              <a:lnSpc>
-                <a:spcPct val="115000"/>
-              </a:lnSpc>
-            </a:pPr>
-            <a:r>
-              <a:rPr sz="1875" b="1">
-                <a:solidFill>
-                  <a:srgbClr val="0D2B5E"/>
-                </a:solidFill>
-                <a:latin typeface="Pretendard"/>
-                <a:ea typeface="Pretendard"/>
-                <a:cs typeface="Pretendard"/>
-              </a:rPr>
-              <a:t>"auto.offset.reset": "earliest"</a:t>
-            </a:r>
-          </a:p>
-        </p:txBody>
-      </p:sp>
-      <p:sp>
-        <p:nvSpPr>
-          <p:cNvPr id="18" name="Rounded Rectangle 17"/>
-          <p:cNvSpPr/>
-          <p:nvPr/>
-        </p:nvSpPr>
-        <p:spPr>
-          <a:xfrm>
-            <a:off x="9464040" y="4044043"/>
-            <a:ext cx="7680960" cy="519793"/>
-          </a:xfrm>
-          <a:prstGeom prst="roundRect">
-            <a:avLst>
-              <a:gd name="adj" fmla="val 7329"/>
+              <a:gd name="adj" fmla="val 1666"/>
             </a:avLst>
           </a:prstGeom>
           <a:solidFill>
@@ -13280,14 +15485,44 @@
       </p:sp>
       <p:sp>
         <p:nvSpPr>
-          <p:cNvPr id="19" name="TextBox 18"/>
-          <p:cNvSpPr txBox="1"/>
-          <p:nvPr/>
-        </p:nvSpPr>
-        <p:spPr>
-          <a:xfrm>
-            <a:off x="9559290" y="4044043"/>
-            <a:ext cx="7490460" cy="519793"/>
+          <p:cNvPr id="20" name="Oval 19"/>
+          <p:cNvSpPr/>
+          <p:nvPr/>
+        </p:nvSpPr>
+        <p:spPr>
+          <a:xfrm>
+            <a:off x="10077450" y="5016817"/>
+            <a:ext cx="97155" cy="97155"/>
+          </a:xfrm>
+          <a:prstGeom prst="ellipse">
+            <a:avLst/>
+          </a:prstGeom>
+          <a:solidFill>
+            <a:srgbClr val="1E5BC6"/>
+          </a:solidFill>
+          <a:ln>
+            <a:noFill/>
+          </a:ln>
+          <a:effectLst/>
+        </p:spPr>
+        <p:txBody>
+          <a:bodyPr rtlCol="0" anchor="ctr" wrap="square"/>
+          <a:lstStyle/>
+          <a:p>
+            <a:pPr algn="ctr"/>
+          </a:p>
+        </p:txBody>
+      </p:sp>
+      <p:sp>
+        <p:nvSpPr>
+          <p:cNvPr id="21" name="TextBox 20"/>
+          <p:cNvSpPr txBox="1"/>
+          <p:nvPr/>
+        </p:nvSpPr>
+        <p:spPr>
+          <a:xfrm>
+            <a:off x="10263188" y="4838700"/>
+            <a:ext cx="6634162" cy="453390"/>
           </a:xfrm>
           <a:prstGeom prst="rect">
             <a:avLst/>
@@ -13300,819 +15535,241 @@
           </a:bodyPr>
           <a:lstStyle/>
           <a:p>
+            <a:pPr algn="l">
+              <a:lnSpc>
+                <a:spcPct val="120000"/>
+              </a:lnSpc>
+            </a:pPr>
+            <a:r>
+              <a:rPr sz="1575" b="0">
+                <a:solidFill>
+                  <a:srgbClr val="3D3D3D"/>
+                </a:solidFill>
+                <a:latin typeface="Pretendard"/>
+                <a:ea typeface="Pretendard"/>
+                <a:cs typeface="Pretendard"/>
+              </a:rPr>
+              <a:t>echo 'p.flush()' &gt;&gt; producer_noflush.py</a:t>
+            </a:r>
+          </a:p>
+        </p:txBody>
+      </p:sp>
+      <p:sp>
+        <p:nvSpPr>
+          <p:cNvPr id="22" name="Oval 21"/>
+          <p:cNvSpPr/>
+          <p:nvPr/>
+        </p:nvSpPr>
+        <p:spPr>
+          <a:xfrm>
+            <a:off x="10077450" y="5527358"/>
+            <a:ext cx="97155" cy="97155"/>
+          </a:xfrm>
+          <a:prstGeom prst="ellipse">
+            <a:avLst/>
+          </a:prstGeom>
+          <a:solidFill>
+            <a:srgbClr val="1E5BC6"/>
+          </a:solidFill>
+          <a:ln>
+            <a:noFill/>
+          </a:ln>
+          <a:effectLst/>
+        </p:spPr>
+        <p:txBody>
+          <a:bodyPr rtlCol="0" anchor="ctr" wrap="square"/>
+          <a:lstStyle/>
+          <a:p>
+            <a:pPr algn="ctr"/>
+          </a:p>
+        </p:txBody>
+      </p:sp>
+      <p:sp>
+        <p:nvSpPr>
+          <p:cNvPr id="23" name="TextBox 22"/>
+          <p:cNvSpPr txBox="1"/>
+          <p:nvPr/>
+        </p:nvSpPr>
+        <p:spPr>
+          <a:xfrm>
+            <a:off x="10263188" y="5349240"/>
+            <a:ext cx="6634162" cy="453390"/>
+          </a:xfrm>
+          <a:prstGeom prst="rect">
+            <a:avLst/>
+          </a:prstGeom>
+          <a:noFill/>
+        </p:spPr>
+        <p:txBody>
+          <a:bodyPr wrap="square" lIns="0" rIns="0" tIns="0" bIns="0" anchor="ctr">
+            <a:spAutoFit/>
+          </a:bodyPr>
+          <a:lstStyle/>
+          <a:p>
+            <a:pPr algn="l">
+              <a:lnSpc>
+                <a:spcPct val="120000"/>
+              </a:lnSpc>
+            </a:pPr>
+            <a:r>
+              <a:rPr sz="1575" b="0">
+                <a:solidFill>
+                  <a:srgbClr val="3D3D3D"/>
+                </a:solidFill>
+                <a:latin typeface="Pretendard"/>
+                <a:ea typeface="Pretendard"/>
+                <a:cs typeface="Pretendard"/>
+              </a:rPr>
+              <a:t>orders-test:0:1000 — 경고 없이 정확히</a:t>
+            </a:r>
+          </a:p>
+        </p:txBody>
+      </p:sp>
+      <p:sp>
+        <p:nvSpPr>
+          <p:cNvPr id="24" name="Oval 23"/>
+          <p:cNvSpPr/>
+          <p:nvPr/>
+        </p:nvSpPr>
+        <p:spPr>
+          <a:xfrm>
+            <a:off x="10077450" y="6037898"/>
+            <a:ext cx="97155" cy="97155"/>
+          </a:xfrm>
+          <a:prstGeom prst="ellipse">
+            <a:avLst/>
+          </a:prstGeom>
+          <a:solidFill>
+            <a:srgbClr val="1E5BC6"/>
+          </a:solidFill>
+          <a:ln>
+            <a:noFill/>
+          </a:ln>
+          <a:effectLst/>
+        </p:spPr>
+        <p:txBody>
+          <a:bodyPr rtlCol="0" anchor="ctr" wrap="square"/>
+          <a:lstStyle/>
+          <a:p>
+            <a:pPr algn="ctr"/>
+          </a:p>
+        </p:txBody>
+      </p:sp>
+      <p:sp>
+        <p:nvSpPr>
+          <p:cNvPr id="25" name="TextBox 24"/>
+          <p:cNvSpPr txBox="1"/>
+          <p:nvPr/>
+        </p:nvSpPr>
+        <p:spPr>
+          <a:xfrm>
+            <a:off x="10263188" y="5859780"/>
+            <a:ext cx="6634162" cy="453390"/>
+          </a:xfrm>
+          <a:prstGeom prst="rect">
+            <a:avLst/>
+          </a:prstGeom>
+          <a:noFill/>
+        </p:spPr>
+        <p:txBody>
+          <a:bodyPr wrap="square" lIns="0" rIns="0" tIns="0" bIns="0" anchor="ctr">
+            <a:spAutoFit/>
+          </a:bodyPr>
+          <a:lstStyle/>
+          <a:p>
+            <a:pPr algn="l">
+              <a:lnSpc>
+                <a:spcPct val="120000"/>
+              </a:lnSpc>
+            </a:pPr>
+            <a:r>
+              <a:rPr sz="1575" b="0">
+                <a:solidFill>
+                  <a:srgbClr val="3D3D3D"/>
+                </a:solidFill>
+                <a:latin typeface="Pretendard"/>
+                <a:ea typeface="Pretendard"/>
+                <a:cs typeface="Pretendard"/>
+              </a:rPr>
+              <a:t>끝나는 곳마다 — try/finally 안에서 flush()</a:t>
+            </a:r>
+          </a:p>
+        </p:txBody>
+      </p:sp>
+      <p:sp>
+        <p:nvSpPr>
+          <p:cNvPr id="26" name="Oval 25"/>
+          <p:cNvSpPr/>
+          <p:nvPr/>
+        </p:nvSpPr>
+        <p:spPr>
+          <a:xfrm>
+            <a:off x="8686800" y="3771900"/>
+            <a:ext cx="914400" cy="914400"/>
+          </a:xfrm>
+          <a:prstGeom prst="ellipse">
+            <a:avLst/>
+          </a:prstGeom>
+          <a:solidFill>
+            <a:srgbClr val="0D2B5E"/>
+          </a:solidFill>
+          <a:ln>
+            <a:noFill/>
+          </a:ln>
+          <a:effectLst/>
+        </p:spPr>
+        <p:txBody>
+          <a:bodyPr rtlCol="0" anchor="ctr" wrap="square"/>
+          <a:lstStyle/>
+          <a:p>
+            <a:pPr algn="ctr"/>
+          </a:p>
+        </p:txBody>
+      </p:sp>
+      <p:sp>
+        <p:nvSpPr>
+          <p:cNvPr id="27" name="TextBox 26"/>
+          <p:cNvSpPr txBox="1"/>
+          <p:nvPr/>
+        </p:nvSpPr>
+        <p:spPr>
+          <a:xfrm>
+            <a:off x="8686800" y="4057650"/>
+            <a:ext cx="914400" cy="381000"/>
+          </a:xfrm>
+          <a:prstGeom prst="rect">
+            <a:avLst/>
+          </a:prstGeom>
+          <a:noFill/>
+        </p:spPr>
+        <p:txBody>
+          <a:bodyPr wrap="square" lIns="0" rIns="0" tIns="0" bIns="0" anchor="t">
+            <a:spAutoFit/>
+          </a:bodyPr>
+          <a:lstStyle/>
+          <a:p>
             <a:pPr algn="ctr">
               <a:lnSpc>
-                <a:spcPct val="115000"/>
-              </a:lnSpc>
-            </a:pPr>
-            <a:r>
-              <a:rPr sz="1875" b="0">
-                <a:solidFill>
-                  <a:srgbClr val="3D3D3D"/>
-                </a:solidFill>
-                <a:latin typeface="Pretendard"/>
-                <a:ea typeface="Pretendard"/>
-                <a:cs typeface="Pretendard"/>
-              </a:rPr>
-              <a:t>새 그룹은 처음부터</a:t>
-            </a:r>
-          </a:p>
-        </p:txBody>
-      </p:sp>
-      <p:sp>
-        <p:nvSpPr>
-          <p:cNvPr id="20" name="Rounded Rectangle 19"/>
-          <p:cNvSpPr/>
-          <p:nvPr/>
-        </p:nvSpPr>
-        <p:spPr>
-          <a:xfrm>
-            <a:off x="1143000" y="4640036"/>
-            <a:ext cx="8282940" cy="519793"/>
-          </a:xfrm>
-          <a:prstGeom prst="roundRect">
-            <a:avLst>
-              <a:gd name="adj" fmla="val 7329"/>
-            </a:avLst>
-          </a:prstGeom>
-          <a:solidFill>
-            <a:srgbClr val="EDF3FD"/>
-          </a:solidFill>
-          <a:ln w="9525">
-            <a:solidFill>
-              <a:srgbClr val="BFD3F5"/>
-            </a:solidFill>
-          </a:ln>
-          <a:effectLst/>
-        </p:spPr>
-        <p:txBody>
-          <a:bodyPr rtlCol="0" anchor="ctr" wrap="square"/>
-          <a:lstStyle/>
-          <a:p>
-            <a:pPr algn="ctr"/>
-          </a:p>
-        </p:txBody>
-      </p:sp>
-      <p:sp>
-        <p:nvSpPr>
-          <p:cNvPr id="21" name="TextBox 20"/>
-          <p:cNvSpPr txBox="1"/>
-          <p:nvPr/>
-        </p:nvSpPr>
-        <p:spPr>
-          <a:xfrm>
-            <a:off x="1238250" y="4640036"/>
-            <a:ext cx="8092440" cy="519793"/>
-          </a:xfrm>
-          <a:prstGeom prst="rect">
-            <a:avLst/>
-          </a:prstGeom>
-          <a:noFill/>
-        </p:spPr>
-        <p:txBody>
-          <a:bodyPr wrap="square" lIns="0" rIns="0" tIns="0" bIns="0" anchor="ctr">
-            <a:spAutoFit/>
-          </a:bodyPr>
-          <a:lstStyle/>
-          <a:p>
-            <a:pPr algn="l">
-              <a:lnSpc>
-                <a:spcPct val="115000"/>
-              </a:lnSpc>
-            </a:pPr>
-            <a:r>
-              <a:rPr sz="1875" b="1">
-                <a:solidFill>
-                  <a:srgbClr val="0D2B5E"/>
-                </a:solidFill>
-                <a:latin typeface="Pretendard"/>
-                <a:ea typeface="Pretendard"/>
-                <a:cs typeface="Pretendard"/>
-              </a:rPr>
-              <a:t>c.subscribe(["orders"])</a:t>
-            </a:r>
-          </a:p>
-        </p:txBody>
-      </p:sp>
-      <p:sp>
-        <p:nvSpPr>
-          <p:cNvPr id="22" name="Rounded Rectangle 21"/>
-          <p:cNvSpPr/>
-          <p:nvPr/>
-        </p:nvSpPr>
-        <p:spPr>
-          <a:xfrm>
-            <a:off x="9464040" y="4640036"/>
-            <a:ext cx="7680960" cy="519793"/>
-          </a:xfrm>
-          <a:prstGeom prst="roundRect">
-            <a:avLst>
-              <a:gd name="adj" fmla="val 7329"/>
-            </a:avLst>
-          </a:prstGeom>
-          <a:solidFill>
-            <a:srgbClr val="FAFBFD"/>
-          </a:solidFill>
-          <a:ln w="9525">
-            <a:solidFill>
-              <a:srgbClr val="DCE1E8"/>
-            </a:solidFill>
-          </a:ln>
-          <a:effectLst/>
-        </p:spPr>
-        <p:txBody>
-          <a:bodyPr rtlCol="0" anchor="ctr" wrap="square"/>
-          <a:lstStyle/>
-          <a:p>
-            <a:pPr algn="ctr"/>
-          </a:p>
-        </p:txBody>
-      </p:sp>
-      <p:sp>
-        <p:nvSpPr>
-          <p:cNvPr id="23" name="TextBox 22"/>
-          <p:cNvSpPr txBox="1"/>
-          <p:nvPr/>
-        </p:nvSpPr>
-        <p:spPr>
-          <a:xfrm>
-            <a:off x="9559290" y="4640036"/>
-            <a:ext cx="7490460" cy="519793"/>
-          </a:xfrm>
-          <a:prstGeom prst="rect">
-            <a:avLst/>
-          </a:prstGeom>
-          <a:noFill/>
-        </p:spPr>
-        <p:txBody>
-          <a:bodyPr wrap="square" lIns="0" rIns="0" tIns="0" bIns="0" anchor="ctr">
-            <a:spAutoFit/>
-          </a:bodyPr>
-          <a:lstStyle/>
-          <a:p>
-            <a:pPr algn="ctr">
-              <a:lnSpc>
-                <a:spcPct val="115000"/>
-              </a:lnSpc>
-            </a:pPr>
-            <a:r>
-              <a:rPr sz="1875" b="0">
-                <a:solidFill>
-                  <a:srgbClr val="3D3D3D"/>
-                </a:solidFill>
-                <a:latin typeface="Pretendard"/>
-                <a:ea typeface="Pretendard"/>
-                <a:cs typeface="Pretendard"/>
-              </a:rPr>
-              <a:t>토픽 구독</a:t>
-            </a:r>
-          </a:p>
-        </p:txBody>
-      </p:sp>
-      <p:sp>
-        <p:nvSpPr>
-          <p:cNvPr id="24" name="Rounded Rectangle 23"/>
-          <p:cNvSpPr/>
-          <p:nvPr/>
-        </p:nvSpPr>
-        <p:spPr>
-          <a:xfrm>
-            <a:off x="1143000" y="5236029"/>
-            <a:ext cx="8282940" cy="519793"/>
-          </a:xfrm>
-          <a:prstGeom prst="roundRect">
-            <a:avLst>
-              <a:gd name="adj" fmla="val 7329"/>
-            </a:avLst>
-          </a:prstGeom>
-          <a:solidFill>
-            <a:srgbClr val="EDF3FD"/>
-          </a:solidFill>
-          <a:ln w="9525">
-            <a:solidFill>
-              <a:srgbClr val="BFD3F5"/>
-            </a:solidFill>
-          </a:ln>
-          <a:effectLst/>
-        </p:spPr>
-        <p:txBody>
-          <a:bodyPr rtlCol="0" anchor="ctr" wrap="square"/>
-          <a:lstStyle/>
-          <a:p>
-            <a:pPr algn="ctr"/>
-          </a:p>
-        </p:txBody>
-      </p:sp>
-      <p:sp>
-        <p:nvSpPr>
-          <p:cNvPr id="25" name="TextBox 24"/>
-          <p:cNvSpPr txBox="1"/>
-          <p:nvPr/>
-        </p:nvSpPr>
-        <p:spPr>
-          <a:xfrm>
-            <a:off x="1238250" y="5236029"/>
-            <a:ext cx="8092440" cy="519793"/>
-          </a:xfrm>
-          <a:prstGeom prst="rect">
-            <a:avLst/>
-          </a:prstGeom>
-          <a:noFill/>
-        </p:spPr>
-        <p:txBody>
-          <a:bodyPr wrap="square" lIns="0" rIns="0" tIns="0" bIns="0" anchor="ctr">
-            <a:spAutoFit/>
-          </a:bodyPr>
-          <a:lstStyle/>
-          <a:p>
-            <a:pPr algn="l">
-              <a:lnSpc>
-                <a:spcPct val="115000"/>
-              </a:lnSpc>
-            </a:pPr>
-            <a:r>
-              <a:rPr sz="1875" b="1">
-                <a:solidFill>
-                  <a:srgbClr val="0D2B5E"/>
-                </a:solidFill>
-                <a:latin typeface="Pretendard"/>
-                <a:ea typeface="Pretendard"/>
-                <a:cs typeface="Pretendard"/>
-              </a:rPr>
-              <a:t>msg = c.poll(1.0)</a:t>
-            </a:r>
-          </a:p>
-        </p:txBody>
-      </p:sp>
-      <p:sp>
-        <p:nvSpPr>
-          <p:cNvPr id="26" name="Rounded Rectangle 25"/>
-          <p:cNvSpPr/>
-          <p:nvPr/>
-        </p:nvSpPr>
-        <p:spPr>
-          <a:xfrm>
-            <a:off x="9464040" y="5236029"/>
-            <a:ext cx="7680960" cy="519793"/>
-          </a:xfrm>
-          <a:prstGeom prst="roundRect">
-            <a:avLst>
-              <a:gd name="adj" fmla="val 7329"/>
-            </a:avLst>
-          </a:prstGeom>
-          <a:solidFill>
-            <a:srgbClr val="FAFBFD"/>
-          </a:solidFill>
-          <a:ln w="9525">
-            <a:solidFill>
-              <a:srgbClr val="DCE1E8"/>
-            </a:solidFill>
-          </a:ln>
-          <a:effectLst/>
-        </p:spPr>
-        <p:txBody>
-          <a:bodyPr rtlCol="0" anchor="ctr" wrap="square"/>
-          <a:lstStyle/>
-          <a:p>
-            <a:pPr algn="ctr"/>
-          </a:p>
-        </p:txBody>
-      </p:sp>
-      <p:sp>
-        <p:nvSpPr>
-          <p:cNvPr id="27" name="TextBox 26"/>
-          <p:cNvSpPr txBox="1"/>
-          <p:nvPr/>
-        </p:nvSpPr>
-        <p:spPr>
-          <a:xfrm>
-            <a:off x="9559290" y="5236029"/>
-            <a:ext cx="7490460" cy="519793"/>
-          </a:xfrm>
-          <a:prstGeom prst="rect">
-            <a:avLst/>
-          </a:prstGeom>
-          <a:noFill/>
-        </p:spPr>
-        <p:txBody>
-          <a:bodyPr wrap="square" lIns="0" rIns="0" tIns="0" bIns="0" anchor="ctr">
-            <a:spAutoFit/>
-          </a:bodyPr>
-          <a:lstStyle/>
-          <a:p>
-            <a:pPr algn="ctr">
-              <a:lnSpc>
-                <a:spcPct val="115000"/>
-              </a:lnSpc>
-            </a:pPr>
-            <a:r>
-              <a:rPr sz="1875" b="0">
-                <a:solidFill>
-                  <a:srgbClr val="3D3D3D"/>
-                </a:solidFill>
-                <a:latin typeface="Pretendard"/>
-                <a:ea typeface="Pretendard"/>
-                <a:cs typeface="Pretendard"/>
-              </a:rPr>
-              <a:t>없으면 1초 기다렸다 None</a:t>
-            </a:r>
-          </a:p>
-        </p:txBody>
-      </p:sp>
-      <p:sp>
-        <p:nvSpPr>
-          <p:cNvPr id="28" name="Rounded Rectangle 27"/>
-          <p:cNvSpPr/>
-          <p:nvPr/>
-        </p:nvSpPr>
-        <p:spPr>
-          <a:xfrm>
-            <a:off x="1143000" y="5832021"/>
-            <a:ext cx="8282940" cy="519793"/>
-          </a:xfrm>
-          <a:prstGeom prst="roundRect">
-            <a:avLst>
-              <a:gd name="adj" fmla="val 7329"/>
-            </a:avLst>
-          </a:prstGeom>
-          <a:solidFill>
-            <a:srgbClr val="EDF3FD"/>
-          </a:solidFill>
-          <a:ln w="9525">
-            <a:solidFill>
-              <a:srgbClr val="BFD3F5"/>
-            </a:solidFill>
-          </a:ln>
-          <a:effectLst/>
-        </p:spPr>
-        <p:txBody>
-          <a:bodyPr rtlCol="0" anchor="ctr" wrap="square"/>
-          <a:lstStyle/>
-          <a:p>
-            <a:pPr algn="ctr"/>
-          </a:p>
-        </p:txBody>
-      </p:sp>
-      <p:sp>
-        <p:nvSpPr>
-          <p:cNvPr id="29" name="TextBox 28"/>
-          <p:cNvSpPr txBox="1"/>
-          <p:nvPr/>
-        </p:nvSpPr>
-        <p:spPr>
-          <a:xfrm>
-            <a:off x="1238250" y="5832021"/>
-            <a:ext cx="8092440" cy="519793"/>
-          </a:xfrm>
-          <a:prstGeom prst="rect">
-            <a:avLst/>
-          </a:prstGeom>
-          <a:noFill/>
-        </p:spPr>
-        <p:txBody>
-          <a:bodyPr wrap="square" lIns="0" rIns="0" tIns="0" bIns="0" anchor="ctr">
-            <a:spAutoFit/>
-          </a:bodyPr>
-          <a:lstStyle/>
-          <a:p>
-            <a:pPr algn="l">
-              <a:lnSpc>
-                <a:spcPct val="115000"/>
-              </a:lnSpc>
-            </a:pPr>
-            <a:r>
-              <a:rPr sz="1875" b="1">
-                <a:solidFill>
-                  <a:srgbClr val="0D2B5E"/>
-                </a:solidFill>
-                <a:latin typeface="Pretendard"/>
-                <a:ea typeface="Pretendard"/>
-                <a:cs typeface="Pretendard"/>
-              </a:rPr>
-              <a:t>if msg.error(): …</a:t>
-            </a:r>
-          </a:p>
-        </p:txBody>
-      </p:sp>
-      <p:sp>
-        <p:nvSpPr>
-          <p:cNvPr id="30" name="Rounded Rectangle 29"/>
-          <p:cNvSpPr/>
-          <p:nvPr/>
-        </p:nvSpPr>
-        <p:spPr>
-          <a:xfrm>
-            <a:off x="9464040" y="5832021"/>
-            <a:ext cx="7680960" cy="519793"/>
-          </a:xfrm>
-          <a:prstGeom prst="roundRect">
-            <a:avLst>
-              <a:gd name="adj" fmla="val 7329"/>
-            </a:avLst>
-          </a:prstGeom>
-          <a:solidFill>
-            <a:srgbClr val="FAFBFD"/>
-          </a:solidFill>
-          <a:ln w="9525">
-            <a:solidFill>
-              <a:srgbClr val="DCE1E8"/>
-            </a:solidFill>
-          </a:ln>
-          <a:effectLst/>
-        </p:spPr>
-        <p:txBody>
-          <a:bodyPr rtlCol="0" anchor="ctr" wrap="square"/>
-          <a:lstStyle/>
-          <a:p>
-            <a:pPr algn="ctr"/>
-          </a:p>
-        </p:txBody>
-      </p:sp>
-      <p:sp>
-        <p:nvSpPr>
-          <p:cNvPr id="31" name="TextBox 30"/>
-          <p:cNvSpPr txBox="1"/>
-          <p:nvPr/>
-        </p:nvSpPr>
-        <p:spPr>
-          <a:xfrm>
-            <a:off x="9559290" y="5832021"/>
-            <a:ext cx="7490460" cy="519793"/>
-          </a:xfrm>
-          <a:prstGeom prst="rect">
-            <a:avLst/>
-          </a:prstGeom>
-          <a:noFill/>
-        </p:spPr>
-        <p:txBody>
-          <a:bodyPr wrap="square" lIns="0" rIns="0" tIns="0" bIns="0" anchor="ctr">
-            <a:spAutoFit/>
-          </a:bodyPr>
-          <a:lstStyle/>
-          <a:p>
-            <a:pPr algn="ctr">
-              <a:lnSpc>
-                <a:spcPct val="115000"/>
-              </a:lnSpc>
-            </a:pPr>
-            <a:r>
-              <a:rPr sz="1875" b="0">
-                <a:solidFill>
-                  <a:srgbClr val="3D3D3D"/>
-                </a:solidFill>
-                <a:latin typeface="Pretendard"/>
-                <a:ea typeface="Pretendard"/>
-                <a:cs typeface="Pretendard"/>
-              </a:rPr>
-              <a:t>오류를 조용히 넘기지 않는다</a:t>
-            </a:r>
-          </a:p>
-        </p:txBody>
-      </p:sp>
-      <p:sp>
-        <p:nvSpPr>
-          <p:cNvPr id="32" name="Rounded Rectangle 31"/>
-          <p:cNvSpPr/>
-          <p:nvPr/>
-        </p:nvSpPr>
-        <p:spPr>
-          <a:xfrm>
-            <a:off x="1143000" y="6428014"/>
-            <a:ext cx="8282940" cy="519793"/>
-          </a:xfrm>
-          <a:prstGeom prst="roundRect">
-            <a:avLst>
-              <a:gd name="adj" fmla="val 7329"/>
-            </a:avLst>
-          </a:prstGeom>
-          <a:solidFill>
-            <a:srgbClr val="EDF3FD"/>
-          </a:solidFill>
-          <a:ln w="9525">
-            <a:solidFill>
-              <a:srgbClr val="BFD3F5"/>
-            </a:solidFill>
-          </a:ln>
-          <a:effectLst/>
-        </p:spPr>
-        <p:txBody>
-          <a:bodyPr rtlCol="0" anchor="ctr" wrap="square"/>
-          <a:lstStyle/>
-          <a:p>
-            <a:pPr algn="ctr"/>
-          </a:p>
-        </p:txBody>
-      </p:sp>
-      <p:sp>
-        <p:nvSpPr>
-          <p:cNvPr id="33" name="TextBox 32"/>
-          <p:cNvSpPr txBox="1"/>
-          <p:nvPr/>
-        </p:nvSpPr>
-        <p:spPr>
-          <a:xfrm>
-            <a:off x="1238250" y="6428014"/>
-            <a:ext cx="8092440" cy="519793"/>
-          </a:xfrm>
-          <a:prstGeom prst="rect">
-            <a:avLst/>
-          </a:prstGeom>
-          <a:noFill/>
-        </p:spPr>
-        <p:txBody>
-          <a:bodyPr wrap="square" lIns="0" rIns="0" tIns="0" bIns="0" anchor="ctr">
-            <a:spAutoFit/>
-          </a:bodyPr>
-          <a:lstStyle/>
-          <a:p>
-            <a:pPr algn="l">
-              <a:lnSpc>
-                <a:spcPct val="115000"/>
-              </a:lnSpc>
-            </a:pPr>
-            <a:r>
-              <a:rPr sz="1875" b="1">
-                <a:solidFill>
-                  <a:srgbClr val="0D2B5E"/>
-                </a:solidFill>
-                <a:latin typeface="Pretendard"/>
-                <a:ea typeface="Pretendard"/>
-                <a:cs typeface="Pretendard"/>
-              </a:rPr>
-              <a:t>json.loads(msg.value().decode("utf-8"))</a:t>
-            </a:r>
-          </a:p>
-        </p:txBody>
-      </p:sp>
-      <p:sp>
-        <p:nvSpPr>
-          <p:cNvPr id="34" name="Rounded Rectangle 33"/>
-          <p:cNvSpPr/>
-          <p:nvPr/>
-        </p:nvSpPr>
-        <p:spPr>
-          <a:xfrm>
-            <a:off x="9464040" y="6428014"/>
-            <a:ext cx="7680960" cy="519793"/>
-          </a:xfrm>
-          <a:prstGeom prst="roundRect">
-            <a:avLst>
-              <a:gd name="adj" fmla="val 7329"/>
-            </a:avLst>
-          </a:prstGeom>
-          <a:solidFill>
-            <a:srgbClr val="FAFBFD"/>
-          </a:solidFill>
-          <a:ln w="9525">
-            <a:solidFill>
-              <a:srgbClr val="DCE1E8"/>
-            </a:solidFill>
-          </a:ln>
-          <a:effectLst/>
-        </p:spPr>
-        <p:txBody>
-          <a:bodyPr rtlCol="0" anchor="ctr" wrap="square"/>
-          <a:lstStyle/>
-          <a:p>
-            <a:pPr algn="ctr"/>
-          </a:p>
-        </p:txBody>
-      </p:sp>
-      <p:sp>
-        <p:nvSpPr>
-          <p:cNvPr id="35" name="TextBox 34"/>
-          <p:cNvSpPr txBox="1"/>
-          <p:nvPr/>
-        </p:nvSpPr>
-        <p:spPr>
-          <a:xfrm>
-            <a:off x="9559290" y="6428014"/>
-            <a:ext cx="7490460" cy="519793"/>
-          </a:xfrm>
-          <a:prstGeom prst="rect">
-            <a:avLst/>
-          </a:prstGeom>
-          <a:noFill/>
-        </p:spPr>
-        <p:txBody>
-          <a:bodyPr wrap="square" lIns="0" rIns="0" tIns="0" bIns="0" anchor="ctr">
-            <a:spAutoFit/>
-          </a:bodyPr>
-          <a:lstStyle/>
-          <a:p>
-            <a:pPr algn="ctr">
-              <a:lnSpc>
-                <a:spcPct val="115000"/>
-              </a:lnSpc>
-            </a:pPr>
-            <a:r>
-              <a:rPr sz="1875" b="0">
-                <a:solidFill>
-                  <a:srgbClr val="3D3D3D"/>
-                </a:solidFill>
-                <a:latin typeface="Pretendard"/>
-                <a:ea typeface="Pretendard"/>
-                <a:cs typeface="Pretendard"/>
-              </a:rPr>
-              <a:t>JSON 역직렬화</a:t>
-            </a:r>
-          </a:p>
-        </p:txBody>
-      </p:sp>
-      <p:sp>
-        <p:nvSpPr>
-          <p:cNvPr id="36" name="Rounded Rectangle 35"/>
-          <p:cNvSpPr/>
-          <p:nvPr/>
-        </p:nvSpPr>
-        <p:spPr>
-          <a:xfrm>
-            <a:off x="1143000" y="7024007"/>
-            <a:ext cx="8282940" cy="519793"/>
-          </a:xfrm>
-          <a:prstGeom prst="roundRect">
-            <a:avLst>
-              <a:gd name="adj" fmla="val 7329"/>
-            </a:avLst>
-          </a:prstGeom>
-          <a:solidFill>
-            <a:srgbClr val="EDF3FD"/>
-          </a:solidFill>
-          <a:ln w="9525">
-            <a:solidFill>
-              <a:srgbClr val="BFD3F5"/>
-            </a:solidFill>
-          </a:ln>
-          <a:effectLst/>
-        </p:spPr>
-        <p:txBody>
-          <a:bodyPr rtlCol="0" anchor="ctr" wrap="square"/>
-          <a:lstStyle/>
-          <a:p>
-            <a:pPr algn="ctr"/>
-          </a:p>
-        </p:txBody>
-      </p:sp>
-      <p:sp>
-        <p:nvSpPr>
-          <p:cNvPr id="37" name="TextBox 36"/>
-          <p:cNvSpPr txBox="1"/>
-          <p:nvPr/>
-        </p:nvSpPr>
-        <p:spPr>
-          <a:xfrm>
-            <a:off x="1238250" y="7024007"/>
-            <a:ext cx="8092440" cy="519793"/>
-          </a:xfrm>
-          <a:prstGeom prst="rect">
-            <a:avLst/>
-          </a:prstGeom>
-          <a:noFill/>
-        </p:spPr>
-        <p:txBody>
-          <a:bodyPr wrap="square" lIns="0" rIns="0" tIns="0" bIns="0" anchor="ctr">
-            <a:spAutoFit/>
-          </a:bodyPr>
-          <a:lstStyle/>
-          <a:p>
-            <a:pPr algn="l">
-              <a:lnSpc>
-                <a:spcPct val="115000"/>
-              </a:lnSpc>
-            </a:pPr>
-            <a:r>
-              <a:rPr sz="1875" b="1">
-                <a:solidFill>
-                  <a:srgbClr val="0D2B5E"/>
-                </a:solidFill>
-                <a:latin typeface="Pretendard"/>
-                <a:ea typeface="Pretendard"/>
-                <a:cs typeface="Pretendard"/>
-              </a:rPr>
-              <a:t>finally: c.close()</a:t>
-            </a:r>
-          </a:p>
-        </p:txBody>
-      </p:sp>
-      <p:sp>
-        <p:nvSpPr>
-          <p:cNvPr id="38" name="Rounded Rectangle 37"/>
-          <p:cNvSpPr/>
-          <p:nvPr/>
-        </p:nvSpPr>
-        <p:spPr>
-          <a:xfrm>
-            <a:off x="9464040" y="7024007"/>
-            <a:ext cx="7680960" cy="519793"/>
-          </a:xfrm>
-          <a:prstGeom prst="roundRect">
-            <a:avLst>
-              <a:gd name="adj" fmla="val 7329"/>
-            </a:avLst>
-          </a:prstGeom>
-          <a:solidFill>
-            <a:srgbClr val="FAFBFD"/>
-          </a:solidFill>
-          <a:ln w="9525">
-            <a:solidFill>
-              <a:srgbClr val="DCE1E8"/>
-            </a:solidFill>
-          </a:ln>
-          <a:effectLst/>
-        </p:spPr>
-        <p:txBody>
-          <a:bodyPr rtlCol="0" anchor="ctr" wrap="square"/>
-          <a:lstStyle/>
-          <a:p>
-            <a:pPr algn="ctr"/>
-          </a:p>
-        </p:txBody>
-      </p:sp>
-      <p:sp>
-        <p:nvSpPr>
-          <p:cNvPr id="39" name="TextBox 38"/>
-          <p:cNvSpPr txBox="1"/>
-          <p:nvPr/>
-        </p:nvSpPr>
-        <p:spPr>
-          <a:xfrm>
-            <a:off x="9559290" y="7024007"/>
-            <a:ext cx="7490460" cy="519793"/>
-          </a:xfrm>
-          <a:prstGeom prst="rect">
-            <a:avLst/>
-          </a:prstGeom>
-          <a:noFill/>
-        </p:spPr>
-        <p:txBody>
-          <a:bodyPr wrap="square" lIns="0" rIns="0" tIns="0" bIns="0" anchor="ctr">
-            <a:spAutoFit/>
-          </a:bodyPr>
-          <a:lstStyle/>
-          <a:p>
-            <a:pPr algn="ctr">
-              <a:lnSpc>
-                <a:spcPct val="115000"/>
-              </a:lnSpc>
-            </a:pPr>
-            <a:r>
-              <a:rPr sz="1875" b="0">
-                <a:solidFill>
-                  <a:srgbClr val="3D3D3D"/>
-                </a:solidFill>
-                <a:latin typeface="Pretendard"/>
-                <a:ea typeface="Pretendard"/>
-                <a:cs typeface="Pretendard"/>
-              </a:rPr>
-              <a:t>그룹 정상 탈퇴 + 오프셋 정리</a:t>
-            </a:r>
-          </a:p>
-        </p:txBody>
-      </p:sp>
-      <p:sp>
-        <p:nvSpPr>
-          <p:cNvPr id="40" name="TextBox 39"/>
-          <p:cNvSpPr txBox="1"/>
-          <p:nvPr/>
-        </p:nvSpPr>
-        <p:spPr>
-          <a:xfrm>
-            <a:off x="1143000" y="7620000"/>
-            <a:ext cx="16002000" cy="342900"/>
-          </a:xfrm>
-          <a:prstGeom prst="rect">
-            <a:avLst/>
-          </a:prstGeom>
-          <a:noFill/>
-        </p:spPr>
-        <p:txBody>
-          <a:bodyPr wrap="square" lIns="0" rIns="0" tIns="0" bIns="0" anchor="t">
-            <a:spAutoFit/>
-          </a:bodyPr>
-          <a:lstStyle/>
-          <a:p>
-            <a:pPr algn="l">
-              <a:lnSpc>
                 <a:spcPct val="100000"/>
               </a:lnSpc>
             </a:pPr>
             <a:r>
-              <a:rPr sz="1875" b="1">
-                <a:solidFill>
-                  <a:srgbClr val="7D7D7D"/>
-                </a:solidFill>
-                <a:latin typeface="Pretendard"/>
-                <a:ea typeface="Pretendard"/>
-                <a:cs typeface="Pretendard"/>
-              </a:rPr>
-              <a:t>터미널 1 python consumer.py · 터미널 2 python producer.py — 주문이 실시간으로 찍히고 누적 금액이 늘어나면 성공</a:t>
-            </a:r>
-          </a:p>
-        </p:txBody>
-      </p:sp>
-      <p:sp>
-        <p:nvSpPr>
-          <p:cNvPr id="41" name="Rectangle 40"/>
+              <a:rPr sz="2250" b="1">
+                <a:solidFill>
+                  <a:srgbClr val="FFFFFF"/>
+                </a:solidFill>
+                <a:latin typeface="Pretendard"/>
+                <a:ea typeface="Pretendard"/>
+                <a:cs typeface="Pretendard"/>
+              </a:rPr>
+              <a:t>VS</a:t>
+            </a:r>
+          </a:p>
+        </p:txBody>
+      </p:sp>
+      <p:sp>
+        <p:nvSpPr>
+          <p:cNvPr id="28" name="Rectangle 27"/>
           <p:cNvSpPr/>
           <p:nvPr/>
         </p:nvSpPr>
@@ -14142,7 +15799,7 @@
       </p:sp>
       <p:sp>
         <p:nvSpPr>
-          <p:cNvPr id="42" name="TextBox 41"/>
+          <p:cNvPr id="29" name="TextBox 28"/>
           <p:cNvSpPr txBox="1"/>
           <p:nvPr/>
         </p:nvSpPr>
@@ -14183,7 +15840,7 @@
       </p:sp>
       <p:sp>
         <p:nvSpPr>
-          <p:cNvPr id="43" name="TextBox 42"/>
+          <p:cNvPr id="30" name="TextBox 29"/>
           <p:cNvSpPr txBox="1"/>
           <p:nvPr/>
         </p:nvSpPr>
@@ -14366,7 +16023,7 @@
                 <a:ea typeface="Pretendard"/>
                 <a:cs typeface="Pretendard"/>
               </a:rPr>
-              <a:t>5·6·7단계</a:t>
+              <a:t>4단계</a:t>
             </a:r>
           </a:p>
         </p:txBody>
@@ -14407,7 +16064,7 @@
                 <a:ea typeface="Pretendard"/>
                 <a:cs typeface="Pretendard"/>
               </a:rPr>
-              <a:t>이어읽기 · 처음부터 · 수동 커밋 · LAG</a:t>
+              <a:t>consumer.py 핵심 줄 — poll 루프와 고객별 누적</a:t>
             </a:r>
           </a:p>
         </p:txBody>
@@ -14444,18 +16101,235 @@
       </p:sp>
       <p:sp>
         <p:nvSpPr>
-          <p:cNvPr id="8" name="Rounded Rectangle 7"/>
-          <p:cNvSpPr/>
-          <p:nvPr/>
-        </p:nvSpPr>
-        <p:spPr>
-          <a:xfrm>
-            <a:off x="1143000" y="2933700"/>
-            <a:ext cx="11430000" cy="1095375"/>
+          <p:cNvPr id="8" name="Rectangle 7"/>
+          <p:cNvSpPr/>
+          <p:nvPr/>
+        </p:nvSpPr>
+        <p:spPr>
+          <a:xfrm>
+            <a:off x="1143000" y="2781300"/>
+            <a:ext cx="8282940" cy="590550"/>
+          </a:xfrm>
+          <a:prstGeom prst="rect">
+            <a:avLst/>
+          </a:prstGeom>
+          <a:solidFill>
+            <a:srgbClr val="0D2B5E"/>
+          </a:solidFill>
+          <a:ln>
+            <a:noFill/>
+          </a:ln>
+          <a:effectLst/>
+        </p:spPr>
+        <p:txBody>
+          <a:bodyPr rtlCol="0" anchor="ctr" wrap="square"/>
+          <a:lstStyle/>
+          <a:p>
+            <a:pPr algn="ctr"/>
+          </a:p>
+        </p:txBody>
+      </p:sp>
+      <p:sp>
+        <p:nvSpPr>
+          <p:cNvPr id="9" name="TextBox 8"/>
+          <p:cNvSpPr txBox="1"/>
+          <p:nvPr/>
+        </p:nvSpPr>
+        <p:spPr>
+          <a:xfrm>
+            <a:off x="1143000" y="2781300"/>
+            <a:ext cx="8282940" cy="590550"/>
+          </a:xfrm>
+          <a:prstGeom prst="rect">
+            <a:avLst/>
+          </a:prstGeom>
+          <a:noFill/>
+        </p:spPr>
+        <p:txBody>
+          <a:bodyPr wrap="square" lIns="0" rIns="0" tIns="0" bIns="0" anchor="ctr">
+            <a:spAutoFit/>
+          </a:bodyPr>
+          <a:lstStyle/>
+          <a:p>
+            <a:pPr algn="ctr">
+              <a:lnSpc>
+                <a:spcPct val="100000"/>
+              </a:lnSpc>
+            </a:pPr>
+            <a:r>
+              <a:rPr sz="2025" b="1">
+                <a:solidFill>
+                  <a:srgbClr val="FFFFFF"/>
+                </a:solidFill>
+                <a:latin typeface="Pretendard"/>
+                <a:ea typeface="Pretendard"/>
+                <a:cs typeface="Pretendard"/>
+              </a:rPr>
+              <a:t>줄</a:t>
+            </a:r>
+          </a:p>
+        </p:txBody>
+      </p:sp>
+      <p:sp>
+        <p:nvSpPr>
+          <p:cNvPr id="10" name="Rectangle 9"/>
+          <p:cNvSpPr/>
+          <p:nvPr/>
+        </p:nvSpPr>
+        <p:spPr>
+          <a:xfrm>
+            <a:off x="9464040" y="2781300"/>
+            <a:ext cx="7680960" cy="590550"/>
+          </a:xfrm>
+          <a:prstGeom prst="rect">
+            <a:avLst/>
+          </a:prstGeom>
+          <a:solidFill>
+            <a:srgbClr val="1E5BC6"/>
+          </a:solidFill>
+          <a:ln>
+            <a:noFill/>
+          </a:ln>
+          <a:effectLst/>
+        </p:spPr>
+        <p:txBody>
+          <a:bodyPr rtlCol="0" anchor="ctr" wrap="square"/>
+          <a:lstStyle/>
+          <a:p>
+            <a:pPr algn="ctr"/>
+          </a:p>
+        </p:txBody>
+      </p:sp>
+      <p:sp>
+        <p:nvSpPr>
+          <p:cNvPr id="11" name="TextBox 10"/>
+          <p:cNvSpPr txBox="1"/>
+          <p:nvPr/>
+        </p:nvSpPr>
+        <p:spPr>
+          <a:xfrm>
+            <a:off x="9464040" y="2781300"/>
+            <a:ext cx="7680960" cy="590550"/>
+          </a:xfrm>
+          <a:prstGeom prst="rect">
+            <a:avLst/>
+          </a:prstGeom>
+          <a:noFill/>
+        </p:spPr>
+        <p:txBody>
+          <a:bodyPr wrap="square" lIns="0" rIns="0" tIns="0" bIns="0" anchor="ctr">
+            <a:spAutoFit/>
+          </a:bodyPr>
+          <a:lstStyle/>
+          <a:p>
+            <a:pPr algn="ctr">
+              <a:lnSpc>
+                <a:spcPct val="100000"/>
+              </a:lnSpc>
+            </a:pPr>
+            <a:r>
+              <a:rPr sz="2025" b="1">
+                <a:solidFill>
+                  <a:srgbClr val="FFFFFF"/>
+                </a:solidFill>
+                <a:latin typeface="Pretendard"/>
+                <a:ea typeface="Pretendard"/>
+                <a:cs typeface="Pretendard"/>
+              </a:rPr>
+              <a:t>뜻</a:t>
+            </a:r>
+          </a:p>
+        </p:txBody>
+      </p:sp>
+      <p:sp>
+        <p:nvSpPr>
+          <p:cNvPr id="12" name="Rounded Rectangle 11"/>
+          <p:cNvSpPr/>
+          <p:nvPr/>
+        </p:nvSpPr>
+        <p:spPr>
+          <a:xfrm>
+            <a:off x="1143000" y="3448050"/>
+            <a:ext cx="8282940" cy="519793"/>
           </a:xfrm>
           <a:prstGeom prst="roundRect">
             <a:avLst>
-              <a:gd name="adj" fmla="val 4347"/>
+              <a:gd name="adj" fmla="val 7329"/>
+            </a:avLst>
+          </a:prstGeom>
+          <a:solidFill>
+            <a:srgbClr val="EDF3FD"/>
+          </a:solidFill>
+          <a:ln w="9525">
+            <a:solidFill>
+              <a:srgbClr val="BFD3F5"/>
+            </a:solidFill>
+          </a:ln>
+          <a:effectLst/>
+        </p:spPr>
+        <p:txBody>
+          <a:bodyPr rtlCol="0" anchor="ctr" wrap="square"/>
+          <a:lstStyle/>
+          <a:p>
+            <a:pPr algn="ctr"/>
+          </a:p>
+        </p:txBody>
+      </p:sp>
+      <p:sp>
+        <p:nvSpPr>
+          <p:cNvPr id="13" name="TextBox 12"/>
+          <p:cNvSpPr txBox="1"/>
+          <p:nvPr/>
+        </p:nvSpPr>
+        <p:spPr>
+          <a:xfrm>
+            <a:off x="1238250" y="3448050"/>
+            <a:ext cx="8092440" cy="519793"/>
+          </a:xfrm>
+          <a:prstGeom prst="rect">
+            <a:avLst/>
+          </a:prstGeom>
+          <a:noFill/>
+        </p:spPr>
+        <p:txBody>
+          <a:bodyPr wrap="square" lIns="0" rIns="0" tIns="0" bIns="0" anchor="ctr">
+            <a:spAutoFit/>
+          </a:bodyPr>
+          <a:lstStyle/>
+          <a:p>
+            <a:pPr algn="l">
+              <a:lnSpc>
+                <a:spcPct val="115000"/>
+              </a:lnSpc>
+            </a:pPr>
+            <a:r>
+              <a:rPr sz="1875" b="1">
+                <a:solidFill>
+                  <a:srgbClr val="0D2B5E"/>
+                </a:solidFill>
+                <a:latin typeface="Pretendard"/>
+                <a:ea typeface="Pretendard"/>
+                <a:cs typeface="Pretendard"/>
+              </a:rPr>
+              <a:t>"group.id": "order-agg"</a:t>
+            </a:r>
+          </a:p>
+        </p:txBody>
+      </p:sp>
+      <p:sp>
+        <p:nvSpPr>
+          <p:cNvPr id="14" name="Rounded Rectangle 13"/>
+          <p:cNvSpPr/>
+          <p:nvPr/>
+        </p:nvSpPr>
+        <p:spPr>
+          <a:xfrm>
+            <a:off x="9464040" y="3448050"/>
+            <a:ext cx="7680960" cy="519793"/>
+          </a:xfrm>
+          <a:prstGeom prst="roundRect">
+            <a:avLst>
+              <a:gd name="adj" fmla="val 7329"/>
             </a:avLst>
           </a:prstGeom>
           <a:solidFill>
@@ -14478,145 +16352,33 @@
       </p:sp>
       <p:sp>
         <p:nvSpPr>
-          <p:cNvPr id="9" name="Oval 8"/>
-          <p:cNvSpPr/>
-          <p:nvPr/>
-        </p:nvSpPr>
-        <p:spPr>
-          <a:xfrm>
-            <a:off x="1447800" y="3181350"/>
-            <a:ext cx="590550" cy="590550"/>
-          </a:xfrm>
-          <a:prstGeom prst="ellipse">
-            <a:avLst/>
-          </a:prstGeom>
-          <a:solidFill>
-            <a:srgbClr val="0D2B5E"/>
-          </a:solidFill>
-          <a:ln>
-            <a:noFill/>
-          </a:ln>
-          <a:effectLst/>
-        </p:spPr>
-        <p:txBody>
-          <a:bodyPr rtlCol="0" anchor="ctr" wrap="square"/>
-          <a:lstStyle/>
-          <a:p>
-            <a:pPr algn="ctr"/>
-          </a:p>
-        </p:txBody>
-      </p:sp>
-      <p:sp>
-        <p:nvSpPr>
-          <p:cNvPr id="10" name="TextBox 9"/>
-          <p:cNvSpPr txBox="1"/>
-          <p:nvPr/>
-        </p:nvSpPr>
-        <p:spPr>
-          <a:xfrm>
-            <a:off x="1447800" y="3333750"/>
-            <a:ext cx="590550" cy="323850"/>
-          </a:xfrm>
-          <a:prstGeom prst="rect">
-            <a:avLst/>
-          </a:prstGeom>
-          <a:noFill/>
-        </p:spPr>
-        <p:txBody>
-          <a:bodyPr wrap="square" lIns="0" rIns="0" tIns="0" bIns="0" anchor="t">
+          <p:cNvPr id="15" name="TextBox 14"/>
+          <p:cNvSpPr txBox="1"/>
+          <p:nvPr/>
+        </p:nvSpPr>
+        <p:spPr>
+          <a:xfrm>
+            <a:off x="9559290" y="3448050"/>
+            <a:ext cx="7490460" cy="519793"/>
+          </a:xfrm>
+          <a:prstGeom prst="rect">
+            <a:avLst/>
+          </a:prstGeom>
+          <a:noFill/>
+        </p:spPr>
+        <p:txBody>
+          <a:bodyPr wrap="square" lIns="0" rIns="0" tIns="0" bIns="0" anchor="ctr">
             <a:spAutoFit/>
           </a:bodyPr>
           <a:lstStyle/>
           <a:p>
             <a:pPr algn="ctr">
               <a:lnSpc>
-                <a:spcPct val="100000"/>
-              </a:lnSpc>
-            </a:pPr>
-            <a:r>
-              <a:rPr sz="2250" b="1">
-                <a:solidFill>
-                  <a:srgbClr val="FFFFFF"/>
-                </a:solidFill>
-                <a:latin typeface="Pretendard"/>
-                <a:ea typeface="Pretendard"/>
-                <a:cs typeface="Pretendard"/>
-              </a:rPr>
-              <a:t>1</a:t>
-            </a:r>
-          </a:p>
-        </p:txBody>
-      </p:sp>
-      <p:sp>
-        <p:nvSpPr>
-          <p:cNvPr id="11" name="TextBox 10"/>
-          <p:cNvSpPr txBox="1"/>
-          <p:nvPr/>
-        </p:nvSpPr>
-        <p:spPr>
-          <a:xfrm>
-            <a:off x="2324100" y="3143250"/>
-            <a:ext cx="9906000" cy="400050"/>
-          </a:xfrm>
-          <a:prstGeom prst="rect">
-            <a:avLst/>
-          </a:prstGeom>
-          <a:noFill/>
-        </p:spPr>
-        <p:txBody>
-          <a:bodyPr wrap="square" lIns="0" rIns="0" tIns="0" bIns="0" anchor="t">
-            <a:spAutoFit/>
-          </a:bodyPr>
-          <a:lstStyle/>
-          <a:p>
-            <a:pPr algn="l">
-              <a:lnSpc>
-                <a:spcPct val="110000"/>
-              </a:lnSpc>
-            </a:pPr>
-            <a:r>
-              <a:rPr sz="2475" b="1">
-                <a:solidFill>
-                  <a:srgbClr val="0D2B5E"/>
-                </a:solidFill>
-                <a:latin typeface="Pretendard"/>
-                <a:ea typeface="Pretendard"/>
-                <a:cs typeface="Pretendard"/>
-              </a:rPr>
-              <a:t>같은 그룹으로 다시 켜면 — 이어읽기</a:t>
-            </a:r>
-          </a:p>
-        </p:txBody>
-      </p:sp>
-      <p:sp>
-        <p:nvSpPr>
-          <p:cNvPr id="12" name="TextBox 11"/>
-          <p:cNvSpPr txBox="1"/>
-          <p:nvPr/>
-        </p:nvSpPr>
-        <p:spPr>
-          <a:xfrm>
-            <a:off x="2324100" y="3543300"/>
-            <a:ext cx="9906000" cy="361950"/>
-          </a:xfrm>
-          <a:prstGeom prst="rect">
-            <a:avLst/>
-          </a:prstGeom>
-          <a:noFill/>
-        </p:spPr>
-        <p:txBody>
-          <a:bodyPr wrap="square" lIns="0" rIns="0" tIns="0" bIns="0" anchor="t">
-            <a:spAutoFit/>
-          </a:bodyPr>
-          <a:lstStyle/>
-          <a:p>
-            <a:pPr algn="l">
-              <a:lnSpc>
-                <a:spcPct val="120000"/>
-              </a:lnSpc>
-            </a:pPr>
-            <a:r>
-              <a:rPr sz="2025" b="0">
+                <a:spcPct val="115000"/>
+              </a:lnSpc>
+            </a:pPr>
+            <a:r>
+              <a:rPr sz="1875" b="0">
                 <a:solidFill>
                   <a:srgbClr val="3D3D3D"/>
                 </a:solidFill>
@@ -14624,25 +16386,100 @@
                 <a:ea typeface="Pretendard"/>
                 <a:cs typeface="Pretendard"/>
               </a:rPr>
-              <a:t>오프셋이 커밋되어 있어 이미 집계한 메시지를 다시 읽지 않는다</a:t>
-            </a:r>
-          </a:p>
-        </p:txBody>
-      </p:sp>
-      <p:sp>
-        <p:nvSpPr>
-          <p:cNvPr id="13" name="Rounded Rectangle 12"/>
-          <p:cNvSpPr/>
-          <p:nvPr/>
-        </p:nvSpPr>
-        <p:spPr>
-          <a:xfrm>
-            <a:off x="1143000" y="4200525"/>
-            <a:ext cx="11430000" cy="1095375"/>
+              <a:t>이 Consumer 가 속한 그룹</a:t>
+            </a:r>
+          </a:p>
+        </p:txBody>
+      </p:sp>
+      <p:sp>
+        <p:nvSpPr>
+          <p:cNvPr id="16" name="Rounded Rectangle 15"/>
+          <p:cNvSpPr/>
+          <p:nvPr/>
+        </p:nvSpPr>
+        <p:spPr>
+          <a:xfrm>
+            <a:off x="1143000" y="4044043"/>
+            <a:ext cx="8282940" cy="519793"/>
           </a:xfrm>
           <a:prstGeom prst="roundRect">
             <a:avLst>
-              <a:gd name="adj" fmla="val 4347"/>
+              <a:gd name="adj" fmla="val 7329"/>
+            </a:avLst>
+          </a:prstGeom>
+          <a:solidFill>
+            <a:srgbClr val="EDF3FD"/>
+          </a:solidFill>
+          <a:ln w="9525">
+            <a:solidFill>
+              <a:srgbClr val="BFD3F5"/>
+            </a:solidFill>
+          </a:ln>
+          <a:effectLst/>
+        </p:spPr>
+        <p:txBody>
+          <a:bodyPr rtlCol="0" anchor="ctr" wrap="square"/>
+          <a:lstStyle/>
+          <a:p>
+            <a:pPr algn="ctr"/>
+          </a:p>
+        </p:txBody>
+      </p:sp>
+      <p:sp>
+        <p:nvSpPr>
+          <p:cNvPr id="17" name="TextBox 16"/>
+          <p:cNvSpPr txBox="1"/>
+          <p:nvPr/>
+        </p:nvSpPr>
+        <p:spPr>
+          <a:xfrm>
+            <a:off x="1238250" y="4044043"/>
+            <a:ext cx="8092440" cy="519793"/>
+          </a:xfrm>
+          <a:prstGeom prst="rect">
+            <a:avLst/>
+          </a:prstGeom>
+          <a:noFill/>
+        </p:spPr>
+        <p:txBody>
+          <a:bodyPr wrap="square" lIns="0" rIns="0" tIns="0" bIns="0" anchor="ctr">
+            <a:spAutoFit/>
+          </a:bodyPr>
+          <a:lstStyle/>
+          <a:p>
+            <a:pPr algn="l">
+              <a:lnSpc>
+                <a:spcPct val="115000"/>
+              </a:lnSpc>
+            </a:pPr>
+            <a:r>
+              <a:rPr sz="1875" b="1">
+                <a:solidFill>
+                  <a:srgbClr val="0D2B5E"/>
+                </a:solidFill>
+                <a:latin typeface="Pretendard"/>
+                <a:ea typeface="Pretendard"/>
+                <a:cs typeface="Pretendard"/>
+              </a:rPr>
+              <a:t>"auto.offset.reset": "earliest"</a:t>
+            </a:r>
+          </a:p>
+        </p:txBody>
+      </p:sp>
+      <p:sp>
+        <p:nvSpPr>
+          <p:cNvPr id="18" name="Rounded Rectangle 17"/>
+          <p:cNvSpPr/>
+          <p:nvPr/>
+        </p:nvSpPr>
+        <p:spPr>
+          <a:xfrm>
+            <a:off x="9464040" y="4044043"/>
+            <a:ext cx="7680960" cy="519793"/>
+          </a:xfrm>
+          <a:prstGeom prst="roundRect">
+            <a:avLst>
+              <a:gd name="adj" fmla="val 7329"/>
             </a:avLst>
           </a:prstGeom>
           <a:solidFill>
@@ -14665,145 +16502,33 @@
       </p:sp>
       <p:sp>
         <p:nvSpPr>
-          <p:cNvPr id="14" name="Oval 13"/>
-          <p:cNvSpPr/>
-          <p:nvPr/>
-        </p:nvSpPr>
-        <p:spPr>
-          <a:xfrm>
-            <a:off x="1447800" y="4448175"/>
-            <a:ext cx="590550" cy="590550"/>
-          </a:xfrm>
-          <a:prstGeom prst="ellipse">
-            <a:avLst/>
-          </a:prstGeom>
-          <a:solidFill>
-            <a:srgbClr val="0D2B5E"/>
-          </a:solidFill>
-          <a:ln>
-            <a:noFill/>
-          </a:ln>
-          <a:effectLst/>
-        </p:spPr>
-        <p:txBody>
-          <a:bodyPr rtlCol="0" anchor="ctr" wrap="square"/>
-          <a:lstStyle/>
-          <a:p>
-            <a:pPr algn="ctr"/>
-          </a:p>
-        </p:txBody>
-      </p:sp>
-      <p:sp>
-        <p:nvSpPr>
-          <p:cNvPr id="15" name="TextBox 14"/>
-          <p:cNvSpPr txBox="1"/>
-          <p:nvPr/>
-        </p:nvSpPr>
-        <p:spPr>
-          <a:xfrm>
-            <a:off x="1447800" y="4600575"/>
-            <a:ext cx="590550" cy="323850"/>
-          </a:xfrm>
-          <a:prstGeom prst="rect">
-            <a:avLst/>
-          </a:prstGeom>
-          <a:noFill/>
-        </p:spPr>
-        <p:txBody>
-          <a:bodyPr wrap="square" lIns="0" rIns="0" tIns="0" bIns="0" anchor="t">
+          <p:cNvPr id="19" name="TextBox 18"/>
+          <p:cNvSpPr txBox="1"/>
+          <p:nvPr/>
+        </p:nvSpPr>
+        <p:spPr>
+          <a:xfrm>
+            <a:off x="9559290" y="4044043"/>
+            <a:ext cx="7490460" cy="519793"/>
+          </a:xfrm>
+          <a:prstGeom prst="rect">
+            <a:avLst/>
+          </a:prstGeom>
+          <a:noFill/>
+        </p:spPr>
+        <p:txBody>
+          <a:bodyPr wrap="square" lIns="0" rIns="0" tIns="0" bIns="0" anchor="ctr">
             <a:spAutoFit/>
           </a:bodyPr>
           <a:lstStyle/>
           <a:p>
             <a:pPr algn="ctr">
               <a:lnSpc>
-                <a:spcPct val="100000"/>
-              </a:lnSpc>
-            </a:pPr>
-            <a:r>
-              <a:rPr sz="2250" b="1">
-                <a:solidFill>
-                  <a:srgbClr val="FFFFFF"/>
-                </a:solidFill>
-                <a:latin typeface="Pretendard"/>
-                <a:ea typeface="Pretendard"/>
-                <a:cs typeface="Pretendard"/>
-              </a:rPr>
-              <a:t>2</a:t>
-            </a:r>
-          </a:p>
-        </p:txBody>
-      </p:sp>
-      <p:sp>
-        <p:nvSpPr>
-          <p:cNvPr id="16" name="TextBox 15"/>
-          <p:cNvSpPr txBox="1"/>
-          <p:nvPr/>
-        </p:nvSpPr>
-        <p:spPr>
-          <a:xfrm>
-            <a:off x="2324100" y="4410075"/>
-            <a:ext cx="9906000" cy="400050"/>
-          </a:xfrm>
-          <a:prstGeom prst="rect">
-            <a:avLst/>
-          </a:prstGeom>
-          <a:noFill/>
-        </p:spPr>
-        <p:txBody>
-          <a:bodyPr wrap="square" lIns="0" rIns="0" tIns="0" bIns="0" anchor="t">
-            <a:spAutoFit/>
-          </a:bodyPr>
-          <a:lstStyle/>
-          <a:p>
-            <a:pPr algn="l">
-              <a:lnSpc>
-                <a:spcPct val="110000"/>
-              </a:lnSpc>
-            </a:pPr>
-            <a:r>
-              <a:rPr sz="2475" b="1">
-                <a:solidFill>
-                  <a:srgbClr val="0D2B5E"/>
-                </a:solidFill>
-                <a:latin typeface="Pretendard"/>
-                <a:ea typeface="Pretendard"/>
-                <a:cs typeface="Pretendard"/>
-              </a:rPr>
-              <a:t>group.id 를 order-agg-2 로 — 처음부터</a:t>
-            </a:r>
-          </a:p>
-        </p:txBody>
-      </p:sp>
-      <p:sp>
-        <p:nvSpPr>
-          <p:cNvPr id="17" name="TextBox 16"/>
-          <p:cNvSpPr txBox="1"/>
-          <p:nvPr/>
-        </p:nvSpPr>
-        <p:spPr>
-          <a:xfrm>
-            <a:off x="2324100" y="4810125"/>
-            <a:ext cx="9906000" cy="361950"/>
-          </a:xfrm>
-          <a:prstGeom prst="rect">
-            <a:avLst/>
-          </a:prstGeom>
-          <a:noFill/>
-        </p:spPr>
-        <p:txBody>
-          <a:bodyPr wrap="square" lIns="0" rIns="0" tIns="0" bIns="0" anchor="t">
-            <a:spAutoFit/>
-          </a:bodyPr>
-          <a:lstStyle/>
-          <a:p>
-            <a:pPr algn="l">
-              <a:lnSpc>
-                <a:spcPct val="120000"/>
-              </a:lnSpc>
-            </a:pPr>
-            <a:r>
-              <a:rPr sz="2025" b="0">
+                <a:spcPct val="115000"/>
+              </a:lnSpc>
+            </a:pPr>
+            <a:r>
+              <a:rPr sz="1875" b="0">
                 <a:solidFill>
                   <a:srgbClr val="3D3D3D"/>
                 </a:solidFill>
@@ -14811,25 +16536,100 @@
                 <a:ea typeface="Pretendard"/>
                 <a:cs typeface="Pretendard"/>
               </a:rPr>
-              <a:t>earliest 가 새 그룹에만 적용된다는 이론을 확인</a:t>
-            </a:r>
-          </a:p>
-        </p:txBody>
-      </p:sp>
-      <p:sp>
-        <p:nvSpPr>
-          <p:cNvPr id="18" name="Rounded Rectangle 17"/>
-          <p:cNvSpPr/>
-          <p:nvPr/>
-        </p:nvSpPr>
-        <p:spPr>
-          <a:xfrm>
-            <a:off x="1143000" y="5467350"/>
-            <a:ext cx="11430000" cy="1095375"/>
+              <a:t>새 그룹은 처음부터</a:t>
+            </a:r>
+          </a:p>
+        </p:txBody>
+      </p:sp>
+      <p:sp>
+        <p:nvSpPr>
+          <p:cNvPr id="20" name="Rounded Rectangle 19"/>
+          <p:cNvSpPr/>
+          <p:nvPr/>
+        </p:nvSpPr>
+        <p:spPr>
+          <a:xfrm>
+            <a:off x="1143000" y="4640036"/>
+            <a:ext cx="8282940" cy="519793"/>
           </a:xfrm>
           <a:prstGeom prst="roundRect">
             <a:avLst>
-              <a:gd name="adj" fmla="val 4347"/>
+              <a:gd name="adj" fmla="val 7329"/>
+            </a:avLst>
+          </a:prstGeom>
+          <a:solidFill>
+            <a:srgbClr val="EDF3FD"/>
+          </a:solidFill>
+          <a:ln w="9525">
+            <a:solidFill>
+              <a:srgbClr val="BFD3F5"/>
+            </a:solidFill>
+          </a:ln>
+          <a:effectLst/>
+        </p:spPr>
+        <p:txBody>
+          <a:bodyPr rtlCol="0" anchor="ctr" wrap="square"/>
+          <a:lstStyle/>
+          <a:p>
+            <a:pPr algn="ctr"/>
+          </a:p>
+        </p:txBody>
+      </p:sp>
+      <p:sp>
+        <p:nvSpPr>
+          <p:cNvPr id="21" name="TextBox 20"/>
+          <p:cNvSpPr txBox="1"/>
+          <p:nvPr/>
+        </p:nvSpPr>
+        <p:spPr>
+          <a:xfrm>
+            <a:off x="1238250" y="4640036"/>
+            <a:ext cx="8092440" cy="519793"/>
+          </a:xfrm>
+          <a:prstGeom prst="rect">
+            <a:avLst/>
+          </a:prstGeom>
+          <a:noFill/>
+        </p:spPr>
+        <p:txBody>
+          <a:bodyPr wrap="square" lIns="0" rIns="0" tIns="0" bIns="0" anchor="ctr">
+            <a:spAutoFit/>
+          </a:bodyPr>
+          <a:lstStyle/>
+          <a:p>
+            <a:pPr algn="l">
+              <a:lnSpc>
+                <a:spcPct val="115000"/>
+              </a:lnSpc>
+            </a:pPr>
+            <a:r>
+              <a:rPr sz="1875" b="1">
+                <a:solidFill>
+                  <a:srgbClr val="0D2B5E"/>
+                </a:solidFill>
+                <a:latin typeface="Pretendard"/>
+                <a:ea typeface="Pretendard"/>
+                <a:cs typeface="Pretendard"/>
+              </a:rPr>
+              <a:t>c.subscribe(["orders"])</a:t>
+            </a:r>
+          </a:p>
+        </p:txBody>
+      </p:sp>
+      <p:sp>
+        <p:nvSpPr>
+          <p:cNvPr id="22" name="Rounded Rectangle 21"/>
+          <p:cNvSpPr/>
+          <p:nvPr/>
+        </p:nvSpPr>
+        <p:spPr>
+          <a:xfrm>
+            <a:off x="9464040" y="4640036"/>
+            <a:ext cx="7680960" cy="519793"/>
+          </a:xfrm>
+          <a:prstGeom prst="roundRect">
+            <a:avLst>
+              <a:gd name="adj" fmla="val 7329"/>
             </a:avLst>
           </a:prstGeom>
           <a:solidFill>
@@ -14852,145 +16652,33 @@
       </p:sp>
       <p:sp>
         <p:nvSpPr>
-          <p:cNvPr id="19" name="Oval 18"/>
-          <p:cNvSpPr/>
-          <p:nvPr/>
-        </p:nvSpPr>
-        <p:spPr>
-          <a:xfrm>
-            <a:off x="1447800" y="5715000"/>
-            <a:ext cx="590550" cy="590550"/>
-          </a:xfrm>
-          <a:prstGeom prst="ellipse">
-            <a:avLst/>
-          </a:prstGeom>
-          <a:solidFill>
-            <a:srgbClr val="0D2B5E"/>
-          </a:solidFill>
-          <a:ln>
-            <a:noFill/>
-          </a:ln>
-          <a:effectLst/>
-        </p:spPr>
-        <p:txBody>
-          <a:bodyPr rtlCol="0" anchor="ctr" wrap="square"/>
-          <a:lstStyle/>
-          <a:p>
-            <a:pPr algn="ctr"/>
-          </a:p>
-        </p:txBody>
-      </p:sp>
-      <p:sp>
-        <p:nvSpPr>
-          <p:cNvPr id="20" name="TextBox 19"/>
-          <p:cNvSpPr txBox="1"/>
-          <p:nvPr/>
-        </p:nvSpPr>
-        <p:spPr>
-          <a:xfrm>
-            <a:off x="1447800" y="5867400"/>
-            <a:ext cx="590550" cy="323850"/>
-          </a:xfrm>
-          <a:prstGeom prst="rect">
-            <a:avLst/>
-          </a:prstGeom>
-          <a:noFill/>
-        </p:spPr>
-        <p:txBody>
-          <a:bodyPr wrap="square" lIns="0" rIns="0" tIns="0" bIns="0" anchor="t">
+          <p:cNvPr id="23" name="TextBox 22"/>
+          <p:cNvSpPr txBox="1"/>
+          <p:nvPr/>
+        </p:nvSpPr>
+        <p:spPr>
+          <a:xfrm>
+            <a:off x="9559290" y="4640036"/>
+            <a:ext cx="7490460" cy="519793"/>
+          </a:xfrm>
+          <a:prstGeom prst="rect">
+            <a:avLst/>
+          </a:prstGeom>
+          <a:noFill/>
+        </p:spPr>
+        <p:txBody>
+          <a:bodyPr wrap="square" lIns="0" rIns="0" tIns="0" bIns="0" anchor="ctr">
             <a:spAutoFit/>
           </a:bodyPr>
           <a:lstStyle/>
           <a:p>
             <a:pPr algn="ctr">
               <a:lnSpc>
-                <a:spcPct val="100000"/>
-              </a:lnSpc>
-            </a:pPr>
-            <a:r>
-              <a:rPr sz="2250" b="1">
-                <a:solidFill>
-                  <a:srgbClr val="FFFFFF"/>
-                </a:solidFill>
-                <a:latin typeface="Pretendard"/>
-                <a:ea typeface="Pretendard"/>
-                <a:cs typeface="Pretendard"/>
-              </a:rPr>
-              <a:t>3</a:t>
-            </a:r>
-          </a:p>
-        </p:txBody>
-      </p:sp>
-      <p:sp>
-        <p:nvSpPr>
-          <p:cNvPr id="21" name="TextBox 20"/>
-          <p:cNvSpPr txBox="1"/>
-          <p:nvPr/>
-        </p:nvSpPr>
-        <p:spPr>
-          <a:xfrm>
-            <a:off x="2324100" y="5676900"/>
-            <a:ext cx="9906000" cy="400050"/>
-          </a:xfrm>
-          <a:prstGeom prst="rect">
-            <a:avLst/>
-          </a:prstGeom>
-          <a:noFill/>
-        </p:spPr>
-        <p:txBody>
-          <a:bodyPr wrap="square" lIns="0" rIns="0" tIns="0" bIns="0" anchor="t">
-            <a:spAutoFit/>
-          </a:bodyPr>
-          <a:lstStyle/>
-          <a:p>
-            <a:pPr algn="l">
-              <a:lnSpc>
-                <a:spcPct val="110000"/>
-              </a:lnSpc>
-            </a:pPr>
-            <a:r>
-              <a:rPr sz="2475" b="1">
-                <a:solidFill>
-                  <a:srgbClr val="0D2B5E"/>
-                </a:solidFill>
-                <a:latin typeface="Pretendard"/>
-                <a:ea typeface="Pretendard"/>
-                <a:cs typeface="Pretendard"/>
-              </a:rPr>
-              <a:t>enable.auto.commit False + c.commit(msg)</a:t>
-            </a:r>
-          </a:p>
-        </p:txBody>
-      </p:sp>
-      <p:sp>
-        <p:nvSpPr>
-          <p:cNvPr id="22" name="TextBox 21"/>
-          <p:cNvSpPr txBox="1"/>
-          <p:nvPr/>
-        </p:nvSpPr>
-        <p:spPr>
-          <a:xfrm>
-            <a:off x="2324100" y="6076950"/>
-            <a:ext cx="9906000" cy="361950"/>
-          </a:xfrm>
-          <a:prstGeom prst="rect">
-            <a:avLst/>
-          </a:prstGeom>
-          <a:noFill/>
-        </p:spPr>
-        <p:txBody>
-          <a:bodyPr wrap="square" lIns="0" rIns="0" tIns="0" bIns="0" anchor="t">
-            <a:spAutoFit/>
-          </a:bodyPr>
-          <a:lstStyle/>
-          <a:p>
-            <a:pPr algn="l">
-              <a:lnSpc>
-                <a:spcPct val="120000"/>
-              </a:lnSpc>
-            </a:pPr>
-            <a:r>
-              <a:rPr sz="2025" b="0">
+                <a:spcPct val="115000"/>
+              </a:lnSpc>
+            </a:pPr>
+            <a:r>
+              <a:rPr sz="1875" b="0">
                 <a:solidFill>
                   <a:srgbClr val="3D3D3D"/>
                 </a:solidFill>
@@ -14998,25 +16686,25 @@
                 <a:ea typeface="Pretendard"/>
                 <a:cs typeface="Pretendard"/>
               </a:rPr>
-              <a:t>amount 가 5의 배수면 예외 — 실패한 메시지는 커밋되지 않아 재시작 때 다시 읽는다</a:t>
-            </a:r>
-          </a:p>
-        </p:txBody>
-      </p:sp>
-      <p:sp>
-        <p:nvSpPr>
-          <p:cNvPr id="23" name="Rounded Rectangle 22"/>
-          <p:cNvSpPr/>
-          <p:nvPr/>
-        </p:nvSpPr>
-        <p:spPr>
-          <a:xfrm>
-            <a:off x="13144500" y="2933700"/>
-            <a:ext cx="4000500" cy="3629025"/>
+              <a:t>토픽 구독</a:t>
+            </a:r>
+          </a:p>
+        </p:txBody>
+      </p:sp>
+      <p:sp>
+        <p:nvSpPr>
+          <p:cNvPr id="24" name="Rounded Rectangle 23"/>
+          <p:cNvSpPr/>
+          <p:nvPr/>
+        </p:nvSpPr>
+        <p:spPr>
+          <a:xfrm>
+            <a:off x="1143000" y="5236029"/>
+            <a:ext cx="8282940" cy="519793"/>
           </a:xfrm>
           <a:prstGeom prst="roundRect">
             <a:avLst>
-              <a:gd name="adj" fmla="val 1312"/>
+              <a:gd name="adj" fmla="val 7329"/>
             </a:avLst>
           </a:prstGeom>
           <a:solidFill>
@@ -15039,14 +16727,580 @@
       </p:sp>
       <p:sp>
         <p:nvSpPr>
-          <p:cNvPr id="24" name="TextBox 23"/>
-          <p:cNvSpPr txBox="1"/>
-          <p:nvPr/>
-        </p:nvSpPr>
-        <p:spPr>
-          <a:xfrm>
-            <a:off x="13487400" y="3929062"/>
-            <a:ext cx="3314700" cy="304800"/>
+          <p:cNvPr id="25" name="TextBox 24"/>
+          <p:cNvSpPr txBox="1"/>
+          <p:nvPr/>
+        </p:nvSpPr>
+        <p:spPr>
+          <a:xfrm>
+            <a:off x="1238250" y="5236029"/>
+            <a:ext cx="8092440" cy="519793"/>
+          </a:xfrm>
+          <a:prstGeom prst="rect">
+            <a:avLst/>
+          </a:prstGeom>
+          <a:noFill/>
+        </p:spPr>
+        <p:txBody>
+          <a:bodyPr wrap="square" lIns="0" rIns="0" tIns="0" bIns="0" anchor="ctr">
+            <a:spAutoFit/>
+          </a:bodyPr>
+          <a:lstStyle/>
+          <a:p>
+            <a:pPr algn="l">
+              <a:lnSpc>
+                <a:spcPct val="115000"/>
+              </a:lnSpc>
+            </a:pPr>
+            <a:r>
+              <a:rPr sz="1875" b="1">
+                <a:solidFill>
+                  <a:srgbClr val="0D2B5E"/>
+                </a:solidFill>
+                <a:latin typeface="Pretendard"/>
+                <a:ea typeface="Pretendard"/>
+                <a:cs typeface="Pretendard"/>
+              </a:rPr>
+              <a:t>msg = c.poll(1.0)</a:t>
+            </a:r>
+          </a:p>
+        </p:txBody>
+      </p:sp>
+      <p:sp>
+        <p:nvSpPr>
+          <p:cNvPr id="26" name="Rounded Rectangle 25"/>
+          <p:cNvSpPr/>
+          <p:nvPr/>
+        </p:nvSpPr>
+        <p:spPr>
+          <a:xfrm>
+            <a:off x="9464040" y="5236029"/>
+            <a:ext cx="7680960" cy="519793"/>
+          </a:xfrm>
+          <a:prstGeom prst="roundRect">
+            <a:avLst>
+              <a:gd name="adj" fmla="val 7329"/>
+            </a:avLst>
+          </a:prstGeom>
+          <a:solidFill>
+            <a:srgbClr val="FAFBFD"/>
+          </a:solidFill>
+          <a:ln w="9525">
+            <a:solidFill>
+              <a:srgbClr val="DCE1E8"/>
+            </a:solidFill>
+          </a:ln>
+          <a:effectLst/>
+        </p:spPr>
+        <p:txBody>
+          <a:bodyPr rtlCol="0" anchor="ctr" wrap="square"/>
+          <a:lstStyle/>
+          <a:p>
+            <a:pPr algn="ctr"/>
+          </a:p>
+        </p:txBody>
+      </p:sp>
+      <p:sp>
+        <p:nvSpPr>
+          <p:cNvPr id="27" name="TextBox 26"/>
+          <p:cNvSpPr txBox="1"/>
+          <p:nvPr/>
+        </p:nvSpPr>
+        <p:spPr>
+          <a:xfrm>
+            <a:off x="9559290" y="5236029"/>
+            <a:ext cx="7490460" cy="519793"/>
+          </a:xfrm>
+          <a:prstGeom prst="rect">
+            <a:avLst/>
+          </a:prstGeom>
+          <a:noFill/>
+        </p:spPr>
+        <p:txBody>
+          <a:bodyPr wrap="square" lIns="0" rIns="0" tIns="0" bIns="0" anchor="ctr">
+            <a:spAutoFit/>
+          </a:bodyPr>
+          <a:lstStyle/>
+          <a:p>
+            <a:pPr algn="ctr">
+              <a:lnSpc>
+                <a:spcPct val="115000"/>
+              </a:lnSpc>
+            </a:pPr>
+            <a:r>
+              <a:rPr sz="1875" b="0">
+                <a:solidFill>
+                  <a:srgbClr val="3D3D3D"/>
+                </a:solidFill>
+                <a:latin typeface="Pretendard"/>
+                <a:ea typeface="Pretendard"/>
+                <a:cs typeface="Pretendard"/>
+              </a:rPr>
+              <a:t>없으면 1초 기다렸다 None</a:t>
+            </a:r>
+          </a:p>
+        </p:txBody>
+      </p:sp>
+      <p:sp>
+        <p:nvSpPr>
+          <p:cNvPr id="28" name="Rounded Rectangle 27"/>
+          <p:cNvSpPr/>
+          <p:nvPr/>
+        </p:nvSpPr>
+        <p:spPr>
+          <a:xfrm>
+            <a:off x="1143000" y="5832021"/>
+            <a:ext cx="8282940" cy="519793"/>
+          </a:xfrm>
+          <a:prstGeom prst="roundRect">
+            <a:avLst>
+              <a:gd name="adj" fmla="val 7329"/>
+            </a:avLst>
+          </a:prstGeom>
+          <a:solidFill>
+            <a:srgbClr val="EDF3FD"/>
+          </a:solidFill>
+          <a:ln w="9525">
+            <a:solidFill>
+              <a:srgbClr val="BFD3F5"/>
+            </a:solidFill>
+          </a:ln>
+          <a:effectLst/>
+        </p:spPr>
+        <p:txBody>
+          <a:bodyPr rtlCol="0" anchor="ctr" wrap="square"/>
+          <a:lstStyle/>
+          <a:p>
+            <a:pPr algn="ctr"/>
+          </a:p>
+        </p:txBody>
+      </p:sp>
+      <p:sp>
+        <p:nvSpPr>
+          <p:cNvPr id="29" name="TextBox 28"/>
+          <p:cNvSpPr txBox="1"/>
+          <p:nvPr/>
+        </p:nvSpPr>
+        <p:spPr>
+          <a:xfrm>
+            <a:off x="1238250" y="5832021"/>
+            <a:ext cx="8092440" cy="519793"/>
+          </a:xfrm>
+          <a:prstGeom prst="rect">
+            <a:avLst/>
+          </a:prstGeom>
+          <a:noFill/>
+        </p:spPr>
+        <p:txBody>
+          <a:bodyPr wrap="square" lIns="0" rIns="0" tIns="0" bIns="0" anchor="ctr">
+            <a:spAutoFit/>
+          </a:bodyPr>
+          <a:lstStyle/>
+          <a:p>
+            <a:pPr algn="l">
+              <a:lnSpc>
+                <a:spcPct val="115000"/>
+              </a:lnSpc>
+            </a:pPr>
+            <a:r>
+              <a:rPr sz="1875" b="1">
+                <a:solidFill>
+                  <a:srgbClr val="0D2B5E"/>
+                </a:solidFill>
+                <a:latin typeface="Pretendard"/>
+                <a:ea typeface="Pretendard"/>
+                <a:cs typeface="Pretendard"/>
+              </a:rPr>
+              <a:t>if msg.error(): …</a:t>
+            </a:r>
+          </a:p>
+        </p:txBody>
+      </p:sp>
+      <p:sp>
+        <p:nvSpPr>
+          <p:cNvPr id="30" name="Rounded Rectangle 29"/>
+          <p:cNvSpPr/>
+          <p:nvPr/>
+        </p:nvSpPr>
+        <p:spPr>
+          <a:xfrm>
+            <a:off x="9464040" y="5832021"/>
+            <a:ext cx="7680960" cy="519793"/>
+          </a:xfrm>
+          <a:prstGeom prst="roundRect">
+            <a:avLst>
+              <a:gd name="adj" fmla="val 7329"/>
+            </a:avLst>
+          </a:prstGeom>
+          <a:solidFill>
+            <a:srgbClr val="FAFBFD"/>
+          </a:solidFill>
+          <a:ln w="9525">
+            <a:solidFill>
+              <a:srgbClr val="DCE1E8"/>
+            </a:solidFill>
+          </a:ln>
+          <a:effectLst/>
+        </p:spPr>
+        <p:txBody>
+          <a:bodyPr rtlCol="0" anchor="ctr" wrap="square"/>
+          <a:lstStyle/>
+          <a:p>
+            <a:pPr algn="ctr"/>
+          </a:p>
+        </p:txBody>
+      </p:sp>
+      <p:sp>
+        <p:nvSpPr>
+          <p:cNvPr id="31" name="TextBox 30"/>
+          <p:cNvSpPr txBox="1"/>
+          <p:nvPr/>
+        </p:nvSpPr>
+        <p:spPr>
+          <a:xfrm>
+            <a:off x="9559290" y="5832021"/>
+            <a:ext cx="7490460" cy="519793"/>
+          </a:xfrm>
+          <a:prstGeom prst="rect">
+            <a:avLst/>
+          </a:prstGeom>
+          <a:noFill/>
+        </p:spPr>
+        <p:txBody>
+          <a:bodyPr wrap="square" lIns="0" rIns="0" tIns="0" bIns="0" anchor="ctr">
+            <a:spAutoFit/>
+          </a:bodyPr>
+          <a:lstStyle/>
+          <a:p>
+            <a:pPr algn="ctr">
+              <a:lnSpc>
+                <a:spcPct val="115000"/>
+              </a:lnSpc>
+            </a:pPr>
+            <a:r>
+              <a:rPr sz="1875" b="0">
+                <a:solidFill>
+                  <a:srgbClr val="3D3D3D"/>
+                </a:solidFill>
+                <a:latin typeface="Pretendard"/>
+                <a:ea typeface="Pretendard"/>
+                <a:cs typeface="Pretendard"/>
+              </a:rPr>
+              <a:t>오류를 조용히 넘기지 않는다</a:t>
+            </a:r>
+          </a:p>
+        </p:txBody>
+      </p:sp>
+      <p:sp>
+        <p:nvSpPr>
+          <p:cNvPr id="32" name="Rounded Rectangle 31"/>
+          <p:cNvSpPr/>
+          <p:nvPr/>
+        </p:nvSpPr>
+        <p:spPr>
+          <a:xfrm>
+            <a:off x="1143000" y="6428014"/>
+            <a:ext cx="8282940" cy="519793"/>
+          </a:xfrm>
+          <a:prstGeom prst="roundRect">
+            <a:avLst>
+              <a:gd name="adj" fmla="val 7329"/>
+            </a:avLst>
+          </a:prstGeom>
+          <a:solidFill>
+            <a:srgbClr val="EDF3FD"/>
+          </a:solidFill>
+          <a:ln w="9525">
+            <a:solidFill>
+              <a:srgbClr val="BFD3F5"/>
+            </a:solidFill>
+          </a:ln>
+          <a:effectLst/>
+        </p:spPr>
+        <p:txBody>
+          <a:bodyPr rtlCol="0" anchor="ctr" wrap="square"/>
+          <a:lstStyle/>
+          <a:p>
+            <a:pPr algn="ctr"/>
+          </a:p>
+        </p:txBody>
+      </p:sp>
+      <p:sp>
+        <p:nvSpPr>
+          <p:cNvPr id="33" name="TextBox 32"/>
+          <p:cNvSpPr txBox="1"/>
+          <p:nvPr/>
+        </p:nvSpPr>
+        <p:spPr>
+          <a:xfrm>
+            <a:off x="1238250" y="6428014"/>
+            <a:ext cx="8092440" cy="519793"/>
+          </a:xfrm>
+          <a:prstGeom prst="rect">
+            <a:avLst/>
+          </a:prstGeom>
+          <a:noFill/>
+        </p:spPr>
+        <p:txBody>
+          <a:bodyPr wrap="square" lIns="0" rIns="0" tIns="0" bIns="0" anchor="ctr">
+            <a:spAutoFit/>
+          </a:bodyPr>
+          <a:lstStyle/>
+          <a:p>
+            <a:pPr algn="l">
+              <a:lnSpc>
+                <a:spcPct val="115000"/>
+              </a:lnSpc>
+            </a:pPr>
+            <a:r>
+              <a:rPr sz="1875" b="1">
+                <a:solidFill>
+                  <a:srgbClr val="0D2B5E"/>
+                </a:solidFill>
+                <a:latin typeface="Pretendard"/>
+                <a:ea typeface="Pretendard"/>
+                <a:cs typeface="Pretendard"/>
+              </a:rPr>
+              <a:t>json.loads(msg.value().decode("utf-8"))</a:t>
+            </a:r>
+          </a:p>
+        </p:txBody>
+      </p:sp>
+      <p:sp>
+        <p:nvSpPr>
+          <p:cNvPr id="34" name="Rounded Rectangle 33"/>
+          <p:cNvSpPr/>
+          <p:nvPr/>
+        </p:nvSpPr>
+        <p:spPr>
+          <a:xfrm>
+            <a:off x="9464040" y="6428014"/>
+            <a:ext cx="7680960" cy="519793"/>
+          </a:xfrm>
+          <a:prstGeom prst="roundRect">
+            <a:avLst>
+              <a:gd name="adj" fmla="val 7329"/>
+            </a:avLst>
+          </a:prstGeom>
+          <a:solidFill>
+            <a:srgbClr val="FAFBFD"/>
+          </a:solidFill>
+          <a:ln w="9525">
+            <a:solidFill>
+              <a:srgbClr val="DCE1E8"/>
+            </a:solidFill>
+          </a:ln>
+          <a:effectLst/>
+        </p:spPr>
+        <p:txBody>
+          <a:bodyPr rtlCol="0" anchor="ctr" wrap="square"/>
+          <a:lstStyle/>
+          <a:p>
+            <a:pPr algn="ctr"/>
+          </a:p>
+        </p:txBody>
+      </p:sp>
+      <p:sp>
+        <p:nvSpPr>
+          <p:cNvPr id="35" name="TextBox 34"/>
+          <p:cNvSpPr txBox="1"/>
+          <p:nvPr/>
+        </p:nvSpPr>
+        <p:spPr>
+          <a:xfrm>
+            <a:off x="9559290" y="6428014"/>
+            <a:ext cx="7490460" cy="519793"/>
+          </a:xfrm>
+          <a:prstGeom prst="rect">
+            <a:avLst/>
+          </a:prstGeom>
+          <a:noFill/>
+        </p:spPr>
+        <p:txBody>
+          <a:bodyPr wrap="square" lIns="0" rIns="0" tIns="0" bIns="0" anchor="ctr">
+            <a:spAutoFit/>
+          </a:bodyPr>
+          <a:lstStyle/>
+          <a:p>
+            <a:pPr algn="ctr">
+              <a:lnSpc>
+                <a:spcPct val="115000"/>
+              </a:lnSpc>
+            </a:pPr>
+            <a:r>
+              <a:rPr sz="1875" b="0">
+                <a:solidFill>
+                  <a:srgbClr val="3D3D3D"/>
+                </a:solidFill>
+                <a:latin typeface="Pretendard"/>
+                <a:ea typeface="Pretendard"/>
+                <a:cs typeface="Pretendard"/>
+              </a:rPr>
+              <a:t>JSON 역직렬화</a:t>
+            </a:r>
+          </a:p>
+        </p:txBody>
+      </p:sp>
+      <p:sp>
+        <p:nvSpPr>
+          <p:cNvPr id="36" name="Rounded Rectangle 35"/>
+          <p:cNvSpPr/>
+          <p:nvPr/>
+        </p:nvSpPr>
+        <p:spPr>
+          <a:xfrm>
+            <a:off x="1143000" y="7024007"/>
+            <a:ext cx="8282940" cy="519793"/>
+          </a:xfrm>
+          <a:prstGeom prst="roundRect">
+            <a:avLst>
+              <a:gd name="adj" fmla="val 7329"/>
+            </a:avLst>
+          </a:prstGeom>
+          <a:solidFill>
+            <a:srgbClr val="EDF3FD"/>
+          </a:solidFill>
+          <a:ln w="9525">
+            <a:solidFill>
+              <a:srgbClr val="BFD3F5"/>
+            </a:solidFill>
+          </a:ln>
+          <a:effectLst/>
+        </p:spPr>
+        <p:txBody>
+          <a:bodyPr rtlCol="0" anchor="ctr" wrap="square"/>
+          <a:lstStyle/>
+          <a:p>
+            <a:pPr algn="ctr"/>
+          </a:p>
+        </p:txBody>
+      </p:sp>
+      <p:sp>
+        <p:nvSpPr>
+          <p:cNvPr id="37" name="TextBox 36"/>
+          <p:cNvSpPr txBox="1"/>
+          <p:nvPr/>
+        </p:nvSpPr>
+        <p:spPr>
+          <a:xfrm>
+            <a:off x="1238250" y="7024007"/>
+            <a:ext cx="8092440" cy="519793"/>
+          </a:xfrm>
+          <a:prstGeom prst="rect">
+            <a:avLst/>
+          </a:prstGeom>
+          <a:noFill/>
+        </p:spPr>
+        <p:txBody>
+          <a:bodyPr wrap="square" lIns="0" rIns="0" tIns="0" bIns="0" anchor="ctr">
+            <a:spAutoFit/>
+          </a:bodyPr>
+          <a:lstStyle/>
+          <a:p>
+            <a:pPr algn="l">
+              <a:lnSpc>
+                <a:spcPct val="115000"/>
+              </a:lnSpc>
+            </a:pPr>
+            <a:r>
+              <a:rPr sz="1875" b="1">
+                <a:solidFill>
+                  <a:srgbClr val="0D2B5E"/>
+                </a:solidFill>
+                <a:latin typeface="Pretendard"/>
+                <a:ea typeface="Pretendard"/>
+                <a:cs typeface="Pretendard"/>
+              </a:rPr>
+              <a:t>finally: c.close()</a:t>
+            </a:r>
+          </a:p>
+        </p:txBody>
+      </p:sp>
+      <p:sp>
+        <p:nvSpPr>
+          <p:cNvPr id="38" name="Rounded Rectangle 37"/>
+          <p:cNvSpPr/>
+          <p:nvPr/>
+        </p:nvSpPr>
+        <p:spPr>
+          <a:xfrm>
+            <a:off x="9464040" y="7024007"/>
+            <a:ext cx="7680960" cy="519793"/>
+          </a:xfrm>
+          <a:prstGeom prst="roundRect">
+            <a:avLst>
+              <a:gd name="adj" fmla="val 7329"/>
+            </a:avLst>
+          </a:prstGeom>
+          <a:solidFill>
+            <a:srgbClr val="FAFBFD"/>
+          </a:solidFill>
+          <a:ln w="9525">
+            <a:solidFill>
+              <a:srgbClr val="DCE1E8"/>
+            </a:solidFill>
+          </a:ln>
+          <a:effectLst/>
+        </p:spPr>
+        <p:txBody>
+          <a:bodyPr rtlCol="0" anchor="ctr" wrap="square"/>
+          <a:lstStyle/>
+          <a:p>
+            <a:pPr algn="ctr"/>
+          </a:p>
+        </p:txBody>
+      </p:sp>
+      <p:sp>
+        <p:nvSpPr>
+          <p:cNvPr id="39" name="TextBox 38"/>
+          <p:cNvSpPr txBox="1"/>
+          <p:nvPr/>
+        </p:nvSpPr>
+        <p:spPr>
+          <a:xfrm>
+            <a:off x="9559290" y="7024007"/>
+            <a:ext cx="7490460" cy="519793"/>
+          </a:xfrm>
+          <a:prstGeom prst="rect">
+            <a:avLst/>
+          </a:prstGeom>
+          <a:noFill/>
+        </p:spPr>
+        <p:txBody>
+          <a:bodyPr wrap="square" lIns="0" rIns="0" tIns="0" bIns="0" anchor="ctr">
+            <a:spAutoFit/>
+          </a:bodyPr>
+          <a:lstStyle/>
+          <a:p>
+            <a:pPr algn="ctr">
+              <a:lnSpc>
+                <a:spcPct val="115000"/>
+              </a:lnSpc>
+            </a:pPr>
+            <a:r>
+              <a:rPr sz="1875" b="0">
+                <a:solidFill>
+                  <a:srgbClr val="3D3D3D"/>
+                </a:solidFill>
+                <a:latin typeface="Pretendard"/>
+                <a:ea typeface="Pretendard"/>
+                <a:cs typeface="Pretendard"/>
+              </a:rPr>
+              <a:t>그룹 정상 탈퇴 + 오프셋 정리</a:t>
+            </a:r>
+          </a:p>
+        </p:txBody>
+      </p:sp>
+      <p:sp>
+        <p:nvSpPr>
+          <p:cNvPr id="40" name="TextBox 39"/>
+          <p:cNvSpPr txBox="1"/>
+          <p:nvPr/>
+        </p:nvSpPr>
+        <p:spPr>
+          <a:xfrm>
+            <a:off x="1143000" y="7620000"/>
+            <a:ext cx="16002000" cy="342900"/>
           </a:xfrm>
           <a:prstGeom prst="rect">
             <a:avLst/>
@@ -15065,94 +17319,35 @@
               </a:lnSpc>
             </a:pPr>
             <a:r>
-              <a:rPr sz="1800" b="1" spc="190">
-                <a:solidFill>
-                  <a:srgbClr val="1E5BC6"/>
-                </a:solidFill>
-                <a:latin typeface="Pretendard"/>
-                <a:ea typeface="Pretendard"/>
-                <a:cs typeface="Pretendard"/>
-              </a:rPr>
-              <a:t>LAG 관찰</a:t>
-            </a:r>
-          </a:p>
-        </p:txBody>
-      </p:sp>
-      <p:sp>
-        <p:nvSpPr>
-          <p:cNvPr id="25" name="TextBox 24"/>
-          <p:cNvSpPr txBox="1"/>
-          <p:nvPr/>
-        </p:nvSpPr>
-        <p:spPr>
-          <a:xfrm>
-            <a:off x="13487400" y="4329112"/>
-            <a:ext cx="3314700" cy="1238250"/>
-          </a:xfrm>
-          <a:prstGeom prst="rect">
-            <a:avLst/>
-          </a:prstGeom>
-          <a:noFill/>
-        </p:spPr>
-        <p:txBody>
-          <a:bodyPr wrap="square" lIns="0" rIns="0" tIns="0" bIns="0" anchor="t">
-            <a:spAutoFit/>
-          </a:bodyPr>
-          <a:lstStyle/>
-          <a:p>
-            <a:pPr algn="l">
-              <a:lnSpc>
-                <a:spcPct val="138000"/>
-              </a:lnSpc>
-            </a:pPr>
-            <a:r>
-              <a:rPr sz="2700" b="1">
-                <a:solidFill>
-                  <a:srgbClr val="0D2B5E"/>
-                </a:solidFill>
-                <a:latin typeface="Pretendard"/>
-                <a:ea typeface="Pretendard"/>
-                <a:cs typeface="Pretendard"/>
-              </a:rPr>
-              <a:t>꺼 두면 쌓이고</a:t>
-            </a:r>
-          </a:p>
-          <a:p>
-            <a:pPr algn="l">
-              <a:lnSpc>
-                <a:spcPct val="138000"/>
-              </a:lnSpc>
-            </a:pPr>
-            <a:r>
-              <a:rPr sz="2700" b="1">
-                <a:solidFill>
-                  <a:srgbClr val="0D2B5E"/>
-                </a:solidFill>
-                <a:latin typeface="Pretendard"/>
-                <a:ea typeface="Pretendard"/>
-                <a:cs typeface="Pretendard"/>
-              </a:rPr>
-              <a:t>켜면 0</a:t>
-            </a:r>
-          </a:p>
-        </p:txBody>
-      </p:sp>
-      <p:sp>
-        <p:nvSpPr>
-          <p:cNvPr id="26" name="Rectangle 25"/>
-          <p:cNvSpPr/>
-          <p:nvPr/>
-        </p:nvSpPr>
-        <p:spPr>
-          <a:xfrm>
-            <a:off x="1143000" y="7581900"/>
-            <a:ext cx="38100" cy="323850"/>
-          </a:xfrm>
-          <a:prstGeom prst="rect">
-            <a:avLst/>
-          </a:prstGeom>
-          <a:solidFill>
-            <a:srgbClr val="BFD3F5"/>
+              <a:rPr sz="1875" b="1">
+                <a:solidFill>
+                  <a:srgbClr val="7D7D7D"/>
+                </a:solidFill>
+                <a:latin typeface="Pretendard"/>
+                <a:ea typeface="Pretendard"/>
+                <a:cs typeface="Pretendard"/>
+              </a:rPr>
+              <a:t>터미널 2 가 새 창이면 cd ~/data-eng/week6 &amp;&amp; source .venv/bin/activate 부터 · JSONDecodeError 로 멈추면 실습점검 3단계로 orders 비우기</a:t>
+            </a:r>
+          </a:p>
+        </p:txBody>
+      </p:sp>
+      <p:sp>
+        <p:nvSpPr>
+          <p:cNvPr id="41" name="Rectangle 40"/>
+          <p:cNvSpPr/>
+          <p:nvPr/>
+        </p:nvSpPr>
+        <p:spPr>
+          <a:xfrm>
+            <a:off x="1143000" y="8058150"/>
+            <a:ext cx="16002000" cy="9525"/>
+          </a:xfrm>
+          <a:prstGeom prst="rect">
+            <a:avLst/>
+          </a:prstGeom>
+          <a:solidFill>
+            <a:srgbClr val="DCE1E8"/>
           </a:solidFill>
           <a:ln>
             <a:noFill/>
@@ -15169,78 +17364,7 @@
       </p:sp>
       <p:sp>
         <p:nvSpPr>
-          <p:cNvPr id="27" name="TextBox 26"/>
-          <p:cNvSpPr txBox="1"/>
-          <p:nvPr/>
-        </p:nvSpPr>
-        <p:spPr>
-          <a:xfrm>
-            <a:off x="1314450" y="7581900"/>
-            <a:ext cx="15830550" cy="342900"/>
-          </a:xfrm>
-          <a:prstGeom prst="rect">
-            <a:avLst/>
-          </a:prstGeom>
-          <a:noFill/>
-        </p:spPr>
-        <p:txBody>
-          <a:bodyPr wrap="square" lIns="0" rIns="0" tIns="0" bIns="0" anchor="t">
-            <a:spAutoFit/>
-          </a:bodyPr>
-          <a:lstStyle/>
-          <a:p>
-            <a:pPr algn="l">
-              <a:lnSpc>
-                <a:spcPct val="100000"/>
-              </a:lnSpc>
-            </a:pPr>
-            <a:r>
-              <a:rPr sz="1725" b="1">
-                <a:solidFill>
-                  <a:srgbClr val="7D7D7D"/>
-                </a:solidFill>
-                <a:latin typeface="Pretendard"/>
-                <a:ea typeface="Pretendard"/>
-                <a:cs typeface="Pretendard"/>
-              </a:rPr>
-              <a:t>kafka-consumer-groups.sh --describe --group order-agg · 수동 커밋 코드는 실패 메시지에서 계속 막힌다 — 실무는 재시도 뒤 DLQ</a:t>
-            </a:r>
-          </a:p>
-        </p:txBody>
-      </p:sp>
-      <p:sp>
-        <p:nvSpPr>
-          <p:cNvPr id="28" name="Rectangle 27"/>
-          <p:cNvSpPr/>
-          <p:nvPr/>
-        </p:nvSpPr>
-        <p:spPr>
-          <a:xfrm>
-            <a:off x="1143000" y="8058150"/>
-            <a:ext cx="16002000" cy="9525"/>
-          </a:xfrm>
-          <a:prstGeom prst="rect">
-            <a:avLst/>
-          </a:prstGeom>
-          <a:solidFill>
-            <a:srgbClr val="DCE1E8"/>
-          </a:solidFill>
-          <a:ln>
-            <a:noFill/>
-          </a:ln>
-          <a:effectLst/>
-        </p:spPr>
-        <p:txBody>
-          <a:bodyPr rtlCol="0" anchor="ctr" wrap="square"/>
-          <a:lstStyle/>
-          <a:p>
-            <a:pPr algn="ctr"/>
-          </a:p>
-        </p:txBody>
-      </p:sp>
-      <p:sp>
-        <p:nvSpPr>
-          <p:cNvPr id="29" name="TextBox 28"/>
+          <p:cNvPr id="42" name="TextBox 41"/>
           <p:cNvSpPr txBox="1"/>
           <p:nvPr/>
         </p:nvSpPr>
@@ -15281,7 +17405,7 @@
       </p:sp>
       <p:sp>
         <p:nvSpPr>
-          <p:cNvPr id="30" name="TextBox 29"/>
+          <p:cNvPr id="43" name="TextBox 42"/>
           <p:cNvSpPr txBox="1"/>
           <p:nvPr/>
         </p:nvSpPr>
